--- a/slides/ch03-organizing-and-drafting.pptx
+++ b/slides/ch03-organizing-and-drafting.pptx
@@ -30,6 +30,15 @@
     <p:sldId id="278" r:id="rId30"/>
     <p:sldId id="279" r:id="rId31"/>
     <p:sldId id="280" r:id="rId32"/>
+    <p:sldId id="281" r:id="rId33"/>
+    <p:sldId id="282" r:id="rId34"/>
+    <p:sldId id="283" r:id="rId35"/>
+    <p:sldId id="284" r:id="rId36"/>
+    <p:sldId id="285" r:id="rId37"/>
+    <p:sldId id="286" r:id="rId38"/>
+    <p:sldId id="287" r:id="rId39"/>
+    <p:sldId id="288" r:id="rId40"/>
+    <p:sldId id="289" r:id="rId41"/>
   </p:sldIdLst>
   <p:sldSz cx="12191695" cy="6858000" type="screen4x3"/>
   <p:notesSz cx="6858000" cy="9144000"/>
@@ -1506,7 +1515,7 @@
           <a:lstStyle/>
           <a:p>
             <a:r>
-              <a:t>Recap.</a:t>
+              <a:t>Section 6: visible structure. The outline made the logic; this section makes the logic visible at scanning speed.</a:t>
             </a:r>
           </a:p>
         </p:txBody>
@@ -1576,7 +1585,7 @@
           <a:lstStyle/>
           <a:p>
             <a:r>
-              <a:t>Position is emphasis.</a:t>
+              <a:t>The F-pattern is why the topic-sentence rule and bolded lead-ins are not decoration — they sit exactly where attention goes. Everything off the F-path is optional reading.</a:t>
             </a:r>
           </a:p>
         </p:txBody>
@@ -1646,7 +1655,7 @@
           <a:lstStyle/>
           <a:p>
             <a:r>
-              <a:t>Async-ready.</a:t>
+              <a:t>The choice broadcasts a claim about the content. A numbered list of unranked options invites the question 'why is this one first?'</a:t>
             </a:r>
           </a:p>
         </p:txBody>
@@ -1716,7 +1725,287 @@
           <a:lstStyle/>
           <a:p>
             <a:r>
-              <a:t>Delivery-neutral closing.</a:t>
+              <a:t>Lists get skimmed precisely because readers trust their structure — sloppy lists spend that trust. Parallelism review from Section 4 applies item-by-item.</a:t>
+            </a:r>
+          </a:p>
+        </p:txBody>
+      </p:sp>
+      <p:sp>
+        <p:nvSpPr>
+          <p:cNvPr id="4" name="Slide Number Placeholder 3"/>
+          <p:cNvSpPr>
+            <a:spLocks noGrp="1"/>
+          </p:cNvSpPr>
+          <p:nvPr>
+            <p:ph type="sldNum" idx="5" sz="quarter"/>
+          </p:nvPr>
+        </p:nvSpPr>
+        <p:spPr/>
+      </p:sp>
+    </p:spTree>
+  </p:cSld>
+  <p:clrMapOvr>
+    <a:masterClrMapping/>
+  </p:clrMapOvr>
+</p:notes>
+</file>
+
+<file path=ppt/notesSlides/notesSlide26.xml><?xml version="1.0" encoding="utf-8"?>
+<p:notes xmlns:a="http://schemas.openxmlformats.org/drawingml/2006/main" xmlns:p="http://schemas.openxmlformats.org/presentationml/2006/main" xmlns:r="http://schemas.openxmlformats.org/officeDocument/2006/relationships">
+  <p:cSld>
+    <p:spTree>
+      <p:nvGrpSpPr>
+        <p:cNvPr id="1" name=""/>
+        <p:cNvGrpSpPr/>
+        <p:nvPr/>
+      </p:nvGrpSpPr>
+      <p:grpSpPr>
+        <a:xfrm>
+          <a:off x="0" y="0"/>
+          <a:ext cx="0" cy="0"/>
+          <a:chOff x="0" y="0"/>
+          <a:chExt cx="0" cy="0"/>
+        </a:xfrm>
+      </p:grpSpPr>
+      <p:sp>
+        <p:nvSpPr>
+          <p:cNvPr id="2" name="Slide Image Placeholder 1"/>
+          <p:cNvSpPr>
+            <a:spLocks noGrp="1"/>
+          </p:cNvSpPr>
+          <p:nvPr>
+            <p:ph type="sldImg" idx="2"/>
+          </p:nvPr>
+        </p:nvSpPr>
+        <p:spPr/>
+      </p:sp>
+      <p:sp>
+        <p:nvSpPr>
+          <p:cNvPr id="3" name="Notes Placeholder 2"/>
+          <p:cNvSpPr>
+            <a:spLocks noGrp="1"/>
+          </p:cNvSpPr>
+          <p:nvPr>
+            <p:ph type="body" idx="3" sz="quarter"/>
+          </p:nvPr>
+        </p:nvSpPr>
+        <p:spPr/>
+        <p:txBody>
+          <a:bodyPr/>
+          <a:lstStyle/>
+          <a:p>
+            <a:r>
+              <a:t>Tables are for comparison and lookup; prose is for reasoning and relationship. Chapter 9 develops data displays fully — this is the drafting-level decision.</a:t>
+            </a:r>
+          </a:p>
+        </p:txBody>
+      </p:sp>
+      <p:sp>
+        <p:nvSpPr>
+          <p:cNvPr id="4" name="Slide Number Placeholder 3"/>
+          <p:cNvSpPr>
+            <a:spLocks noGrp="1"/>
+          </p:cNvSpPr>
+          <p:nvPr>
+            <p:ph type="sldNum" idx="5" sz="quarter"/>
+          </p:nvPr>
+        </p:nvSpPr>
+        <p:spPr/>
+      </p:sp>
+    </p:spTree>
+  </p:cSld>
+  <p:clrMapOvr>
+    <a:masterClrMapping/>
+  </p:clrMapOvr>
+</p:notes>
+</file>
+
+<file path=ppt/notesSlides/notesSlide27.xml><?xml version="1.0" encoding="utf-8"?>
+<p:notes xmlns:a="http://schemas.openxmlformats.org/drawingml/2006/main" xmlns:p="http://schemas.openxmlformats.org/presentationml/2006/main" xmlns:r="http://schemas.openxmlformats.org/officeDocument/2006/relationships">
+  <p:cSld>
+    <p:spTree>
+      <p:nvGrpSpPr>
+        <p:cNvPr id="1" name=""/>
+        <p:cNvGrpSpPr/>
+        <p:nvPr/>
+      </p:nvGrpSpPr>
+      <p:grpSpPr>
+        <a:xfrm>
+          <a:off x="0" y="0"/>
+          <a:ext cx="0" cy="0"/>
+          <a:chOff x="0" y="0"/>
+          <a:chExt cx="0" cy="0"/>
+        </a:xfrm>
+      </p:grpSpPr>
+      <p:sp>
+        <p:nvSpPr>
+          <p:cNvPr id="2" name="Slide Image Placeholder 1"/>
+          <p:cNvSpPr>
+            <a:spLocks noGrp="1"/>
+          </p:cNvSpPr>
+          <p:nvPr>
+            <p:ph type="sldImg" idx="2"/>
+          </p:nvPr>
+        </p:nvSpPr>
+        <p:spPr/>
+      </p:sp>
+      <p:sp>
+        <p:nvSpPr>
+          <p:cNvPr id="3" name="Notes Placeholder 2"/>
+          <p:cNvSpPr>
+            <a:spLocks noGrp="1"/>
+          </p:cNvSpPr>
+          <p:nvPr>
+            <p:ph type="body" idx="3" sz="quarter"/>
+          </p:nvPr>
+        </p:nvSpPr>
+        <p:spPr/>
+        <p:txBody>
+          <a:bodyPr/>
+          <a:lstStyle/>
+          <a:p>
+            <a:r>
+              <a:t>Transitions are promises. 'However' followed by agreement is a broken promise, and readers feel it even when they can't name it. Echoed key words (old-to-new) do the same work invisibly.</a:t>
+            </a:r>
+          </a:p>
+        </p:txBody>
+      </p:sp>
+      <p:sp>
+        <p:nvSpPr>
+          <p:cNvPr id="4" name="Slide Number Placeholder 3"/>
+          <p:cNvSpPr>
+            <a:spLocks noGrp="1"/>
+          </p:cNvSpPr>
+          <p:nvPr>
+            <p:ph type="sldNum" idx="5" sz="quarter"/>
+          </p:nvPr>
+        </p:nvSpPr>
+        <p:spPr/>
+      </p:sp>
+    </p:spTree>
+  </p:cSld>
+  <p:clrMapOvr>
+    <a:masterClrMapping/>
+  </p:clrMapOvr>
+</p:notes>
+</file>
+
+<file path=ppt/notesSlides/notesSlide28.xml><?xml version="1.0" encoding="utf-8"?>
+<p:notes xmlns:a="http://schemas.openxmlformats.org/drawingml/2006/main" xmlns:p="http://schemas.openxmlformats.org/presentationml/2006/main" xmlns:r="http://schemas.openxmlformats.org/officeDocument/2006/relationships">
+  <p:cSld>
+    <p:spTree>
+      <p:nvGrpSpPr>
+        <p:cNvPr id="1" name=""/>
+        <p:cNvGrpSpPr/>
+        <p:nvPr/>
+      </p:nvGrpSpPr>
+      <p:grpSpPr>
+        <a:xfrm>
+          <a:off x="0" y="0"/>
+          <a:ext cx="0" cy="0"/>
+          <a:chOff x="0" y="0"/>
+          <a:chExt cx="0" cy="0"/>
+        </a:xfrm>
+      </p:grpSpPr>
+      <p:sp>
+        <p:nvSpPr>
+          <p:cNvPr id="2" name="Slide Image Placeholder 1"/>
+          <p:cNvSpPr>
+            <a:spLocks noGrp="1"/>
+          </p:cNvSpPr>
+          <p:nvPr>
+            <p:ph type="sldImg" idx="2"/>
+          </p:nvPr>
+        </p:nvSpPr>
+        <p:spPr/>
+      </p:sp>
+      <p:sp>
+        <p:nvSpPr>
+          <p:cNvPr id="3" name="Notes Placeholder 2"/>
+          <p:cNvSpPr>
+            <a:spLocks noGrp="1"/>
+          </p:cNvSpPr>
+          <p:nvPr>
+            <p:ph type="body" idx="3" sz="quarter"/>
+          </p:nvPr>
+        </p:nvSpPr>
+        <p:spPr/>
+        <p:txBody>
+          <a:bodyPr/>
+          <a:lstStyle/>
+          <a:p>
+            <a:r>
+              <a:t>Openings are where the buried-recommendation failure begins. The reader's first question is always 'what is this and what do you need from me?' — answer it immediately.</a:t>
+            </a:r>
+          </a:p>
+        </p:txBody>
+      </p:sp>
+      <p:sp>
+        <p:nvSpPr>
+          <p:cNvPr id="4" name="Slide Number Placeholder 3"/>
+          <p:cNvSpPr>
+            <a:spLocks noGrp="1"/>
+          </p:cNvSpPr>
+          <p:nvPr>
+            <p:ph type="sldNum" idx="5" sz="quarter"/>
+          </p:nvPr>
+        </p:nvSpPr>
+        <p:spPr/>
+      </p:sp>
+    </p:spTree>
+  </p:cSld>
+  <p:clrMapOvr>
+    <a:masterClrMapping/>
+  </p:clrMapOvr>
+</p:notes>
+</file>
+
+<file path=ppt/notesSlides/notesSlide29.xml><?xml version="1.0" encoding="utf-8"?>
+<p:notes xmlns:a="http://schemas.openxmlformats.org/drawingml/2006/main" xmlns:p="http://schemas.openxmlformats.org/presentationml/2006/main" xmlns:r="http://schemas.openxmlformats.org/officeDocument/2006/relationships">
+  <p:cSld>
+    <p:spTree>
+      <p:nvGrpSpPr>
+        <p:cNvPr id="1" name=""/>
+        <p:cNvGrpSpPr/>
+        <p:nvPr/>
+      </p:nvGrpSpPr>
+      <p:grpSpPr>
+        <a:xfrm>
+          <a:off x="0" y="0"/>
+          <a:ext cx="0" cy="0"/>
+          <a:chOff x="0" y="0"/>
+          <a:chExt cx="0" cy="0"/>
+        </a:xfrm>
+      </p:grpSpPr>
+      <p:sp>
+        <p:nvSpPr>
+          <p:cNvPr id="2" name="Slide Image Placeholder 1"/>
+          <p:cNvSpPr>
+            <a:spLocks noGrp="1"/>
+          </p:cNvSpPr>
+          <p:nvPr>
+            <p:ph type="sldImg" idx="2"/>
+          </p:nvPr>
+        </p:nvSpPr>
+        <p:spPr/>
+      </p:sp>
+      <p:sp>
+        <p:nvSpPr>
+          <p:cNvPr id="3" name="Notes Placeholder 2"/>
+          <p:cNvSpPr>
+            <a:spLocks noGrp="1"/>
+          </p:cNvSpPr>
+          <p:nvPr>
+            <p:ph type="body" idx="3" sz="quarter"/>
+          </p:nvPr>
+        </p:nvSpPr>
+        <p:spPr/>
+        <p:txBody>
+          <a:bodyPr/>
+          <a:lstStyle/>
+          <a:p>
+            <a:r>
+              <a:t>Closings are the stress position of the whole message — what sits there is what gets remembered and acted on. Deadlines without dates are decorations.</a:t>
             </a:r>
           </a:p>
         </p:txBody>
@@ -1787,6 +2076,356 @@
           <a:p>
             <a:r>
               <a:t>Section 1.</a:t>
+            </a:r>
+          </a:p>
+        </p:txBody>
+      </p:sp>
+      <p:sp>
+        <p:nvSpPr>
+          <p:cNvPr id="4" name="Slide Number Placeholder 3"/>
+          <p:cNvSpPr>
+            <a:spLocks noGrp="1"/>
+          </p:cNvSpPr>
+          <p:nvPr>
+            <p:ph type="sldNum" idx="5" sz="quarter"/>
+          </p:nvPr>
+        </p:nvSpPr>
+        <p:spPr/>
+      </p:sp>
+    </p:spTree>
+  </p:cSld>
+  <p:clrMapOvr>
+    <a:masterClrMapping/>
+  </p:clrMapOvr>
+</p:notes>
+</file>
+
+<file path=ppt/notesSlides/notesSlide30.xml><?xml version="1.0" encoding="utf-8"?>
+<p:notes xmlns:a="http://schemas.openxmlformats.org/drawingml/2006/main" xmlns:p="http://schemas.openxmlformats.org/presentationml/2006/main" xmlns:r="http://schemas.openxmlformats.org/officeDocument/2006/relationships">
+  <p:cSld>
+    <p:spTree>
+      <p:nvGrpSpPr>
+        <p:cNvPr id="1" name=""/>
+        <p:cNvGrpSpPr/>
+        <p:nvPr/>
+      </p:nvGrpSpPr>
+      <p:grpSpPr>
+        <a:xfrm>
+          <a:off x="0" y="0"/>
+          <a:ext cx="0" cy="0"/>
+          <a:chOff x="0" y="0"/>
+          <a:chExt cx="0" cy="0"/>
+        </a:xfrm>
+      </p:grpSpPr>
+      <p:sp>
+        <p:nvSpPr>
+          <p:cNvPr id="2" name="Slide Image Placeholder 1"/>
+          <p:cNvSpPr>
+            <a:spLocks noGrp="1"/>
+          </p:cNvSpPr>
+          <p:nvPr>
+            <p:ph type="sldImg" idx="2"/>
+          </p:nvPr>
+        </p:nvSpPr>
+        <p:spPr/>
+      </p:sp>
+      <p:sp>
+        <p:nvSpPr>
+          <p:cNvPr id="3" name="Notes Placeholder 2"/>
+          <p:cNvSpPr>
+            <a:spLocks noGrp="1"/>
+          </p:cNvSpPr>
+          <p:nvPr>
+            <p:ph type="body" idx="3" sz="quarter"/>
+          </p:nvPr>
+        </p:nvSpPr>
+        <p:spPr/>
+        <p:txBody>
+          <a:bodyPr/>
+          <a:lstStyle/>
+          <a:p>
+            <a:r>
+              <a:t>Common real-world repair: the writer did the analysis and hid it in paragraph form. The rewrite splits the jobs — table for lookup, sentences for judgment.</a:t>
+            </a:r>
+          </a:p>
+        </p:txBody>
+      </p:sp>
+      <p:sp>
+        <p:nvSpPr>
+          <p:cNvPr id="4" name="Slide Number Placeholder 3"/>
+          <p:cNvSpPr>
+            <a:spLocks noGrp="1"/>
+          </p:cNvSpPr>
+          <p:nvPr>
+            <p:ph type="sldNum" idx="5" sz="quarter"/>
+          </p:nvPr>
+        </p:nvSpPr>
+        <p:spPr/>
+      </p:sp>
+    </p:spTree>
+  </p:cSld>
+  <p:clrMapOvr>
+    <a:masterClrMapping/>
+  </p:clrMapOvr>
+</p:notes>
+</file>
+
+<file path=ppt/notesSlides/notesSlide31.xml><?xml version="1.0" encoding="utf-8"?>
+<p:notes xmlns:a="http://schemas.openxmlformats.org/drawingml/2006/main" xmlns:p="http://schemas.openxmlformats.org/presentationml/2006/main" xmlns:r="http://schemas.openxmlformats.org/officeDocument/2006/relationships">
+  <p:cSld>
+    <p:spTree>
+      <p:nvGrpSpPr>
+        <p:cNvPr id="1" name=""/>
+        <p:cNvGrpSpPr/>
+        <p:nvPr/>
+      </p:nvGrpSpPr>
+      <p:grpSpPr>
+        <a:xfrm>
+          <a:off x="0" y="0"/>
+          <a:ext cx="0" cy="0"/>
+          <a:chOff x="0" y="0"/>
+          <a:chExt cx="0" cy="0"/>
+        </a:xfrm>
+      </p:grpSpPr>
+      <p:sp>
+        <p:nvSpPr>
+          <p:cNvPr id="2" name="Slide Image Placeholder 1"/>
+          <p:cNvSpPr>
+            <a:spLocks noGrp="1"/>
+          </p:cNvSpPr>
+          <p:nvPr>
+            <p:ph type="sldImg" idx="2"/>
+          </p:nvPr>
+        </p:nvSpPr>
+        <p:spPr/>
+      </p:sp>
+      <p:sp>
+        <p:nvSpPr>
+          <p:cNvPr id="3" name="Notes Placeholder 2"/>
+          <p:cNvSpPr>
+            <a:spLocks noGrp="1"/>
+          </p:cNvSpPr>
+          <p:nvPr>
+            <p:ph type="body" idx="3" sz="quarter"/>
+          </p:nvPr>
+        </p:nvSpPr>
+        <p:spPr/>
+        <p:txBody>
+          <a:bodyPr/>
+          <a:lstStyle/>
+          <a:p>
+            <a:r>
+              <a:t>Recap.</a:t>
+            </a:r>
+          </a:p>
+        </p:txBody>
+      </p:sp>
+      <p:sp>
+        <p:nvSpPr>
+          <p:cNvPr id="4" name="Slide Number Placeholder 3"/>
+          <p:cNvSpPr>
+            <a:spLocks noGrp="1"/>
+          </p:cNvSpPr>
+          <p:nvPr>
+            <p:ph type="sldNum" idx="5" sz="quarter"/>
+          </p:nvPr>
+        </p:nvSpPr>
+        <p:spPr/>
+      </p:sp>
+    </p:spTree>
+  </p:cSld>
+  <p:clrMapOvr>
+    <a:masterClrMapping/>
+  </p:clrMapOvr>
+</p:notes>
+</file>
+
+<file path=ppt/notesSlides/notesSlide32.xml><?xml version="1.0" encoding="utf-8"?>
+<p:notes xmlns:a="http://schemas.openxmlformats.org/drawingml/2006/main" xmlns:p="http://schemas.openxmlformats.org/presentationml/2006/main" xmlns:r="http://schemas.openxmlformats.org/officeDocument/2006/relationships">
+  <p:cSld>
+    <p:spTree>
+      <p:nvGrpSpPr>
+        <p:cNvPr id="1" name=""/>
+        <p:cNvGrpSpPr/>
+        <p:nvPr/>
+      </p:nvGrpSpPr>
+      <p:grpSpPr>
+        <a:xfrm>
+          <a:off x="0" y="0"/>
+          <a:ext cx="0" cy="0"/>
+          <a:chOff x="0" y="0"/>
+          <a:chExt cx="0" cy="0"/>
+        </a:xfrm>
+      </p:grpSpPr>
+      <p:sp>
+        <p:nvSpPr>
+          <p:cNvPr id="2" name="Slide Image Placeholder 1"/>
+          <p:cNvSpPr>
+            <a:spLocks noGrp="1"/>
+          </p:cNvSpPr>
+          <p:nvPr>
+            <p:ph type="sldImg" idx="2"/>
+          </p:nvPr>
+        </p:nvSpPr>
+        <p:spPr/>
+      </p:sp>
+      <p:sp>
+        <p:nvSpPr>
+          <p:cNvPr id="3" name="Notes Placeholder 2"/>
+          <p:cNvSpPr>
+            <a:spLocks noGrp="1"/>
+          </p:cNvSpPr>
+          <p:nvPr>
+            <p:ph type="body" idx="3" sz="quarter"/>
+          </p:nvPr>
+        </p:nvSpPr>
+        <p:spPr/>
+        <p:txBody>
+          <a:bodyPr/>
+          <a:lstStyle/>
+          <a:p>
+            <a:r>
+              <a:t>Position is emphasis.</a:t>
+            </a:r>
+          </a:p>
+        </p:txBody>
+      </p:sp>
+      <p:sp>
+        <p:nvSpPr>
+          <p:cNvPr id="4" name="Slide Number Placeholder 3"/>
+          <p:cNvSpPr>
+            <a:spLocks noGrp="1"/>
+          </p:cNvSpPr>
+          <p:nvPr>
+            <p:ph type="sldNum" idx="5" sz="quarter"/>
+          </p:nvPr>
+        </p:nvSpPr>
+        <p:spPr/>
+      </p:sp>
+    </p:spTree>
+  </p:cSld>
+  <p:clrMapOvr>
+    <a:masterClrMapping/>
+  </p:clrMapOvr>
+</p:notes>
+</file>
+
+<file path=ppt/notesSlides/notesSlide33.xml><?xml version="1.0" encoding="utf-8"?>
+<p:notes xmlns:a="http://schemas.openxmlformats.org/drawingml/2006/main" xmlns:p="http://schemas.openxmlformats.org/presentationml/2006/main" xmlns:r="http://schemas.openxmlformats.org/officeDocument/2006/relationships">
+  <p:cSld>
+    <p:spTree>
+      <p:nvGrpSpPr>
+        <p:cNvPr id="1" name=""/>
+        <p:cNvGrpSpPr/>
+        <p:nvPr/>
+      </p:nvGrpSpPr>
+      <p:grpSpPr>
+        <a:xfrm>
+          <a:off x="0" y="0"/>
+          <a:ext cx="0" cy="0"/>
+          <a:chOff x="0" y="0"/>
+          <a:chExt cx="0" cy="0"/>
+        </a:xfrm>
+      </p:grpSpPr>
+      <p:sp>
+        <p:nvSpPr>
+          <p:cNvPr id="2" name="Slide Image Placeholder 1"/>
+          <p:cNvSpPr>
+            <a:spLocks noGrp="1"/>
+          </p:cNvSpPr>
+          <p:nvPr>
+            <p:ph type="sldImg" idx="2"/>
+          </p:nvPr>
+        </p:nvSpPr>
+        <p:spPr/>
+      </p:sp>
+      <p:sp>
+        <p:nvSpPr>
+          <p:cNvPr id="3" name="Notes Placeholder 2"/>
+          <p:cNvSpPr>
+            <a:spLocks noGrp="1"/>
+          </p:cNvSpPr>
+          <p:nvPr>
+            <p:ph type="body" idx="3" sz="quarter"/>
+          </p:nvPr>
+        </p:nvSpPr>
+        <p:spPr/>
+        <p:txBody>
+          <a:bodyPr/>
+          <a:lstStyle/>
+          <a:p>
+            <a:r>
+              <a:t>Async-ready.</a:t>
+            </a:r>
+          </a:p>
+        </p:txBody>
+      </p:sp>
+      <p:sp>
+        <p:nvSpPr>
+          <p:cNvPr id="4" name="Slide Number Placeholder 3"/>
+          <p:cNvSpPr>
+            <a:spLocks noGrp="1"/>
+          </p:cNvSpPr>
+          <p:nvPr>
+            <p:ph type="sldNum" idx="5" sz="quarter"/>
+          </p:nvPr>
+        </p:nvSpPr>
+        <p:spPr/>
+      </p:sp>
+    </p:spTree>
+  </p:cSld>
+  <p:clrMapOvr>
+    <a:masterClrMapping/>
+  </p:clrMapOvr>
+</p:notes>
+</file>
+
+<file path=ppt/notesSlides/notesSlide34.xml><?xml version="1.0" encoding="utf-8"?>
+<p:notes xmlns:a="http://schemas.openxmlformats.org/drawingml/2006/main" xmlns:p="http://schemas.openxmlformats.org/presentationml/2006/main" xmlns:r="http://schemas.openxmlformats.org/officeDocument/2006/relationships">
+  <p:cSld>
+    <p:spTree>
+      <p:nvGrpSpPr>
+        <p:cNvPr id="1" name=""/>
+        <p:cNvGrpSpPr/>
+        <p:nvPr/>
+      </p:nvGrpSpPr>
+      <p:grpSpPr>
+        <a:xfrm>
+          <a:off x="0" y="0"/>
+          <a:ext cx="0" cy="0"/>
+          <a:chOff x="0" y="0"/>
+          <a:chExt cx="0" cy="0"/>
+        </a:xfrm>
+      </p:grpSpPr>
+      <p:sp>
+        <p:nvSpPr>
+          <p:cNvPr id="2" name="Slide Image Placeholder 1"/>
+          <p:cNvSpPr>
+            <a:spLocks noGrp="1"/>
+          </p:cNvSpPr>
+          <p:nvPr>
+            <p:ph type="sldImg" idx="2"/>
+          </p:nvPr>
+        </p:nvSpPr>
+        <p:spPr/>
+      </p:sp>
+      <p:sp>
+        <p:nvSpPr>
+          <p:cNvPr id="3" name="Notes Placeholder 2"/>
+          <p:cNvSpPr>
+            <a:spLocks noGrp="1"/>
+          </p:cNvSpPr>
+          <p:nvPr>
+            <p:ph type="body" idx="3" sz="quarter"/>
+          </p:nvPr>
+        </p:nvSpPr>
+        <p:spPr/>
+        <p:txBody>
+          <a:bodyPr/>
+          <a:lstStyle/>
+          <a:p>
+            <a:r>
+              <a:t>Delivery-neutral closing.</a:t>
             </a:r>
           </a:p>
         </p:txBody>
@@ -9908,6 +10547,212 @@
     <p:bg>
       <p:bgPr>
         <a:solidFill>
+          <a:srgbClr val="0E4D33"/>
+        </a:solidFill>
+        <a:effectLst/>
+      </p:bgPr>
+    </p:bg>
+    <p:spTree>
+      <p:nvGrpSpPr>
+        <p:cNvPr id="1" name=""/>
+        <p:cNvGrpSpPr/>
+        <p:nvPr/>
+      </p:nvGrpSpPr>
+      <p:grpSpPr/>
+      <p:sp>
+        <p:nvSpPr>
+          <p:cNvPr id="2" name="Title 1" descr="Slide title: Structure the eye can see"/>
+          <p:cNvSpPr>
+            <a:spLocks noGrp="1"/>
+          </p:cNvSpPr>
+          <p:nvPr>
+            <p:ph type="title"/>
+          </p:nvPr>
+        </p:nvSpPr>
+        <p:spPr>
+          <a:xfrm>
+            <a:off x="822960" y="2834640"/>
+            <a:ext cx="10515600" cy="914400"/>
+          </a:xfrm>
+        </p:spPr>
+        <p:txBody>
+          <a:bodyPr wrap="square"/>
+          <a:lstStyle/>
+          <a:p>
+            <a:pPr algn="l"/>
+            <a:r>
+              <a:rPr sz="4000" b="1">
+                <a:solidFill>
+                  <a:srgbClr val="FFFFFF"/>
+                </a:solidFill>
+                <a:latin typeface="Cambria"/>
+              </a:rPr>
+              <a:t>Structure the eye can see</a:t>
+            </a:r>
+          </a:p>
+        </p:txBody>
+      </p:sp>
+      <p:sp>
+        <p:nvSpPr>
+          <p:cNvPr id="3" name="TextBox 2" descr="Section number 06"/>
+          <p:cNvSpPr txBox="1"/>
+          <p:nvPr/>
+        </p:nvSpPr>
+        <p:spPr>
+          <a:xfrm>
+            <a:off x="822960" y="1188720"/>
+            <a:ext cx="2743200" cy="1463040"/>
+          </a:xfrm>
+          <a:prstGeom prst="rect">
+            <a:avLst/>
+          </a:prstGeom>
+          <a:noFill/>
+        </p:spPr>
+        <p:txBody>
+          <a:bodyPr wrap="square">
+            <a:spAutoFit/>
+          </a:bodyPr>
+          <a:lstStyle/>
+          <a:p>
+            <a:pPr algn="l">
+              <a:spcAft>
+                <a:spcPts val="800"/>
+              </a:spcAft>
+            </a:pPr>
+            <a:r>
+              <a:rPr sz="8000" b="1" i="0">
+                <a:solidFill>
+                  <a:srgbClr val="C9931A"/>
+                </a:solidFill>
+                <a:latin typeface="Cambria"/>
+              </a:rPr>
+              <a:t>06</a:t>
+            </a:r>
+          </a:p>
+        </p:txBody>
+      </p:sp>
+      <p:sp>
+        <p:nvSpPr>
+          <p:cNvPr id="4" name="TextBox 3" descr="Section note"/>
+          <p:cNvSpPr txBox="1"/>
+          <p:nvPr/>
+        </p:nvSpPr>
+        <p:spPr>
+          <a:xfrm>
+            <a:off x="822960" y="4023360"/>
+            <a:ext cx="9601200" cy="1097280"/>
+          </a:xfrm>
+          <a:prstGeom prst="rect">
+            <a:avLst/>
+          </a:prstGeom>
+          <a:noFill/>
+        </p:spPr>
+        <p:txBody>
+          <a:bodyPr wrap="square">
+            <a:spAutoFit/>
+          </a:bodyPr>
+          <a:lstStyle/>
+          <a:p>
+            <a:pPr algn="l">
+              <a:spcAft>
+                <a:spcPts val="800"/>
+              </a:spcAft>
+            </a:pPr>
+            <a:r>
+              <a:rPr sz="1700" b="0" i="0">
+                <a:solidFill>
+                  <a:srgbClr val="EAF1EB"/>
+                </a:solidFill>
+                <a:latin typeface="Calibri"/>
+              </a:rPr>
+              <a:t>Lists, tables, transitions — and the way screens are actually read.</a:t>
+            </a:r>
+          </a:p>
+        </p:txBody>
+      </p:sp>
+      <p:sp>
+        <p:nvSpPr>
+          <p:cNvPr id="5" name="TextBox 4" descr="Footer: BADM 225 · Chapter 3"/>
+          <p:cNvSpPr txBox="1"/>
+          <p:nvPr/>
+        </p:nvSpPr>
+        <p:spPr>
+          <a:xfrm>
+            <a:off x="502920" y="6446520"/>
+            <a:ext cx="5486400" cy="320040"/>
+          </a:xfrm>
+          <a:prstGeom prst="rect">
+            <a:avLst/>
+          </a:prstGeom>
+          <a:noFill/>
+        </p:spPr>
+        <p:txBody>
+          <a:bodyPr wrap="none">
+            <a:spAutoFit/>
+          </a:bodyPr>
+          <a:lstStyle/>
+          <a:p>
+            <a:r>
+              <a:rPr sz="1000">
+                <a:solidFill>
+                  <a:srgbClr val="5E6B64"/>
+                </a:solidFill>
+                <a:latin typeface="Calibri"/>
+              </a:rPr>
+              <a:t>BADM 225 · Chapter 3</a:t>
+            </a:r>
+          </a:p>
+        </p:txBody>
+      </p:sp>
+      <p:sp>
+        <p:nvSpPr>
+          <p:cNvPr id="6" name="TextBox 5" descr="Slide number 22"/>
+          <p:cNvSpPr txBox="1"/>
+          <p:nvPr/>
+        </p:nvSpPr>
+        <p:spPr>
+          <a:xfrm>
+            <a:off x="11247120" y="6446520"/>
+            <a:ext cx="640080" cy="320040"/>
+          </a:xfrm>
+          <a:prstGeom prst="rect">
+            <a:avLst/>
+          </a:prstGeom>
+          <a:noFill/>
+        </p:spPr>
+        <p:txBody>
+          <a:bodyPr wrap="none">
+            <a:spAutoFit/>
+          </a:bodyPr>
+          <a:lstStyle/>
+          <a:p>
+            <a:pPr algn="r"/>
+            <a:r>
+              <a:rPr sz="1000">
+                <a:solidFill>
+                  <a:srgbClr val="5E6B64"/>
+                </a:solidFill>
+                <a:latin typeface="Calibri"/>
+              </a:rPr>
+              <a:t>22</a:t>
+            </a:r>
+          </a:p>
+        </p:txBody>
+      </p:sp>
+    </p:spTree>
+  </p:cSld>
+  <p:clrMapOvr>
+    <a:masterClrMapping/>
+  </p:clrMapOvr>
+</p:sld>
+</file>
+
+<file path=ppt/slides/slide23.xml><?xml version="1.0" encoding="utf-8"?>
+<p:sld xmlns:a="http://schemas.openxmlformats.org/drawingml/2006/main" xmlns:p="http://schemas.openxmlformats.org/presentationml/2006/main" xmlns:r="http://schemas.openxmlformats.org/officeDocument/2006/relationships">
+  <p:cSld>
+    <p:bg>
+      <p:bgPr>
+        <a:solidFill>
           <a:srgbClr val="FFFFFF"/>
         </a:solidFill>
         <a:effectLst/>
@@ -9922,7 +10767,7 @@
       <p:grpSpPr/>
       <p:sp>
         <p:nvSpPr>
-          <p:cNvPr id="2" name="Title 1" descr="Slide title: Key takeaways"/>
+          <p:cNvPr id="2" name="Title 1" descr="Slide title: How screens are actually read"/>
           <p:cNvSpPr>
             <a:spLocks noGrp="1"/>
           </p:cNvSpPr>
@@ -9948,7 +10793,7 @@
                 </a:solidFill>
                 <a:latin typeface="Cambria"/>
               </a:rPr>
-              <a:t>Key takeaways</a:t>
+              <a:t>How screens are actually read</a:t>
             </a:r>
           </a:p>
         </p:txBody>
@@ -9989,7 +10834,7 @@
       </p:sp>
       <p:sp>
         <p:nvSpPr>
-          <p:cNvPr id="4" name="TextBox 3" descr="Slide number 22"/>
+          <p:cNvPr id="4" name="TextBox 3" descr="Slide number 23"/>
           <p:cNvSpPr txBox="1"/>
           <p:nvPr/>
         </p:nvSpPr>
@@ -10017,23 +10862,23 @@
                 </a:solidFill>
                 <a:latin typeface="Calibri"/>
               </a:rPr>
-              <a:t>22</a:t>
-            </a:r>
-          </a:p>
-        </p:txBody>
-      </p:sp>
-      <p:sp>
-        <p:nvSpPr>
-          <p:cNvPr id="5" name="Oval 4" descr="Checkmark"/>
+              <a:t>23</a:t>
+            </a:r>
+          </a:p>
+        </p:txBody>
+      </p:sp>
+      <p:sp>
+        <p:nvSpPr>
+          <p:cNvPr id="5" name="Rounded Rectangle 4" descr="Highlighted statistic"/>
           <p:cNvSpPr/>
           <p:nvPr/>
         </p:nvSpPr>
         <p:spPr>
           <a:xfrm>
-            <a:off x="640080" y="1572768"/>
-            <a:ext cx="420624" cy="420624"/>
-          </a:xfrm>
-          <a:prstGeom prst="ellipse">
+            <a:off x="548640" y="1645920"/>
+            <a:ext cx="4206240" cy="4206240"/>
+          </a:xfrm>
+          <a:prstGeom prst="roundRect">
             <a:avLst/>
           </a:prstGeom>
           <a:solidFill>
@@ -10059,32 +10904,52 @@
           </a:fontRef>
         </p:style>
         <p:txBody>
-          <a:bodyPr rtlCol="0" anchor="ctr" lIns="0" rIns="0" tIns="0" bIns="0"/>
-          <a:lstStyle/>
-          <a:p>
-            <a:pPr algn="ctr"/>
-            <a:r>
-              <a:rPr sz="1100" b="1">
+          <a:bodyPr rtlCol="0" anchor="t" wrap="square" lIns="164592" rIns="164592" tIns="128016" bIns="109728"/>
+          <a:lstStyle/>
+          <a:p>
+            <a:pPr algn="ctr">
+              <a:spcAft>
+                <a:spcPts val="400"/>
+              </a:spcAft>
+            </a:pPr>
+            <a:r>
+              <a:rPr sz="6400" b="1">
                 <a:solidFill>
                   <a:srgbClr val="FFFFFF"/>
                 </a:solidFill>
-                <a:latin typeface="Calibri"/>
-              </a:rPr>
-              <a:t>✓</a:t>
-            </a:r>
-          </a:p>
-        </p:txBody>
-      </p:sp>
-      <p:sp>
-        <p:nvSpPr>
-          <p:cNvPr id="6" name="TextBox 5" descr="Takeaway 1"/>
+                <a:latin typeface="Cambria"/>
+              </a:rPr>
+              <a:t>F</a:t>
+            </a:r>
+          </a:p>
+          <a:p>
+            <a:pPr algn="ctr">
+              <a:spcAft>
+                <a:spcPts val="800"/>
+              </a:spcAft>
+            </a:pPr>
+            <a:r>
+              <a:rPr sz="1500" b="0" i="0">
+                <a:solidFill>
+                  <a:srgbClr val="EAF1EB"/>
+                </a:solidFill>
+                <a:latin typeface="Calibri"/>
+              </a:rPr>
+              <a:t>Eye-tracking research shows readers scan web pages and email in an F-shape: across the top, a shorter sweep lower down, then straight down the left edge (Nielsen Norman Group).</a:t>
+            </a:r>
+          </a:p>
+        </p:txBody>
+      </p:sp>
+      <p:sp>
+        <p:nvSpPr>
+          <p:cNvPr id="6" name="TextBox 5" descr="Supporting points"/>
           <p:cNvSpPr txBox="1"/>
           <p:nvPr/>
         </p:nvSpPr>
         <p:spPr>
           <a:xfrm>
-            <a:off x="1325880" y="1554480"/>
-            <a:ext cx="10332720" cy="640080"/>
+            <a:off x="5212080" y="1737360"/>
+            <a:ext cx="6400800" cy="4297680"/>
           </a:xfrm>
           <a:prstGeom prst="rect">
             <a:avLst/>
@@ -10099,37 +10964,251 @@
           <a:p>
             <a:pPr algn="l">
               <a:spcAft>
-                <a:spcPts val="800"/>
+                <a:spcPts val="1400"/>
               </a:spcAft>
             </a:pPr>
             <a:r>
-              <a:rPr sz="1550" b="0" i="0">
+              <a:rPr sz="1600">
+                <a:solidFill>
+                  <a:srgbClr val="8A6410"/>
+                </a:solidFill>
+                <a:latin typeface="Calibri"/>
+              </a:rPr>
+              <a:t>▪  </a:t>
+            </a:r>
+            <a:r>
+              <a:rPr sz="1600" b="1">
+                <a:solidFill>
+                  <a:srgbClr val="0E4D33"/>
+                </a:solidFill>
+                <a:latin typeface="Calibri"/>
+              </a:rPr>
+              <a:t>The top line gets read.  </a:t>
+            </a:r>
+            <a:r>
+              <a:rPr sz="1600" b="0" i="0">
                 <a:solidFill>
                   <a:srgbClr val="212A26"/>
                 </a:solidFill>
                 <a:latin typeface="Calibri"/>
               </a:rPr>
-              <a:t>One decision first: direct for receptive readers, indirect for resistance and bad news.</a:t>
-            </a:r>
-          </a:p>
-        </p:txBody>
-      </p:sp>
-      <p:sp>
-        <p:nvSpPr>
-          <p:cNvPr id="7" name="Oval 6" descr="Checkmark"/>
+              <a:t>Your first sentence is the only sentence you can count on — which is why the direct pattern wins on screens.</a:t>
+            </a:r>
+          </a:p>
+          <a:p>
+            <a:pPr algn="l">
+              <a:spcAft>
+                <a:spcPts val="1400"/>
+              </a:spcAft>
+            </a:pPr>
+            <a:r>
+              <a:rPr sz="1600">
+                <a:solidFill>
+                  <a:srgbClr val="8A6410"/>
+                </a:solidFill>
+                <a:latin typeface="Calibri"/>
+              </a:rPr>
+              <a:t>▪  </a:t>
+            </a:r>
+            <a:r>
+              <a:rPr sz="1600" b="1">
+                <a:solidFill>
+                  <a:srgbClr val="0E4D33"/>
+                </a:solidFill>
+                <a:latin typeface="Calibri"/>
+              </a:rPr>
+              <a:t>The left edge gets scanned.  </a:t>
+            </a:r>
+            <a:r>
+              <a:rPr sz="1600" b="0" i="0">
+                <a:solidFill>
+                  <a:srgbClr val="212A26"/>
+                </a:solidFill>
+                <a:latin typeface="Calibri"/>
+              </a:rPr>
+              <a:t>Paragraph openers, bolded lead-ins, and list items live on the scan path; mid-sentence content does not.</a:t>
+            </a:r>
+          </a:p>
+          <a:p>
+            <a:pPr algn="l">
+              <a:spcAft>
+                <a:spcPts val="1400"/>
+              </a:spcAft>
+            </a:pPr>
+            <a:r>
+              <a:rPr sz="1600">
+                <a:solidFill>
+                  <a:srgbClr val="8A6410"/>
+                </a:solidFill>
+                <a:latin typeface="Calibri"/>
+              </a:rPr>
+              <a:t>▪  </a:t>
+            </a:r>
+            <a:r>
+              <a:rPr sz="1600" b="1">
+                <a:solidFill>
+                  <a:srgbClr val="0E4D33"/>
+                </a:solidFill>
+                <a:latin typeface="Calibri"/>
+              </a:rPr>
+              <a:t>Design for the F:  </a:t>
+            </a:r>
+            <a:r>
+              <a:rPr sz="1600" b="0" i="0">
+                <a:solidFill>
+                  <a:srgbClr val="212A26"/>
+                </a:solidFill>
+                <a:latin typeface="Calibri"/>
+              </a:rPr>
+              <a:t>front-load sentences, front-load paragraphs, and put keywords where the eye actually travels.</a:t>
+            </a:r>
+          </a:p>
+        </p:txBody>
+      </p:sp>
+    </p:spTree>
+  </p:cSld>
+  <p:clrMapOvr>
+    <a:masterClrMapping/>
+  </p:clrMapOvr>
+</p:sld>
+</file>
+
+<file path=ppt/slides/slide24.xml><?xml version="1.0" encoding="utf-8"?>
+<p:sld xmlns:a="http://schemas.openxmlformats.org/drawingml/2006/main" xmlns:p="http://schemas.openxmlformats.org/presentationml/2006/main" xmlns:r="http://schemas.openxmlformats.org/officeDocument/2006/relationships">
+  <p:cSld>
+    <p:bg>
+      <p:bgPr>
+        <a:solidFill>
+          <a:srgbClr val="FFFFFF"/>
+        </a:solidFill>
+        <a:effectLst/>
+      </p:bgPr>
+    </p:bg>
+    <p:spTree>
+      <p:nvGrpSpPr>
+        <p:cNvPr id="1" name=""/>
+        <p:cNvGrpSpPr/>
+        <p:nvPr/>
+      </p:nvGrpSpPr>
+      <p:grpSpPr/>
+      <p:sp>
+        <p:nvSpPr>
+          <p:cNvPr id="2" name="Title 1" descr="Slide title: Bullets or numbers? Each has a job"/>
+          <p:cNvSpPr>
+            <a:spLocks noGrp="1"/>
+          </p:cNvSpPr>
+          <p:nvPr>
+            <p:ph type="title"/>
+          </p:nvPr>
+        </p:nvSpPr>
+        <p:spPr>
+          <a:xfrm>
+            <a:off x="502920" y="411480"/>
+            <a:ext cx="11155680" cy="914400"/>
+          </a:xfrm>
+        </p:spPr>
+        <p:txBody>
+          <a:bodyPr wrap="square"/>
+          <a:lstStyle/>
+          <a:p>
+            <a:pPr algn="l"/>
+            <a:r>
+              <a:rPr sz="3200" b="1">
+                <a:solidFill>
+                  <a:srgbClr val="0E4D33"/>
+                </a:solidFill>
+                <a:latin typeface="Cambria"/>
+              </a:rPr>
+              <a:t>Bullets or numbers? Each has a job</a:t>
+            </a:r>
+          </a:p>
+        </p:txBody>
+      </p:sp>
+      <p:sp>
+        <p:nvSpPr>
+          <p:cNvPr id="3" name="TextBox 2" descr="Footer: BADM 225 · Chapter 3"/>
+          <p:cNvSpPr txBox="1"/>
+          <p:nvPr/>
+        </p:nvSpPr>
+        <p:spPr>
+          <a:xfrm>
+            <a:off x="502920" y="6446520"/>
+            <a:ext cx="5486400" cy="320040"/>
+          </a:xfrm>
+          <a:prstGeom prst="rect">
+            <a:avLst/>
+          </a:prstGeom>
+          <a:noFill/>
+        </p:spPr>
+        <p:txBody>
+          <a:bodyPr wrap="none">
+            <a:spAutoFit/>
+          </a:bodyPr>
+          <a:lstStyle/>
+          <a:p>
+            <a:r>
+              <a:rPr sz="1000">
+                <a:solidFill>
+                  <a:srgbClr val="5E6B64"/>
+                </a:solidFill>
+                <a:latin typeface="Calibri"/>
+              </a:rPr>
+              <a:t>BADM 225 · Chapter 3</a:t>
+            </a:r>
+          </a:p>
+        </p:txBody>
+      </p:sp>
+      <p:sp>
+        <p:nvSpPr>
+          <p:cNvPr id="4" name="TextBox 3" descr="Slide number 24"/>
+          <p:cNvSpPr txBox="1"/>
+          <p:nvPr/>
+        </p:nvSpPr>
+        <p:spPr>
+          <a:xfrm>
+            <a:off x="11247120" y="6446520"/>
+            <a:ext cx="640080" cy="320040"/>
+          </a:xfrm>
+          <a:prstGeom prst="rect">
+            <a:avLst/>
+          </a:prstGeom>
+          <a:noFill/>
+        </p:spPr>
+        <p:txBody>
+          <a:bodyPr wrap="none">
+            <a:spAutoFit/>
+          </a:bodyPr>
+          <a:lstStyle/>
+          <a:p>
+            <a:pPr algn="r"/>
+            <a:r>
+              <a:rPr sz="1000">
+                <a:solidFill>
+                  <a:srgbClr val="5E6B64"/>
+                </a:solidFill>
+                <a:latin typeface="Calibri"/>
+              </a:rPr>
+              <a:t>24</a:t>
+            </a:r>
+          </a:p>
+        </p:txBody>
+      </p:sp>
+      <p:sp>
+        <p:nvSpPr>
+          <p:cNvPr id="5" name="Rounded Rectangle 4" descr="BULLETED list — unordered panel"/>
           <p:cNvSpPr/>
           <p:nvPr/>
         </p:nvSpPr>
         <p:spPr>
           <a:xfrm>
-            <a:off x="640080" y="2212848"/>
-            <a:ext cx="420624" cy="420624"/>
-          </a:xfrm>
-          <a:prstGeom prst="ellipse">
+            <a:off x="548640" y="1554480"/>
+            <a:ext cx="5394960" cy="4572000"/>
+          </a:xfrm>
+          <a:prstGeom prst="roundRect">
             <a:avLst/>
           </a:prstGeom>
           <a:solidFill>
-            <a:srgbClr val="0E4D33"/>
+            <a:srgbClr val="EAF1EB"/>
           </a:solidFill>
           <a:ln>
             <a:noFill/>
@@ -10151,77 +11230,151 @@
           </a:fontRef>
         </p:style>
         <p:txBody>
-          <a:bodyPr rtlCol="0" anchor="ctr" lIns="0" rIns="0" tIns="0" bIns="0"/>
-          <a:lstStyle/>
-          <a:p>
-            <a:pPr algn="ctr"/>
-            <a:r>
-              <a:rPr sz="1100" b="1">
-                <a:solidFill>
-                  <a:srgbClr val="FFFFFF"/>
-                </a:solidFill>
-                <a:latin typeface="Calibri"/>
-              </a:rPr>
-              <a:t>✓</a:t>
-            </a:r>
-          </a:p>
-        </p:txBody>
-      </p:sp>
-      <p:sp>
-        <p:nvSpPr>
-          <p:cNvPr id="8" name="TextBox 7" descr="Takeaway 2"/>
-          <p:cNvSpPr txBox="1"/>
-          <p:nvPr/>
-        </p:nvSpPr>
-        <p:spPr>
-          <a:xfrm>
-            <a:off x="1325880" y="2194560"/>
-            <a:ext cx="10332720" cy="640080"/>
-          </a:xfrm>
-          <a:prstGeom prst="rect">
-            <a:avLst/>
-          </a:prstGeom>
-          <a:noFill/>
-        </p:spPr>
-        <p:txBody>
-          <a:bodyPr wrap="square">
-            <a:spAutoFit/>
-          </a:bodyPr>
+          <a:bodyPr rtlCol="0" anchor="t" wrap="square" lIns="164592" rIns="164592" tIns="128016" bIns="109728"/>
           <a:lstStyle/>
           <a:p>
             <a:pPr algn="l">
               <a:spcAft>
-                <a:spcPts val="800"/>
+                <a:spcPts val="1200"/>
               </a:spcAft>
             </a:pPr>
             <a:r>
-              <a:rPr sz="1550" b="0" i="0">
+              <a:rPr sz="1800" b="1" i="0">
+                <a:solidFill>
+                  <a:srgbClr val="0E4D33"/>
+                </a:solidFill>
+                <a:latin typeface="Cambria"/>
+              </a:rPr>
+              <a:t>BULLETED list — unordered</a:t>
+            </a:r>
+          </a:p>
+          <a:p>
+            <a:pPr algn="l">
+              <a:spcAft>
+                <a:spcPts val="900"/>
+              </a:spcAft>
+            </a:pPr>
+            <a:r>
+              <a:rPr sz="1500">
+                <a:solidFill>
+                  <a:srgbClr val="8A6410"/>
+                </a:solidFill>
+                <a:latin typeface="Calibri"/>
+              </a:rPr>
+              <a:t>▪  </a:t>
+            </a:r>
+            <a:r>
+              <a:rPr sz="1500" b="0" i="0">
                 <a:solidFill>
                   <a:srgbClr val="212A26"/>
                 </a:solidFill>
                 <a:latin typeface="Calibri"/>
               </a:rPr>
-              <a:t>Outline in three moves — dump, group into named families, sequence — and cut the orphans.</a:t>
-            </a:r>
-          </a:p>
-        </p:txBody>
-      </p:sp>
-      <p:sp>
-        <p:nvSpPr>
-          <p:cNvPr id="9" name="Oval 8" descr="Checkmark"/>
+              <a:t>Items are parallel and interchangeable in order</a:t>
+            </a:r>
+          </a:p>
+          <a:p>
+            <a:pPr algn="l">
+              <a:spcAft>
+                <a:spcPts val="900"/>
+              </a:spcAft>
+            </a:pPr>
+            <a:r>
+              <a:rPr sz="1500">
+                <a:solidFill>
+                  <a:srgbClr val="8A6410"/>
+                </a:solidFill>
+                <a:latin typeface="Calibri"/>
+              </a:rPr>
+              <a:t>▪  </a:t>
+            </a:r>
+            <a:r>
+              <a:rPr sz="1500" b="0" i="0">
+                <a:solidFill>
+                  <a:srgbClr val="212A26"/>
+                </a:solidFill>
+                <a:latin typeface="Calibri"/>
+              </a:rPr>
+              <a:t>Options, features, criteria, examples</a:t>
+            </a:r>
+          </a:p>
+          <a:p>
+            <a:pPr algn="l">
+              <a:spcAft>
+                <a:spcPts val="900"/>
+              </a:spcAft>
+            </a:pPr>
+            <a:r>
+              <a:rPr sz="1500">
+                <a:solidFill>
+                  <a:srgbClr val="8A6410"/>
+                </a:solidFill>
+                <a:latin typeface="Calibri"/>
+              </a:rPr>
+              <a:t>▪  </a:t>
+            </a:r>
+            <a:r>
+              <a:rPr sz="1500" b="0" i="0">
+                <a:solidFill>
+                  <a:srgbClr val="212A26"/>
+                </a:solidFill>
+                <a:latin typeface="Calibri"/>
+              </a:rPr>
+              <a:t>Signals: 'these belong together; sequence doesn't matter'</a:t>
+            </a:r>
+          </a:p>
+          <a:p>
+            <a:pPr algn="l">
+              <a:spcAft>
+                <a:spcPts val="900"/>
+              </a:spcAft>
+            </a:pPr>
+            <a:r>
+              <a:rPr sz="1500">
+                <a:solidFill>
+                  <a:srgbClr val="8A6410"/>
+                </a:solidFill>
+                <a:latin typeface="Calibri"/>
+              </a:rPr>
+              <a:t>▪  </a:t>
+            </a:r>
+            <a:r>
+              <a:rPr sz="1500" b="1">
+                <a:solidFill>
+                  <a:srgbClr val="0E4D33"/>
+                </a:solidFill>
+                <a:latin typeface="Calibri"/>
+              </a:rPr>
+              <a:t>Limit:  </a:t>
+            </a:r>
+            <a:r>
+              <a:rPr sz="1500" b="0" i="0">
+                <a:solidFill>
+                  <a:srgbClr val="212A26"/>
+                </a:solidFill>
+                <a:latin typeface="Calibri"/>
+              </a:rPr>
+              <a:t>4–8 items; past that, group into labeled sub-lists</a:t>
+            </a:r>
+          </a:p>
+        </p:txBody>
+      </p:sp>
+      <p:sp>
+        <p:nvSpPr>
+          <p:cNvPr id="6" name="Rounded Rectangle 5" descr="NUMBERED list — ordered panel"/>
           <p:cNvSpPr/>
           <p:nvPr/>
         </p:nvSpPr>
         <p:spPr>
           <a:xfrm>
-            <a:off x="640080" y="2852928"/>
-            <a:ext cx="420624" cy="420624"/>
-          </a:xfrm>
-          <a:prstGeom prst="ellipse">
+            <a:off x="6263640" y="1554480"/>
+            <a:ext cx="5394960" cy="4572000"/>
+          </a:xfrm>
+          <a:prstGeom prst="roundRect">
             <a:avLst/>
           </a:prstGeom>
           <a:solidFill>
-            <a:srgbClr val="0E4D33"/>
+            <a:srgbClr val="EAF1EB"/>
           </a:solidFill>
           <a:ln>
             <a:noFill/>
@@ -10243,837 +11396,131 @@
           </a:fontRef>
         </p:style>
         <p:txBody>
-          <a:bodyPr rtlCol="0" anchor="ctr" lIns="0" rIns="0" tIns="0" bIns="0"/>
-          <a:lstStyle/>
-          <a:p>
-            <a:pPr algn="ctr"/>
-            <a:r>
-              <a:rPr sz="1100" b="1">
-                <a:solidFill>
-                  <a:srgbClr val="FFFFFF"/>
-                </a:solidFill>
-                <a:latin typeface="Calibri"/>
-              </a:rPr>
-              <a:t>✓</a:t>
-            </a:r>
-          </a:p>
-        </p:txBody>
-      </p:sp>
-      <p:sp>
-        <p:nvSpPr>
-          <p:cNvPr id="10" name="TextBox 9" descr="Takeaway 3"/>
-          <p:cNvSpPr txBox="1"/>
-          <p:nvPr/>
-        </p:nvSpPr>
-        <p:spPr>
-          <a:xfrm>
-            <a:off x="1325880" y="2834640"/>
-            <a:ext cx="10332720" cy="640080"/>
-          </a:xfrm>
-          <a:prstGeom prst="rect">
-            <a:avLst/>
-          </a:prstGeom>
-          <a:noFill/>
-        </p:spPr>
-        <p:txBody>
-          <a:bodyPr wrap="square">
-            <a:spAutoFit/>
-          </a:bodyPr>
+          <a:bodyPr rtlCol="0" anchor="t" wrap="square" lIns="164592" rIns="164592" tIns="128016" bIns="109728"/>
           <a:lstStyle/>
           <a:p>
             <a:pPr algn="l">
               <a:spcAft>
-                <a:spcPts val="800"/>
+                <a:spcPts val="1200"/>
               </a:spcAft>
             </a:pPr>
             <a:r>
-              <a:rPr sz="1550" b="0" i="0">
-                <a:solidFill>
-                  <a:srgbClr val="212A26"/>
-                </a:solidFill>
-                <a:latin typeface="Calibri"/>
-              </a:rPr>
-              <a:t>Paragraphs: one claim, topic sentence first, echoes carrying old-to-new flow.</a:t>
-            </a:r>
-          </a:p>
-        </p:txBody>
-      </p:sp>
-      <p:sp>
-        <p:nvSpPr>
-          <p:cNvPr id="11" name="Oval 10" descr="Checkmark"/>
-          <p:cNvSpPr/>
-          <p:nvPr/>
-        </p:nvSpPr>
-        <p:spPr>
-          <a:xfrm>
-            <a:off x="640080" y="3493008"/>
-            <a:ext cx="420624" cy="420624"/>
-          </a:xfrm>
-          <a:prstGeom prst="ellipse">
-            <a:avLst/>
-          </a:prstGeom>
-          <a:solidFill>
-            <a:srgbClr val="0E4D33"/>
-          </a:solidFill>
-          <a:ln>
-            <a:noFill/>
-          </a:ln>
-          <a:effectLst/>
-        </p:spPr>
-        <p:style>
-          <a:lnRef idx="1">
-            <a:schemeClr val="accent1"/>
-          </a:lnRef>
-          <a:fillRef idx="3">
-            <a:schemeClr val="accent1"/>
-          </a:fillRef>
-          <a:effectRef idx="2">
-            <a:schemeClr val="accent1"/>
-          </a:effectRef>
-          <a:fontRef idx="minor">
-            <a:schemeClr val="lt1"/>
-          </a:fontRef>
-        </p:style>
-        <p:txBody>
-          <a:bodyPr rtlCol="0" anchor="ctr" lIns="0" rIns="0" tIns="0" bIns="0"/>
-          <a:lstStyle/>
-          <a:p>
-            <a:pPr algn="ctr"/>
-            <a:r>
-              <a:rPr sz="1100" b="1">
-                <a:solidFill>
-                  <a:srgbClr val="FFFFFF"/>
-                </a:solidFill>
-                <a:latin typeface="Calibri"/>
-              </a:rPr>
-              <a:t>✓</a:t>
-            </a:r>
-          </a:p>
-        </p:txBody>
-      </p:sp>
-      <p:sp>
-        <p:nvSpPr>
-          <p:cNvPr id="12" name="TextBox 11" descr="Takeaway 4"/>
-          <p:cNvSpPr txBox="1"/>
-          <p:nvPr/>
-        </p:nvSpPr>
-        <p:spPr>
-          <a:xfrm>
-            <a:off x="1325880" y="3474720"/>
-            <a:ext cx="10332720" cy="640080"/>
-          </a:xfrm>
-          <a:prstGeom prst="rect">
-            <a:avLst/>
-          </a:prstGeom>
-          <a:noFill/>
-        </p:spPr>
-        <p:txBody>
-          <a:bodyPr wrap="square">
-            <a:spAutoFit/>
-          </a:bodyPr>
-          <a:lstStyle/>
+              <a:rPr sz="1800" b="1" i="0">
+                <a:solidFill>
+                  <a:srgbClr val="0E4D33"/>
+                </a:solidFill>
+                <a:latin typeface="Cambria"/>
+              </a:rPr>
+              <a:t>NUMBERED list — ordered</a:t>
+            </a:r>
+          </a:p>
           <a:p>
             <a:pPr algn="l">
               <a:spcAft>
-                <a:spcPts val="800"/>
+                <a:spcPts val="900"/>
               </a:spcAft>
             </a:pPr>
             <a:r>
-              <a:rPr sz="1550" b="0" i="0">
+              <a:rPr sz="1500">
+                <a:solidFill>
+                  <a:srgbClr val="8A6410"/>
+                </a:solidFill>
+                <a:latin typeface="Calibri"/>
+              </a:rPr>
+              <a:t>▪  </a:t>
+            </a:r>
+            <a:r>
+              <a:rPr sz="1500" b="0" i="0">
                 <a:solidFill>
                   <a:srgbClr val="212A26"/>
                 </a:solidFill>
                 <a:latin typeface="Calibri"/>
               </a:rPr>
-              <a:t>The stress position at the sentence's end is your emphasis dial (Gopen &amp; Swan, 1990).</a:t>
-            </a:r>
-          </a:p>
-        </p:txBody>
-      </p:sp>
-      <p:sp>
-        <p:nvSpPr>
-          <p:cNvPr id="13" name="Oval 12" descr="Checkmark"/>
-          <p:cNvSpPr/>
-          <p:nvPr/>
-        </p:nvSpPr>
-        <p:spPr>
-          <a:xfrm>
-            <a:off x="640080" y="4133088"/>
-            <a:ext cx="420624" cy="420624"/>
-          </a:xfrm>
-          <a:prstGeom prst="ellipse">
-            <a:avLst/>
-          </a:prstGeom>
-          <a:solidFill>
-            <a:srgbClr val="0E4D33"/>
-          </a:solidFill>
-          <a:ln>
-            <a:noFill/>
-          </a:ln>
-          <a:effectLst/>
-        </p:spPr>
-        <p:style>
-          <a:lnRef idx="1">
-            <a:schemeClr val="accent1"/>
-          </a:lnRef>
-          <a:fillRef idx="3">
-            <a:schemeClr val="accent1"/>
-          </a:fillRef>
-          <a:effectRef idx="2">
-            <a:schemeClr val="accent1"/>
-          </a:effectRef>
-          <a:fontRef idx="minor">
-            <a:schemeClr val="lt1"/>
-          </a:fontRef>
-        </p:style>
-        <p:txBody>
-          <a:bodyPr rtlCol="0" anchor="ctr" lIns="0" rIns="0" tIns="0" bIns="0"/>
-          <a:lstStyle/>
-          <a:p>
-            <a:pPr algn="ctr"/>
-            <a:r>
-              <a:rPr sz="1100" b="1">
-                <a:solidFill>
-                  <a:srgbClr val="FFFFFF"/>
-                </a:solidFill>
-                <a:latin typeface="Calibri"/>
-              </a:rPr>
-              <a:t>✓</a:t>
-            </a:r>
-          </a:p>
-        </p:txBody>
-      </p:sp>
-      <p:sp>
-        <p:nvSpPr>
-          <p:cNvPr id="14" name="TextBox 13" descr="Takeaway 5"/>
-          <p:cNvSpPr txBox="1"/>
-          <p:nvPr/>
-        </p:nvSpPr>
-        <p:spPr>
-          <a:xfrm>
-            <a:off x="1325880" y="4114800"/>
-            <a:ext cx="10332720" cy="640080"/>
-          </a:xfrm>
-          <a:prstGeom prst="rect">
-            <a:avLst/>
-          </a:prstGeom>
-          <a:noFill/>
-        </p:spPr>
-        <p:txBody>
-          <a:bodyPr wrap="square">
-            <a:spAutoFit/>
-          </a:bodyPr>
-          <a:lstStyle/>
+              <a:t>Sequence, ranking, or priority is the point</a:t>
+            </a:r>
+          </a:p>
           <a:p>
             <a:pPr algn="l">
               <a:spcAft>
-                <a:spcPts val="800"/>
+                <a:spcPts val="900"/>
               </a:spcAft>
             </a:pPr>
             <a:r>
-              <a:rPr sz="1550" b="0" i="0">
+              <a:rPr sz="1500">
+                <a:solidFill>
+                  <a:srgbClr val="8A6410"/>
+                </a:solidFill>
+                <a:latin typeface="Calibri"/>
+              </a:rPr>
+              <a:t>▪  </a:t>
+            </a:r>
+            <a:r>
+              <a:rPr sz="1500" b="0" i="0">
                 <a:solidFill>
                   <a:srgbClr val="212A26"/>
                 </a:solidFill>
                 <a:latin typeface="Calibri"/>
               </a:rPr>
-              <a:t>Active by default; passive on purpose; never as camouflage. Keep series parallel; chunk for 7±2.</a:t>
-            </a:r>
-          </a:p>
-        </p:txBody>
-      </p:sp>
-      <p:sp>
-        <p:nvSpPr>
-          <p:cNvPr id="15" name="Oval 14" descr="Checkmark"/>
-          <p:cNvSpPr/>
-          <p:nvPr/>
-        </p:nvSpPr>
-        <p:spPr>
-          <a:xfrm>
-            <a:off x="640080" y="4773168"/>
-            <a:ext cx="420624" cy="420624"/>
-          </a:xfrm>
-          <a:prstGeom prst="ellipse">
-            <a:avLst/>
-          </a:prstGeom>
-          <a:solidFill>
-            <a:srgbClr val="0E4D33"/>
-          </a:solidFill>
-          <a:ln>
-            <a:noFill/>
-          </a:ln>
-          <a:effectLst/>
-        </p:spPr>
-        <p:style>
-          <a:lnRef idx="1">
-            <a:schemeClr val="accent1"/>
-          </a:lnRef>
-          <a:fillRef idx="3">
-            <a:schemeClr val="accent1"/>
-          </a:fillRef>
-          <a:effectRef idx="2">
-            <a:schemeClr val="accent1"/>
-          </a:effectRef>
-          <a:fontRef idx="minor">
-            <a:schemeClr val="lt1"/>
-          </a:fontRef>
-        </p:style>
-        <p:txBody>
-          <a:bodyPr rtlCol="0" anchor="ctr" lIns="0" rIns="0" tIns="0" bIns="0"/>
-          <a:lstStyle/>
-          <a:p>
-            <a:pPr algn="ctr"/>
-            <a:r>
-              <a:rPr sz="1100" b="1">
-                <a:solidFill>
-                  <a:srgbClr val="FFFFFF"/>
-                </a:solidFill>
-                <a:latin typeface="Calibri"/>
-              </a:rPr>
-              <a:t>✓</a:t>
-            </a:r>
-          </a:p>
-        </p:txBody>
-      </p:sp>
-      <p:sp>
-        <p:nvSpPr>
-          <p:cNvPr id="16" name="TextBox 15" descr="Takeaway 6"/>
-          <p:cNvSpPr txBox="1"/>
-          <p:nvPr/>
-        </p:nvSpPr>
-        <p:spPr>
-          <a:xfrm>
-            <a:off x="1325880" y="4754880"/>
-            <a:ext cx="10332720" cy="640080"/>
-          </a:xfrm>
-          <a:prstGeom prst="rect">
-            <a:avLst/>
-          </a:prstGeom>
-          <a:noFill/>
-        </p:spPr>
-        <p:txBody>
-          <a:bodyPr wrap="square">
-            <a:spAutoFit/>
-          </a:bodyPr>
-          <a:lstStyle/>
+              <a:t>Steps, instructions, ranked recommendations</a:t>
+            </a:r>
+          </a:p>
           <a:p>
             <a:pPr algn="l">
               <a:spcAft>
-                <a:spcPts val="800"/>
+                <a:spcPts val="900"/>
               </a:spcAft>
             </a:pPr>
             <a:r>
-              <a:rPr sz="1550" b="0" i="0">
+              <a:rPr sz="1500">
+                <a:solidFill>
+                  <a:srgbClr val="8A6410"/>
+                </a:solidFill>
+                <a:latin typeface="Calibri"/>
+              </a:rPr>
+              <a:t>▪  </a:t>
+            </a:r>
+            <a:r>
+              <a:rPr sz="1500" b="0" i="0">
                 <a:solidFill>
                   <a:srgbClr val="212A26"/>
                 </a:solidFill>
                 <a:latin typeface="Calibri"/>
               </a:rPr>
-              <a:t>Draft fast, judge later — generating and judging are different jobs.</a:t>
-            </a:r>
-          </a:p>
-        </p:txBody>
-      </p:sp>
-      <p:sp>
-        <p:nvSpPr>
-          <p:cNvPr id="17" name="Rounded Rectangle 16" descr="Practice reminder"/>
-          <p:cNvSpPr/>
-          <p:nvPr/>
-        </p:nvSpPr>
-        <p:spPr>
-          <a:xfrm>
-            <a:off x="548640" y="5468112"/>
-            <a:ext cx="10424160" cy="685800"/>
-          </a:xfrm>
-          <a:prstGeom prst="roundRect">
-            <a:avLst/>
-          </a:prstGeom>
-          <a:solidFill>
-            <a:srgbClr val="0E4D33"/>
-          </a:solidFill>
-          <a:ln>
-            <a:noFill/>
-          </a:ln>
-          <a:effectLst/>
-        </p:spPr>
-        <p:style>
-          <a:lnRef idx="1">
-            <a:schemeClr val="accent1"/>
-          </a:lnRef>
-          <a:fillRef idx="3">
-            <a:schemeClr val="accent1"/>
-          </a:fillRef>
-          <a:effectRef idx="2">
-            <a:schemeClr val="accent1"/>
-          </a:effectRef>
-          <a:fontRef idx="minor">
-            <a:schemeClr val="lt1"/>
-          </a:fontRef>
-        </p:style>
-        <p:txBody>
-          <a:bodyPr rtlCol="0" anchor="t" wrap="square" lIns="164592" rIns="164592" tIns="128016" bIns="109728"/>
-          <a:lstStyle/>
+              <a:t>Numbers let readers reference: 'see item 3'</a:t>
+            </a:r>
+          </a:p>
           <a:p>
             <a:pPr algn="l">
               <a:spcAft>
-                <a:spcPts val="0"/>
+                <a:spcPts val="900"/>
               </a:spcAft>
             </a:pPr>
             <a:r>
-              <a:rPr sz="1450" b="1" i="0">
-                <a:solidFill>
-                  <a:srgbClr val="FFFFFF"/>
-                </a:solidFill>
-                <a:latin typeface="Calibri"/>
-              </a:rPr>
-              <a:t>Practice now: course site → Chapter 3 → Practice, then the graded homework before the weekly deadline.</a:t>
-            </a:r>
-          </a:p>
-        </p:txBody>
-      </p:sp>
-    </p:spTree>
-  </p:cSld>
-  <p:clrMapOvr>
-    <a:masterClrMapping/>
-  </p:clrMapOvr>
-</p:sld>
-</file>
-
-<file path=ppt/slides/slide23.xml><?xml version="1.0" encoding="utf-8"?>
-<p:sld xmlns:a="http://schemas.openxmlformats.org/drawingml/2006/main" xmlns:p="http://schemas.openxmlformats.org/presentationml/2006/main" xmlns:r="http://schemas.openxmlformats.org/officeDocument/2006/relationships">
-  <p:cSld>
-    <p:bg>
-      <p:bgPr>
-        <a:solidFill>
-          <a:srgbClr val="EAF1EB"/>
-        </a:solidFill>
-        <a:effectLst/>
-      </p:bgPr>
-    </p:bg>
-    <p:spTree>
-      <p:nvGrpSpPr>
-        <p:cNvPr id="1" name=""/>
-        <p:cNvGrpSpPr/>
-        <p:nvPr/>
-      </p:nvGrpSpPr>
-      <p:grpSpPr/>
-      <p:sp>
-        <p:nvSpPr>
-          <p:cNvPr id="2" name="Title 1" descr="Slide title: Worth keeping"/>
-          <p:cNvSpPr>
-            <a:spLocks noGrp="1"/>
-          </p:cNvSpPr>
-          <p:nvPr>
-            <p:ph type="title"/>
-          </p:nvPr>
-        </p:nvSpPr>
-        <p:spPr>
-          <a:xfrm>
-            <a:off x="502920" y="411480"/>
-            <a:ext cx="11155680" cy="914400"/>
-          </a:xfrm>
-        </p:spPr>
-        <p:txBody>
-          <a:bodyPr wrap="square"/>
-          <a:lstStyle/>
-          <a:p>
-            <a:pPr algn="l"/>
-            <a:r>
-              <a:rPr sz="3400" b="1">
+              <a:rPr sz="1500">
+                <a:solidFill>
+                  <a:srgbClr val="8A6410"/>
+                </a:solidFill>
+                <a:latin typeface="Calibri"/>
+              </a:rPr>
+              <a:t>▪  </a:t>
+            </a:r>
+            <a:r>
+              <a:rPr sz="1500" b="1">
                 <a:solidFill>
                   <a:srgbClr val="0E4D33"/>
                 </a:solidFill>
-                <a:latin typeface="Cambria"/>
-              </a:rPr>
-              <a:t>Worth keeping</a:t>
-            </a:r>
-          </a:p>
-        </p:txBody>
-      </p:sp>
-      <p:sp>
-        <p:nvSpPr>
-          <p:cNvPr id="3" name="TextBox 2" descr="Quotation"/>
-          <p:cNvSpPr txBox="1"/>
-          <p:nvPr/>
-        </p:nvSpPr>
-        <p:spPr>
-          <a:xfrm>
-            <a:off x="1280160" y="2194560"/>
-            <a:ext cx="9601200" cy="2377440"/>
-          </a:xfrm>
-          <a:prstGeom prst="rect">
-            <a:avLst/>
-          </a:prstGeom>
-          <a:noFill/>
-        </p:spPr>
-        <p:txBody>
-          <a:bodyPr wrap="square">
-            <a:spAutoFit/>
-          </a:bodyPr>
-          <a:lstStyle/>
-          <a:p>
-            <a:pPr algn="l">
-              <a:spcAft>
-                <a:spcPts val="800"/>
-              </a:spcAft>
-            </a:pPr>
-            <a:r>
-              <a:rPr sz="2700" b="0" i="1">
+                <a:latin typeface="Calibri"/>
+              </a:rPr>
+              <a:t>Rule:  </a:t>
+            </a:r>
+            <a:r>
+              <a:rPr sz="1500" b="0" i="0">
                 <a:solidFill>
                   <a:srgbClr val="212A26"/>
                 </a:solidFill>
-                <a:latin typeface="Cambria"/>
-              </a:rPr>
-              <a:t>“Readers do not remember what you wrote. They remember what they read — and they read the first sentence, the headings, and the ends of things.”</a:t>
-            </a:r>
-          </a:p>
-        </p:txBody>
-      </p:sp>
-      <p:sp>
-        <p:nvSpPr>
-          <p:cNvPr id="4" name="TextBox 3" descr="Attribution"/>
-          <p:cNvSpPr txBox="1"/>
-          <p:nvPr/>
-        </p:nvSpPr>
-        <p:spPr>
-          <a:xfrm>
-            <a:off x="1280160" y="4754880"/>
-            <a:ext cx="9601200" cy="548640"/>
-          </a:xfrm>
-          <a:prstGeom prst="rect">
-            <a:avLst/>
-          </a:prstGeom>
-          <a:noFill/>
-        </p:spPr>
-        <p:txBody>
-          <a:bodyPr wrap="square">
-            <a:spAutoFit/>
-          </a:bodyPr>
-          <a:lstStyle/>
-          <a:p>
-            <a:pPr algn="l">
-              <a:spcAft>
-                <a:spcPts val="800"/>
-              </a:spcAft>
-            </a:pPr>
-            <a:r>
-              <a:rPr sz="1600" b="0" i="0">
-                <a:solidFill>
-                  <a:srgbClr val="5E6B64"/>
-                </a:solidFill>
-                <a:latin typeface="Calibri"/>
-              </a:rPr>
-              <a:t>— this chapter, compressed</a:t>
-            </a:r>
-          </a:p>
-        </p:txBody>
-      </p:sp>
-      <p:sp>
-        <p:nvSpPr>
-          <p:cNvPr id="5" name="TextBox 4" descr="Footer: BADM 225 · Chapter 3"/>
-          <p:cNvSpPr txBox="1"/>
-          <p:nvPr/>
-        </p:nvSpPr>
-        <p:spPr>
-          <a:xfrm>
-            <a:off x="502920" y="6446520"/>
-            <a:ext cx="5486400" cy="320040"/>
-          </a:xfrm>
-          <a:prstGeom prst="rect">
-            <a:avLst/>
-          </a:prstGeom>
-          <a:noFill/>
-        </p:spPr>
-        <p:txBody>
-          <a:bodyPr wrap="none">
-            <a:spAutoFit/>
-          </a:bodyPr>
-          <a:lstStyle/>
-          <a:p>
-            <a:r>
-              <a:rPr sz="1000">
-                <a:solidFill>
-                  <a:srgbClr val="5E6B64"/>
-                </a:solidFill>
-                <a:latin typeface="Calibri"/>
-              </a:rPr>
-              <a:t>BADM 225 · Chapter 3</a:t>
-            </a:r>
-          </a:p>
-        </p:txBody>
-      </p:sp>
-      <p:sp>
-        <p:nvSpPr>
-          <p:cNvPr id="6" name="TextBox 5" descr="Slide number 23"/>
-          <p:cNvSpPr txBox="1"/>
-          <p:nvPr/>
-        </p:nvSpPr>
-        <p:spPr>
-          <a:xfrm>
-            <a:off x="11247120" y="6446520"/>
-            <a:ext cx="640080" cy="320040"/>
-          </a:xfrm>
-          <a:prstGeom prst="rect">
-            <a:avLst/>
-          </a:prstGeom>
-          <a:noFill/>
-        </p:spPr>
-        <p:txBody>
-          <a:bodyPr wrap="none">
-            <a:spAutoFit/>
-          </a:bodyPr>
-          <a:lstStyle/>
-          <a:p>
-            <a:pPr algn="r"/>
-            <a:r>
-              <a:rPr sz="1000">
-                <a:solidFill>
-                  <a:srgbClr val="5E6B64"/>
-                </a:solidFill>
-                <a:latin typeface="Calibri"/>
-              </a:rPr>
-              <a:t>23</a:t>
-            </a:r>
-          </a:p>
-        </p:txBody>
-      </p:sp>
-    </p:spTree>
-  </p:cSld>
-  <p:clrMapOvr>
-    <a:masterClrMapping/>
-  </p:clrMapOvr>
-</p:sld>
-</file>
-
-<file path=ppt/slides/slide24.xml><?xml version="1.0" encoding="utf-8"?>
-<p:sld xmlns:a="http://schemas.openxmlformats.org/drawingml/2006/main" xmlns:p="http://schemas.openxmlformats.org/presentationml/2006/main" xmlns:r="http://schemas.openxmlformats.org/officeDocument/2006/relationships">
-  <p:cSld>
-    <p:bg>
-      <p:bgPr>
-        <a:solidFill>
-          <a:srgbClr val="0E4D33"/>
-        </a:solidFill>
-        <a:effectLst/>
-      </p:bgPr>
-    </p:bg>
-    <p:spTree>
-      <p:nvGrpSpPr>
-        <p:cNvPr id="1" name=""/>
-        <p:cNvGrpSpPr/>
-        <p:nvPr/>
-      </p:nvGrpSpPr>
-      <p:grpSpPr/>
-      <p:sp>
-        <p:nvSpPr>
-          <p:cNvPr id="2" name="Title 1" descr="Slide title: Discussion questions"/>
-          <p:cNvSpPr>
-            <a:spLocks noGrp="1"/>
-          </p:cNvSpPr>
-          <p:nvPr>
-            <p:ph type="title"/>
-          </p:nvPr>
-        </p:nvSpPr>
-        <p:spPr>
-          <a:xfrm>
-            <a:off x="502920" y="411480"/>
-            <a:ext cx="11155680" cy="914400"/>
-          </a:xfrm>
-        </p:spPr>
-        <p:txBody>
-          <a:bodyPr wrap="square"/>
-          <a:lstStyle/>
-          <a:p>
-            <a:pPr algn="l"/>
-            <a:r>
-              <a:rPr sz="3400" b="1">
-                <a:solidFill>
-                  <a:srgbClr val="FFFFFF"/>
-                </a:solidFill>
-                <a:latin typeface="Cambria"/>
-              </a:rPr>
-              <a:t>Discussion questions</a:t>
-            </a:r>
-          </a:p>
-        </p:txBody>
-      </p:sp>
-      <p:sp>
-        <p:nvSpPr>
-          <p:cNvPr id="3" name="TextBox 2" descr="Discussion questions"/>
-          <p:cNvSpPr txBox="1"/>
-          <p:nvPr/>
-        </p:nvSpPr>
-        <p:spPr>
-          <a:xfrm>
-            <a:off x="731520" y="1737360"/>
-            <a:ext cx="10698480" cy="4480560"/>
-          </a:xfrm>
-          <a:prstGeom prst="rect">
-            <a:avLst/>
-          </a:prstGeom>
-          <a:noFill/>
-        </p:spPr>
-        <p:txBody>
-          <a:bodyPr wrap="square">
-            <a:spAutoFit/>
-          </a:bodyPr>
-          <a:lstStyle/>
-          <a:p>
-            <a:pPr algn="l">
-              <a:spcAft>
-                <a:spcPts val="1800"/>
-              </a:spcAft>
-            </a:pPr>
-            <a:r>
-              <a:rPr sz="1800" b="1">
-                <a:solidFill>
-                  <a:srgbClr val="C9931A"/>
-                </a:solidFill>
-                <a:latin typeface="Calibri"/>
-              </a:rPr>
-              <a:t>1.  </a:t>
-            </a:r>
-            <a:r>
-              <a:rPr sz="1800" b="0" i="0">
-                <a:solidFill>
-                  <a:srgbClr val="FFFFFF"/>
-                </a:solidFill>
-                <a:latin typeface="Calibri"/>
-              </a:rPr>
-              <a:t>Find a real message organized by the writer's process instead of the reader's decision. What earns sentence one?</a:t>
-            </a:r>
-          </a:p>
-          <a:p>
-            <a:pPr algn="l">
-              <a:spcAft>
-                <a:spcPts val="1800"/>
-              </a:spcAft>
-            </a:pPr>
-            <a:r>
-              <a:rPr sz="1800" b="1">
-                <a:solidFill>
-                  <a:srgbClr val="C9931A"/>
-                </a:solidFill>
-                <a:latin typeface="Calibri"/>
-              </a:rPr>
-              <a:t>2.  </a:t>
-            </a:r>
-            <a:r>
-              <a:rPr sz="1800" b="0" i="0">
-                <a:solidFill>
-                  <a:srgbClr val="FFFFFF"/>
-                </a:solidFill>
-                <a:latin typeface="Calibri"/>
-              </a:rPr>
-              <a:t>Collect three passives from documents around you: tool or camouflage? Rewrite the camouflage.</a:t>
-            </a:r>
-          </a:p>
-          <a:p>
-            <a:pPr algn="l">
-              <a:spcAft>
-                <a:spcPts val="1800"/>
-              </a:spcAft>
-            </a:pPr>
-            <a:r>
-              <a:rPr sz="1800" b="1">
-                <a:solidFill>
-                  <a:srgbClr val="C9931A"/>
-                </a:solidFill>
-                <a:latin typeface="Calibri"/>
-              </a:rPr>
-              <a:t>3.  </a:t>
-            </a:r>
-            <a:r>
-              <a:rPr sz="1800" b="0" i="0">
-                <a:solidFill>
-                  <a:srgbClr val="FFFFFF"/>
-                </a:solidFill>
-                <a:latin typeface="Calibri"/>
-              </a:rPr>
-              <a:t>Audition every sentence of your last substantial paragraph against its topic sentence. What moves out?</a:t>
-            </a:r>
-          </a:p>
-          <a:p>
-            <a:pPr algn="l">
-              <a:spcAft>
-                <a:spcPts val="1800"/>
-              </a:spcAft>
-            </a:pPr>
-            <a:r>
-              <a:rPr sz="1800" b="1">
-                <a:solidFill>
-                  <a:srgbClr val="C9931A"/>
-                </a:solidFill>
-                <a:latin typeface="Calibri"/>
-              </a:rPr>
-              <a:t>4.  </a:t>
-            </a:r>
-            <a:r>
-              <a:rPr sz="1800" b="0" i="0">
-                <a:solidFill>
-                  <a:srgbClr val="FFFFFF"/>
-                </a:solidFill>
-                <a:latin typeface="Calibri"/>
-              </a:rPr>
-              <a:t>Where is the line between direct and merely abrupt? Give a case from your own inbox.</a:t>
-            </a:r>
-          </a:p>
-          <a:p>
-            <a:pPr algn="l">
-              <a:spcAft>
-                <a:spcPts val="1800"/>
-              </a:spcAft>
-            </a:pPr>
-            <a:r>
-              <a:rPr sz="1800" b="1">
-                <a:solidFill>
-                  <a:srgbClr val="C9931A"/>
-                </a:solidFill>
-                <a:latin typeface="Calibri"/>
-              </a:rPr>
-              <a:t>5.  </a:t>
-            </a:r>
-            <a:r>
-              <a:rPr sz="1800" b="0" i="0">
-                <a:solidFill>
-                  <a:srgbClr val="FFFFFF"/>
-                </a:solidFill>
-                <a:latin typeface="Calibri"/>
-              </a:rPr>
-              <a:t>Run Word's readability statistics on something you wrote. What does the score see — and what does it miss?</a:t>
-            </a:r>
-          </a:p>
-        </p:txBody>
-      </p:sp>
-      <p:sp>
-        <p:nvSpPr>
-          <p:cNvPr id="4" name="TextBox 3" descr="Footer"/>
-          <p:cNvSpPr txBox="1"/>
-          <p:nvPr/>
-        </p:nvSpPr>
-        <p:spPr>
-          <a:xfrm>
-            <a:off x="502920" y="6446520"/>
-            <a:ext cx="5486400" cy="320040"/>
-          </a:xfrm>
-          <a:prstGeom prst="rect">
-            <a:avLst/>
-          </a:prstGeom>
-          <a:noFill/>
-        </p:spPr>
-        <p:txBody>
-          <a:bodyPr wrap="none">
-            <a:spAutoFit/>
-          </a:bodyPr>
-          <a:lstStyle/>
-          <a:p>
-            <a:r>
-              <a:rPr sz="1000">
-                <a:solidFill>
-                  <a:srgbClr val="A8C4B2"/>
-                </a:solidFill>
-                <a:latin typeface="Calibri"/>
-              </a:rPr>
-              <a:t>BADM 225 · Chapter 3</a:t>
+                <a:latin typeface="Calibri"/>
+              </a:rPr>
+              <a:t>never number a list whose order is arbitrary — numbers promise meaning</a:t>
             </a:r>
           </a:p>
         </p:txBody>
@@ -11106,7 +11553,7 @@
       <p:grpSpPr/>
       <p:sp>
         <p:nvSpPr>
-          <p:cNvPr id="2" name="Title 1" descr="Slide title: Your next steps"/>
+          <p:cNvPr id="2" name="Title 1" descr="Slide title: List discipline: what separates a list from a fragment pile"/>
           <p:cNvSpPr>
             <a:spLocks noGrp="1"/>
           </p:cNvSpPr>
@@ -11132,7 +11579,7 @@
                 </a:solidFill>
                 <a:latin typeface="Cambria"/>
               </a:rPr>
-              <a:t>Your next steps</a:t>
+              <a:t>List discipline: what separates a list from a fragment pile</a:t>
             </a:r>
           </a:p>
         </p:txBody>
@@ -11249,7 +11696,7 @@
                 </a:solidFill>
                 <a:latin typeface="Calibri"/>
               </a:rPr>
-              <a:t>Practice:  </a:t>
+              <a:t>Lead-in sentence.  </a:t>
             </a:r>
             <a:r>
               <a:rPr sz="1700" b="0" i="0">
@@ -11258,7 +11705,7 @@
                 </a:solidFill>
                 <a:latin typeface="Calibri"/>
               </a:rPr>
-              <a:t>Course site → Chapter 3 → Practice questions (instant feedback, unlimited tries).</a:t>
+              <a:t>Every list needs a sentence that tells the reader what the items are: 'The proposal has three risks:'</a:t>
             </a:r>
           </a:p>
           <a:p>
@@ -11283,7 +11730,7 @@
                 </a:solidFill>
                 <a:latin typeface="Calibri"/>
               </a:rPr>
-              <a:t>Graded:  </a:t>
+              <a:t>Parallel form.  </a:t>
             </a:r>
             <a:r>
               <a:rPr sz="1700" b="0" i="0">
@@ -11292,7 +11739,7 @@
                 </a:solidFill>
                 <a:latin typeface="Calibri"/>
               </a:rPr>
-              <a:t>Complete the Chapter 3 homework on the site; paste your completion code into the Blackboard assignment before the weekly deadline.</a:t>
+              <a:t>All items start the same part of speech — all verbs, all nouns. One broken item breaks the rhythm of all of them.</a:t>
             </a:r>
           </a:p>
           <a:p>
@@ -11317,7 +11764,7 @@
                 </a:solidFill>
                 <a:latin typeface="Calibri"/>
               </a:rPr>
-              <a:t>Read:  </a:t>
+              <a:t>Comparable weight.  </a:t>
             </a:r>
             <a:r>
               <a:rPr sz="1700" b="0" i="0">
@@ -11326,7 +11773,7 @@
                 </a:solidFill>
                 <a:latin typeface="Calibri"/>
               </a:rPr>
-              <a:t>The Chapter 3 Study Guide — includes the sentence workshop with ten repairs and answers.</a:t>
+              <a:t>A six-word item next to a sixty-word item signals the list wasn't designed — split or trim.</a:t>
             </a:r>
           </a:p>
           <a:p>
@@ -11351,7 +11798,7 @@
                 </a:solidFill>
                 <a:latin typeface="Calibri"/>
               </a:rPr>
-              <a:t>Do:  </a:t>
+              <a:t>One level, maybe two.  </a:t>
             </a:r>
             <a:r>
               <a:rPr sz="1700" b="0" i="0">
@@ -11360,7 +11807,7 @@
                 </a:solidFill>
                 <a:latin typeface="Calibri"/>
               </a:rPr>
-              <a:t>Outline your next substantial message with dump-group-sequence before drafting a word.</a:t>
+              <a:t>Nested bullet forests three levels deep are outlines that never got written into prose. Flatten or restructure.</a:t>
             </a:r>
           </a:p>
           <a:p>
@@ -11385,7 +11832,7 @@
                 </a:solidFill>
                 <a:latin typeface="Calibri"/>
               </a:rPr>
-              <a:t>Coming next:  </a:t>
+              <a:t>Punctuate consistently.  </a:t>
             </a:r>
             <a:r>
               <a:rPr sz="1700" b="0" i="0">
@@ -11394,7 +11841,1748 @@
                 </a:solidFill>
                 <a:latin typeface="Calibri"/>
               </a:rPr>
-              <a:t>Chapter 4 — revising and proofreading: conciseness, clarity, and catching what spellcheck can't.</a:t>
+              <a:t>Fragments: no periods. Full sentences: periods. Never a mix within one list.</a:t>
+            </a:r>
+          </a:p>
+        </p:txBody>
+      </p:sp>
+    </p:spTree>
+  </p:cSld>
+  <p:clrMapOvr>
+    <a:masterClrMapping/>
+  </p:clrMapOvr>
+</p:sld>
+</file>
+
+<file path=ppt/slides/slide26.xml><?xml version="1.0" encoding="utf-8"?>
+<p:sld xmlns:a="http://schemas.openxmlformats.org/drawingml/2006/main" xmlns:p="http://schemas.openxmlformats.org/presentationml/2006/main" xmlns:r="http://schemas.openxmlformats.org/officeDocument/2006/relationships">
+  <p:cSld>
+    <p:bg>
+      <p:bgPr>
+        <a:solidFill>
+          <a:srgbClr val="FFFFFF"/>
+        </a:solidFill>
+        <a:effectLst/>
+      </p:bgPr>
+    </p:bg>
+    <p:spTree>
+      <p:nvGrpSpPr>
+        <p:cNvPr id="1" name=""/>
+        <p:cNvGrpSpPr/>
+        <p:nvPr/>
+      </p:nvGrpSpPr>
+      <p:grpSpPr/>
+      <p:sp>
+        <p:nvSpPr>
+          <p:cNvPr id="2" name="Title 1" descr="Slide title: When a table beats prose"/>
+          <p:cNvSpPr>
+            <a:spLocks noGrp="1"/>
+          </p:cNvSpPr>
+          <p:nvPr>
+            <p:ph type="title"/>
+          </p:nvPr>
+        </p:nvSpPr>
+        <p:spPr>
+          <a:xfrm>
+            <a:off x="502920" y="411480"/>
+            <a:ext cx="11155680" cy="914400"/>
+          </a:xfrm>
+        </p:spPr>
+        <p:txBody>
+          <a:bodyPr wrap="square"/>
+          <a:lstStyle/>
+          <a:p>
+            <a:pPr algn="l"/>
+            <a:r>
+              <a:rPr sz="3200" b="1">
+                <a:solidFill>
+                  <a:srgbClr val="0E4D33"/>
+                </a:solidFill>
+                <a:latin typeface="Cambria"/>
+              </a:rPr>
+              <a:t>When a table beats prose</a:t>
+            </a:r>
+          </a:p>
+        </p:txBody>
+      </p:sp>
+      <p:sp>
+        <p:nvSpPr>
+          <p:cNvPr id="3" name="TextBox 2" descr="Footer: BADM 225 · Chapter 3"/>
+          <p:cNvSpPr txBox="1"/>
+          <p:nvPr/>
+        </p:nvSpPr>
+        <p:spPr>
+          <a:xfrm>
+            <a:off x="502920" y="6446520"/>
+            <a:ext cx="5486400" cy="320040"/>
+          </a:xfrm>
+          <a:prstGeom prst="rect">
+            <a:avLst/>
+          </a:prstGeom>
+          <a:noFill/>
+        </p:spPr>
+        <p:txBody>
+          <a:bodyPr wrap="none">
+            <a:spAutoFit/>
+          </a:bodyPr>
+          <a:lstStyle/>
+          <a:p>
+            <a:r>
+              <a:rPr sz="1000">
+                <a:solidFill>
+                  <a:srgbClr val="5E6B64"/>
+                </a:solidFill>
+                <a:latin typeface="Calibri"/>
+              </a:rPr>
+              <a:t>BADM 225 · Chapter 3</a:t>
+            </a:r>
+          </a:p>
+        </p:txBody>
+      </p:sp>
+      <p:sp>
+        <p:nvSpPr>
+          <p:cNvPr id="4" name="TextBox 3" descr="Slide number 26"/>
+          <p:cNvSpPr txBox="1"/>
+          <p:nvPr/>
+        </p:nvSpPr>
+        <p:spPr>
+          <a:xfrm>
+            <a:off x="11247120" y="6446520"/>
+            <a:ext cx="640080" cy="320040"/>
+          </a:xfrm>
+          <a:prstGeom prst="rect">
+            <a:avLst/>
+          </a:prstGeom>
+          <a:noFill/>
+        </p:spPr>
+        <p:txBody>
+          <a:bodyPr wrap="none">
+            <a:spAutoFit/>
+          </a:bodyPr>
+          <a:lstStyle/>
+          <a:p>
+            <a:pPr algn="r"/>
+            <a:r>
+              <a:rPr sz="1000">
+                <a:solidFill>
+                  <a:srgbClr val="5E6B64"/>
+                </a:solidFill>
+                <a:latin typeface="Calibri"/>
+              </a:rPr>
+              <a:t>26</a:t>
+            </a:r>
+          </a:p>
+        </p:txBody>
+      </p:sp>
+      <p:sp>
+        <p:nvSpPr>
+          <p:cNvPr id="5" name="Rounded Rectangle 4" descr="Use a TABLE when readers need to… panel"/>
+          <p:cNvSpPr/>
+          <p:nvPr/>
+        </p:nvSpPr>
+        <p:spPr>
+          <a:xfrm>
+            <a:off x="548640" y="1554480"/>
+            <a:ext cx="5394960" cy="4572000"/>
+          </a:xfrm>
+          <a:prstGeom prst="roundRect">
+            <a:avLst/>
+          </a:prstGeom>
+          <a:solidFill>
+            <a:srgbClr val="EAF1EB"/>
+          </a:solidFill>
+          <a:ln>
+            <a:noFill/>
+          </a:ln>
+          <a:effectLst/>
+        </p:spPr>
+        <p:style>
+          <a:lnRef idx="1">
+            <a:schemeClr val="accent1"/>
+          </a:lnRef>
+          <a:fillRef idx="3">
+            <a:schemeClr val="accent1"/>
+          </a:fillRef>
+          <a:effectRef idx="2">
+            <a:schemeClr val="accent1"/>
+          </a:effectRef>
+          <a:fontRef idx="minor">
+            <a:schemeClr val="lt1"/>
+          </a:fontRef>
+        </p:style>
+        <p:txBody>
+          <a:bodyPr rtlCol="0" anchor="t" wrap="square" lIns="164592" rIns="164592" tIns="128016" bIns="109728"/>
+          <a:lstStyle/>
+          <a:p>
+            <a:pPr algn="l">
+              <a:spcAft>
+                <a:spcPts val="1200"/>
+              </a:spcAft>
+            </a:pPr>
+            <a:r>
+              <a:rPr sz="1800" b="1" i="0">
+                <a:solidFill>
+                  <a:srgbClr val="0E4D33"/>
+                </a:solidFill>
+                <a:latin typeface="Cambria"/>
+              </a:rPr>
+              <a:t>Use a TABLE when readers need to…</a:t>
+            </a:r>
+          </a:p>
+          <a:p>
+            <a:pPr algn="l">
+              <a:spcAft>
+                <a:spcPts val="900"/>
+              </a:spcAft>
+            </a:pPr>
+            <a:r>
+              <a:rPr sz="1500">
+                <a:solidFill>
+                  <a:srgbClr val="8A6410"/>
+                </a:solidFill>
+                <a:latin typeface="Calibri"/>
+              </a:rPr>
+              <a:t>▪  </a:t>
+            </a:r>
+            <a:r>
+              <a:rPr sz="1500" b="0" i="0">
+                <a:solidFill>
+                  <a:srgbClr val="212A26"/>
+                </a:solidFill>
+                <a:latin typeface="Calibri"/>
+              </a:rPr>
+              <a:t>Compare options across the same dimensions</a:t>
+            </a:r>
+          </a:p>
+          <a:p>
+            <a:pPr algn="l">
+              <a:spcAft>
+                <a:spcPts val="900"/>
+              </a:spcAft>
+            </a:pPr>
+            <a:r>
+              <a:rPr sz="1500">
+                <a:solidFill>
+                  <a:srgbClr val="8A6410"/>
+                </a:solidFill>
+                <a:latin typeface="Calibri"/>
+              </a:rPr>
+              <a:t>▪  </a:t>
+            </a:r>
+            <a:r>
+              <a:rPr sz="1500" b="0" i="0">
+                <a:solidFill>
+                  <a:srgbClr val="212A26"/>
+                </a:solidFill>
+                <a:latin typeface="Calibri"/>
+              </a:rPr>
+              <a:t>Look up exact values (prices, dates, specs)</a:t>
+            </a:r>
+          </a:p>
+          <a:p>
+            <a:pPr algn="l">
+              <a:spcAft>
+                <a:spcPts val="900"/>
+              </a:spcAft>
+            </a:pPr>
+            <a:r>
+              <a:rPr sz="1500">
+                <a:solidFill>
+                  <a:srgbClr val="8A6410"/>
+                </a:solidFill>
+                <a:latin typeface="Calibri"/>
+              </a:rPr>
+              <a:t>▪  </a:t>
+            </a:r>
+            <a:r>
+              <a:rPr sz="1500" b="0" i="0">
+                <a:solidFill>
+                  <a:srgbClr val="212A26"/>
+                </a:solidFill>
+                <a:latin typeface="Calibri"/>
+              </a:rPr>
+              <a:t>Check completeness — every cell visibly filled or empty</a:t>
+            </a:r>
+          </a:p>
+          <a:p>
+            <a:pPr algn="l">
+              <a:spcAft>
+                <a:spcPts val="900"/>
+              </a:spcAft>
+            </a:pPr>
+            <a:r>
+              <a:rPr sz="1500">
+                <a:solidFill>
+                  <a:srgbClr val="8A6410"/>
+                </a:solidFill>
+                <a:latin typeface="Calibri"/>
+              </a:rPr>
+              <a:t>▪  </a:t>
+            </a:r>
+            <a:r>
+              <a:rPr sz="1500" b="1">
+                <a:solidFill>
+                  <a:srgbClr val="0E4D33"/>
+                </a:solidFill>
+                <a:latin typeface="Calibri"/>
+              </a:rPr>
+              <a:t>Test:  </a:t>
+            </a:r>
+            <a:r>
+              <a:rPr sz="1500" b="0" i="0">
+                <a:solidFill>
+                  <a:srgbClr val="212A26"/>
+                </a:solidFill>
+                <a:latin typeface="Calibri"/>
+              </a:rPr>
+              <a:t>if you're writing 'X is $40, while Y is $55, whereas Z…' — that sentence wants to be a table</a:t>
+            </a:r>
+          </a:p>
+        </p:txBody>
+      </p:sp>
+      <p:sp>
+        <p:nvSpPr>
+          <p:cNvPr id="6" name="Rounded Rectangle 5" descr="Keep PROSE when readers need to… panel"/>
+          <p:cNvSpPr/>
+          <p:nvPr/>
+        </p:nvSpPr>
+        <p:spPr>
+          <a:xfrm>
+            <a:off x="6263640" y="1554480"/>
+            <a:ext cx="5394960" cy="4572000"/>
+          </a:xfrm>
+          <a:prstGeom prst="roundRect">
+            <a:avLst/>
+          </a:prstGeom>
+          <a:solidFill>
+            <a:srgbClr val="EAF1EB"/>
+          </a:solidFill>
+          <a:ln>
+            <a:noFill/>
+          </a:ln>
+          <a:effectLst/>
+        </p:spPr>
+        <p:style>
+          <a:lnRef idx="1">
+            <a:schemeClr val="accent1"/>
+          </a:lnRef>
+          <a:fillRef idx="3">
+            <a:schemeClr val="accent1"/>
+          </a:fillRef>
+          <a:effectRef idx="2">
+            <a:schemeClr val="accent1"/>
+          </a:effectRef>
+          <a:fontRef idx="minor">
+            <a:schemeClr val="lt1"/>
+          </a:fontRef>
+        </p:style>
+        <p:txBody>
+          <a:bodyPr rtlCol="0" anchor="t" wrap="square" lIns="164592" rIns="164592" tIns="128016" bIns="109728"/>
+          <a:lstStyle/>
+          <a:p>
+            <a:pPr algn="l">
+              <a:spcAft>
+                <a:spcPts val="1200"/>
+              </a:spcAft>
+            </a:pPr>
+            <a:r>
+              <a:rPr sz="1800" b="1" i="0">
+                <a:solidFill>
+                  <a:srgbClr val="0E4D33"/>
+                </a:solidFill>
+                <a:latin typeface="Cambria"/>
+              </a:rPr>
+              <a:t>Keep PROSE when readers need to…</a:t>
+            </a:r>
+          </a:p>
+          <a:p>
+            <a:pPr algn="l">
+              <a:spcAft>
+                <a:spcPts val="900"/>
+              </a:spcAft>
+            </a:pPr>
+            <a:r>
+              <a:rPr sz="1500">
+                <a:solidFill>
+                  <a:srgbClr val="8A6410"/>
+                </a:solidFill>
+                <a:latin typeface="Calibri"/>
+              </a:rPr>
+              <a:t>▪  </a:t>
+            </a:r>
+            <a:r>
+              <a:rPr sz="1500" b="0" i="0">
+                <a:solidFill>
+                  <a:srgbClr val="212A26"/>
+                </a:solidFill>
+                <a:latin typeface="Calibri"/>
+              </a:rPr>
+              <a:t>Follow causation — why something happened</a:t>
+            </a:r>
+          </a:p>
+          <a:p>
+            <a:pPr algn="l">
+              <a:spcAft>
+                <a:spcPts val="900"/>
+              </a:spcAft>
+            </a:pPr>
+            <a:r>
+              <a:rPr sz="1500">
+                <a:solidFill>
+                  <a:srgbClr val="8A6410"/>
+                </a:solidFill>
+                <a:latin typeface="Calibri"/>
+              </a:rPr>
+              <a:t>▪  </a:t>
+            </a:r>
+            <a:r>
+              <a:rPr sz="1500" b="0" i="0">
+                <a:solidFill>
+                  <a:srgbClr val="212A26"/>
+                </a:solidFill>
+                <a:latin typeface="Calibri"/>
+              </a:rPr>
+              <a:t>Weigh an argument with qualifications and exceptions</a:t>
+            </a:r>
+          </a:p>
+          <a:p>
+            <a:pPr algn="l">
+              <a:spcAft>
+                <a:spcPts val="900"/>
+              </a:spcAft>
+            </a:pPr>
+            <a:r>
+              <a:rPr sz="1500">
+                <a:solidFill>
+                  <a:srgbClr val="8A6410"/>
+                </a:solidFill>
+                <a:latin typeface="Calibri"/>
+              </a:rPr>
+              <a:t>▪  </a:t>
+            </a:r>
+            <a:r>
+              <a:rPr sz="1500" b="0" i="0">
+                <a:solidFill>
+                  <a:srgbClr val="212A26"/>
+                </a:solidFill>
+                <a:latin typeface="Calibri"/>
+              </a:rPr>
+              <a:t>Hear tone: goodwill, apology, persuasion</a:t>
+            </a:r>
+          </a:p>
+          <a:p>
+            <a:pPr algn="l">
+              <a:spcAft>
+                <a:spcPts val="900"/>
+              </a:spcAft>
+            </a:pPr>
+            <a:r>
+              <a:rPr sz="1500">
+                <a:solidFill>
+                  <a:srgbClr val="8A6410"/>
+                </a:solidFill>
+                <a:latin typeface="Calibri"/>
+              </a:rPr>
+              <a:t>▪  </a:t>
+            </a:r>
+            <a:r>
+              <a:rPr sz="1500" b="1">
+                <a:solidFill>
+                  <a:srgbClr val="0E4D33"/>
+                </a:solidFill>
+                <a:latin typeface="Calibri"/>
+              </a:rPr>
+              <a:t>Test:  </a:t>
+            </a:r>
+            <a:r>
+              <a:rPr sz="1500" b="0" i="0">
+                <a:solidFill>
+                  <a:srgbClr val="212A26"/>
+                </a:solidFill>
+                <a:latin typeface="Calibri"/>
+              </a:rPr>
+              <a:t>if every cell would hold a paragraph, the table is a cage, not a tool</a:t>
+            </a:r>
+          </a:p>
+        </p:txBody>
+      </p:sp>
+    </p:spTree>
+  </p:cSld>
+  <p:clrMapOvr>
+    <a:masterClrMapping/>
+  </p:clrMapOvr>
+</p:sld>
+</file>
+
+<file path=ppt/slides/slide27.xml><?xml version="1.0" encoding="utf-8"?>
+<p:sld xmlns:a="http://schemas.openxmlformats.org/drawingml/2006/main" xmlns:p="http://schemas.openxmlformats.org/presentationml/2006/main" xmlns:r="http://schemas.openxmlformats.org/officeDocument/2006/relationships">
+  <p:cSld>
+    <p:bg>
+      <p:bgPr>
+        <a:solidFill>
+          <a:srgbClr val="FFFFFF"/>
+        </a:solidFill>
+        <a:effectLst/>
+      </p:bgPr>
+    </p:bg>
+    <p:spTree>
+      <p:nvGrpSpPr>
+        <p:cNvPr id="1" name=""/>
+        <p:cNvGrpSpPr/>
+        <p:nvPr/>
+      </p:nvGrpSpPr>
+      <p:grpSpPr/>
+      <p:sp>
+        <p:nvSpPr>
+          <p:cNvPr id="2" name="Title 1" descr="Slide title: Transitions: the traffic signals of prose"/>
+          <p:cNvSpPr>
+            <a:spLocks noGrp="1"/>
+          </p:cNvSpPr>
+          <p:nvPr>
+            <p:ph type="title"/>
+          </p:nvPr>
+        </p:nvSpPr>
+        <p:spPr>
+          <a:xfrm>
+            <a:off x="502920" y="411480"/>
+            <a:ext cx="11155680" cy="914400"/>
+          </a:xfrm>
+        </p:spPr>
+        <p:txBody>
+          <a:bodyPr wrap="square"/>
+          <a:lstStyle/>
+          <a:p>
+            <a:pPr algn="l"/>
+            <a:r>
+              <a:rPr sz="3200" b="1">
+                <a:solidFill>
+                  <a:srgbClr val="0E4D33"/>
+                </a:solidFill>
+                <a:latin typeface="Cambria"/>
+              </a:rPr>
+              <a:t>Transitions: the traffic signals of prose</a:t>
+            </a:r>
+          </a:p>
+        </p:txBody>
+      </p:sp>
+      <p:sp>
+        <p:nvSpPr>
+          <p:cNvPr id="3" name="TextBox 2" descr="Footer: BADM 225 · Chapter 3"/>
+          <p:cNvSpPr txBox="1"/>
+          <p:nvPr/>
+        </p:nvSpPr>
+        <p:spPr>
+          <a:xfrm>
+            <a:off x="502920" y="6446520"/>
+            <a:ext cx="5486400" cy="320040"/>
+          </a:xfrm>
+          <a:prstGeom prst="rect">
+            <a:avLst/>
+          </a:prstGeom>
+          <a:noFill/>
+        </p:spPr>
+        <p:txBody>
+          <a:bodyPr wrap="none">
+            <a:spAutoFit/>
+          </a:bodyPr>
+          <a:lstStyle/>
+          <a:p>
+            <a:r>
+              <a:rPr sz="1000">
+                <a:solidFill>
+                  <a:srgbClr val="5E6B64"/>
+                </a:solidFill>
+                <a:latin typeface="Calibri"/>
+              </a:rPr>
+              <a:t>BADM 225 · Chapter 3</a:t>
+            </a:r>
+          </a:p>
+        </p:txBody>
+      </p:sp>
+      <p:sp>
+        <p:nvSpPr>
+          <p:cNvPr id="4" name="TextBox 3" descr="Slide number 27"/>
+          <p:cNvSpPr txBox="1"/>
+          <p:nvPr/>
+        </p:nvSpPr>
+        <p:spPr>
+          <a:xfrm>
+            <a:off x="11247120" y="6446520"/>
+            <a:ext cx="640080" cy="320040"/>
+          </a:xfrm>
+          <a:prstGeom prst="rect">
+            <a:avLst/>
+          </a:prstGeom>
+          <a:noFill/>
+        </p:spPr>
+        <p:txBody>
+          <a:bodyPr wrap="none">
+            <a:spAutoFit/>
+          </a:bodyPr>
+          <a:lstStyle/>
+          <a:p>
+            <a:pPr algn="r"/>
+            <a:r>
+              <a:rPr sz="1000">
+                <a:solidFill>
+                  <a:srgbClr val="5E6B64"/>
+                </a:solidFill>
+                <a:latin typeface="Calibri"/>
+              </a:rPr>
+              <a:t>27</a:t>
+            </a:r>
+          </a:p>
+        </p:txBody>
+      </p:sp>
+      <p:sp>
+        <p:nvSpPr>
+          <p:cNvPr id="5" name="TextBox 4" descr="Context"/>
+          <p:cNvSpPr txBox="1"/>
+          <p:nvPr/>
+        </p:nvSpPr>
+        <p:spPr>
+          <a:xfrm>
+            <a:off x="548640" y="1417320"/>
+            <a:ext cx="10972800" cy="411480"/>
+          </a:xfrm>
+          <a:prstGeom prst="rect">
+            <a:avLst/>
+          </a:prstGeom>
+          <a:noFill/>
+        </p:spPr>
+        <p:txBody>
+          <a:bodyPr wrap="square">
+            <a:spAutoFit/>
+          </a:bodyPr>
+          <a:lstStyle/>
+          <a:p>
+            <a:pPr algn="l">
+              <a:spcAft>
+                <a:spcPts val="800"/>
+              </a:spcAft>
+            </a:pPr>
+            <a:r>
+              <a:rPr sz="1400" b="0" i="1">
+                <a:solidFill>
+                  <a:srgbClr val="5E6B64"/>
+                </a:solidFill>
+                <a:latin typeface="Calibri"/>
+              </a:rPr>
+              <a:t>Readers decode transitions before they decode the sentence — a wrong signal misroutes the whole paragraph.</a:t>
+            </a:r>
+          </a:p>
+        </p:txBody>
+      </p:sp>
+      <p:sp>
+        <p:nvSpPr>
+          <p:cNvPr id="6" name="Oval 5" descr="Addition icon"/>
+          <p:cNvSpPr/>
+          <p:nvPr/>
+        </p:nvSpPr>
+        <p:spPr>
+          <a:xfrm>
+            <a:off x="640080" y="1975104"/>
+            <a:ext cx="566928" cy="566928"/>
+          </a:xfrm>
+          <a:prstGeom prst="ellipse">
+            <a:avLst/>
+          </a:prstGeom>
+          <a:solidFill>
+            <a:srgbClr val="0E4D33"/>
+          </a:solidFill>
+          <a:ln>
+            <a:noFill/>
+          </a:ln>
+          <a:effectLst/>
+        </p:spPr>
+        <p:style>
+          <a:lnRef idx="1">
+            <a:schemeClr val="accent1"/>
+          </a:lnRef>
+          <a:fillRef idx="3">
+            <a:schemeClr val="accent1"/>
+          </a:fillRef>
+          <a:effectRef idx="2">
+            <a:schemeClr val="accent1"/>
+          </a:effectRef>
+          <a:fontRef idx="minor">
+            <a:schemeClr val="lt1"/>
+          </a:fontRef>
+        </p:style>
+        <p:txBody>
+          <a:bodyPr rtlCol="0" anchor="ctr" lIns="0" rIns="0" tIns="0" bIns="0"/>
+          <a:lstStyle/>
+          <a:p>
+            <a:pPr algn="ctr"/>
+            <a:r>
+              <a:rPr sz="1600" b="1">
+                <a:solidFill>
+                  <a:srgbClr val="FFFFFF"/>
+                </a:solidFill>
+                <a:latin typeface="Calibri"/>
+              </a:rPr>
+              <a:t>＋</a:t>
+            </a:r>
+          </a:p>
+        </p:txBody>
+      </p:sp>
+      <p:sp>
+        <p:nvSpPr>
+          <p:cNvPr id="7" name="TextBox 6" descr="Addition"/>
+          <p:cNvSpPr txBox="1"/>
+          <p:nvPr/>
+        </p:nvSpPr>
+        <p:spPr>
+          <a:xfrm>
+            <a:off x="1417320" y="1920240"/>
+            <a:ext cx="10241280" cy="914400"/>
+          </a:xfrm>
+          <a:prstGeom prst="rect">
+            <a:avLst/>
+          </a:prstGeom>
+          <a:noFill/>
+        </p:spPr>
+        <p:txBody>
+          <a:bodyPr wrap="square">
+            <a:spAutoFit/>
+          </a:bodyPr>
+          <a:lstStyle/>
+          <a:p>
+            <a:pPr algn="l">
+              <a:spcAft>
+                <a:spcPts val="200"/>
+              </a:spcAft>
+            </a:pPr>
+            <a:r>
+              <a:rPr sz="1650" b="1" i="0">
+                <a:solidFill>
+                  <a:srgbClr val="0E4D33"/>
+                </a:solidFill>
+                <a:latin typeface="Cambria"/>
+              </a:rPr>
+              <a:t>Addition</a:t>
+            </a:r>
+          </a:p>
+          <a:p>
+            <a:pPr algn="l">
+              <a:spcAft>
+                <a:spcPts val="0"/>
+              </a:spcAft>
+            </a:pPr>
+            <a:r>
+              <a:rPr sz="1550" b="0" i="0">
+                <a:solidFill>
+                  <a:srgbClr val="212A26"/>
+                </a:solidFill>
+                <a:latin typeface="Calibri"/>
+              </a:rPr>
+              <a:t>also · moreover · in addition — 'more of the same direction ahead.'</a:t>
+            </a:r>
+          </a:p>
+        </p:txBody>
+      </p:sp>
+      <p:sp>
+        <p:nvSpPr>
+          <p:cNvPr id="8" name="Oval 7" descr="Contrast icon"/>
+          <p:cNvSpPr/>
+          <p:nvPr/>
+        </p:nvSpPr>
+        <p:spPr>
+          <a:xfrm>
+            <a:off x="640080" y="2999232"/>
+            <a:ext cx="566928" cy="566928"/>
+          </a:xfrm>
+          <a:prstGeom prst="ellipse">
+            <a:avLst/>
+          </a:prstGeom>
+          <a:solidFill>
+            <a:srgbClr val="0E4D33"/>
+          </a:solidFill>
+          <a:ln>
+            <a:noFill/>
+          </a:ln>
+          <a:effectLst/>
+        </p:spPr>
+        <p:style>
+          <a:lnRef idx="1">
+            <a:schemeClr val="accent1"/>
+          </a:lnRef>
+          <a:fillRef idx="3">
+            <a:schemeClr val="accent1"/>
+          </a:fillRef>
+          <a:effectRef idx="2">
+            <a:schemeClr val="accent1"/>
+          </a:effectRef>
+          <a:fontRef idx="minor">
+            <a:schemeClr val="lt1"/>
+          </a:fontRef>
+        </p:style>
+        <p:txBody>
+          <a:bodyPr rtlCol="0" anchor="ctr" lIns="0" rIns="0" tIns="0" bIns="0"/>
+          <a:lstStyle/>
+          <a:p>
+            <a:pPr algn="ctr"/>
+            <a:r>
+              <a:rPr sz="1600" b="1">
+                <a:solidFill>
+                  <a:srgbClr val="FFFFFF"/>
+                </a:solidFill>
+                <a:latin typeface="Calibri"/>
+              </a:rPr>
+              <a:t>↔</a:t>
+            </a:r>
+          </a:p>
+        </p:txBody>
+      </p:sp>
+      <p:sp>
+        <p:nvSpPr>
+          <p:cNvPr id="9" name="TextBox 8" descr="Contrast"/>
+          <p:cNvSpPr txBox="1"/>
+          <p:nvPr/>
+        </p:nvSpPr>
+        <p:spPr>
+          <a:xfrm>
+            <a:off x="1417320" y="2944368"/>
+            <a:ext cx="10241280" cy="914400"/>
+          </a:xfrm>
+          <a:prstGeom prst="rect">
+            <a:avLst/>
+          </a:prstGeom>
+          <a:noFill/>
+        </p:spPr>
+        <p:txBody>
+          <a:bodyPr wrap="square">
+            <a:spAutoFit/>
+          </a:bodyPr>
+          <a:lstStyle/>
+          <a:p>
+            <a:pPr algn="l">
+              <a:spcAft>
+                <a:spcPts val="200"/>
+              </a:spcAft>
+            </a:pPr>
+            <a:r>
+              <a:rPr sz="1650" b="1" i="0">
+                <a:solidFill>
+                  <a:srgbClr val="0E4D33"/>
+                </a:solidFill>
+                <a:latin typeface="Cambria"/>
+              </a:rPr>
+              <a:t>Contrast</a:t>
+            </a:r>
+          </a:p>
+          <a:p>
+            <a:pPr algn="l">
+              <a:spcAft>
+                <a:spcPts val="0"/>
+              </a:spcAft>
+            </a:pPr>
+            <a:r>
+              <a:rPr sz="1550" b="0" i="0">
+                <a:solidFill>
+                  <a:srgbClr val="212A26"/>
+                </a:solidFill>
+                <a:latin typeface="Calibri"/>
+              </a:rPr>
+              <a:t>however · yet · on the other hand — 'turn coming; slow down.'</a:t>
+            </a:r>
+          </a:p>
+        </p:txBody>
+      </p:sp>
+      <p:sp>
+        <p:nvSpPr>
+          <p:cNvPr id="10" name="Oval 9" descr="Cause &amp; consequence icon"/>
+          <p:cNvSpPr/>
+          <p:nvPr/>
+        </p:nvSpPr>
+        <p:spPr>
+          <a:xfrm>
+            <a:off x="640080" y="4023360"/>
+            <a:ext cx="566928" cy="566928"/>
+          </a:xfrm>
+          <a:prstGeom prst="ellipse">
+            <a:avLst/>
+          </a:prstGeom>
+          <a:solidFill>
+            <a:srgbClr val="0E4D33"/>
+          </a:solidFill>
+          <a:ln>
+            <a:noFill/>
+          </a:ln>
+          <a:effectLst/>
+        </p:spPr>
+        <p:style>
+          <a:lnRef idx="1">
+            <a:schemeClr val="accent1"/>
+          </a:lnRef>
+          <a:fillRef idx="3">
+            <a:schemeClr val="accent1"/>
+          </a:fillRef>
+          <a:effectRef idx="2">
+            <a:schemeClr val="accent1"/>
+          </a:effectRef>
+          <a:fontRef idx="minor">
+            <a:schemeClr val="lt1"/>
+          </a:fontRef>
+        </p:style>
+        <p:txBody>
+          <a:bodyPr rtlCol="0" anchor="ctr" lIns="0" rIns="0" tIns="0" bIns="0"/>
+          <a:lstStyle/>
+          <a:p>
+            <a:pPr algn="ctr"/>
+            <a:r>
+              <a:rPr sz="1600" b="1">
+                <a:solidFill>
+                  <a:srgbClr val="FFFFFF"/>
+                </a:solidFill>
+                <a:latin typeface="Calibri"/>
+              </a:rPr>
+              <a:t>∴</a:t>
+            </a:r>
+          </a:p>
+        </p:txBody>
+      </p:sp>
+      <p:sp>
+        <p:nvSpPr>
+          <p:cNvPr id="11" name="TextBox 10" descr="Cause &amp; consequence"/>
+          <p:cNvSpPr txBox="1"/>
+          <p:nvPr/>
+        </p:nvSpPr>
+        <p:spPr>
+          <a:xfrm>
+            <a:off x="1417320" y="3968496"/>
+            <a:ext cx="10241280" cy="914400"/>
+          </a:xfrm>
+          <a:prstGeom prst="rect">
+            <a:avLst/>
+          </a:prstGeom>
+          <a:noFill/>
+        </p:spPr>
+        <p:txBody>
+          <a:bodyPr wrap="square">
+            <a:spAutoFit/>
+          </a:bodyPr>
+          <a:lstStyle/>
+          <a:p>
+            <a:pPr algn="l">
+              <a:spcAft>
+                <a:spcPts val="200"/>
+              </a:spcAft>
+            </a:pPr>
+            <a:r>
+              <a:rPr sz="1650" b="1" i="0">
+                <a:solidFill>
+                  <a:srgbClr val="0E4D33"/>
+                </a:solidFill>
+                <a:latin typeface="Cambria"/>
+              </a:rPr>
+              <a:t>Cause &amp; consequence</a:t>
+            </a:r>
+          </a:p>
+          <a:p>
+            <a:pPr algn="l">
+              <a:spcAft>
+                <a:spcPts val="0"/>
+              </a:spcAft>
+            </a:pPr>
+            <a:r>
+              <a:rPr sz="1550" b="0" i="0">
+                <a:solidFill>
+                  <a:srgbClr val="212A26"/>
+                </a:solidFill>
+                <a:latin typeface="Calibri"/>
+              </a:rPr>
+              <a:t>therefore · as a result · consequently — 'this follows from that.'</a:t>
+            </a:r>
+          </a:p>
+        </p:txBody>
+      </p:sp>
+      <p:sp>
+        <p:nvSpPr>
+          <p:cNvPr id="12" name="Oval 11" descr="Sequence icon"/>
+          <p:cNvSpPr/>
+          <p:nvPr/>
+        </p:nvSpPr>
+        <p:spPr>
+          <a:xfrm>
+            <a:off x="640080" y="5047488"/>
+            <a:ext cx="566928" cy="566928"/>
+          </a:xfrm>
+          <a:prstGeom prst="ellipse">
+            <a:avLst/>
+          </a:prstGeom>
+          <a:solidFill>
+            <a:srgbClr val="0E4D33"/>
+          </a:solidFill>
+          <a:ln>
+            <a:noFill/>
+          </a:ln>
+          <a:effectLst/>
+        </p:spPr>
+        <p:style>
+          <a:lnRef idx="1">
+            <a:schemeClr val="accent1"/>
+          </a:lnRef>
+          <a:fillRef idx="3">
+            <a:schemeClr val="accent1"/>
+          </a:fillRef>
+          <a:effectRef idx="2">
+            <a:schemeClr val="accent1"/>
+          </a:effectRef>
+          <a:fontRef idx="minor">
+            <a:schemeClr val="lt1"/>
+          </a:fontRef>
+        </p:style>
+        <p:txBody>
+          <a:bodyPr rtlCol="0" anchor="ctr" lIns="0" rIns="0" tIns="0" bIns="0"/>
+          <a:lstStyle/>
+          <a:p>
+            <a:pPr algn="ctr"/>
+            <a:r>
+              <a:rPr sz="1600" b="1">
+                <a:solidFill>
+                  <a:srgbClr val="FFFFFF"/>
+                </a:solidFill>
+                <a:latin typeface="Calibri"/>
+              </a:rPr>
+              <a:t>№</a:t>
+            </a:r>
+          </a:p>
+        </p:txBody>
+      </p:sp>
+      <p:sp>
+        <p:nvSpPr>
+          <p:cNvPr id="13" name="TextBox 12" descr="Sequence"/>
+          <p:cNvSpPr txBox="1"/>
+          <p:nvPr/>
+        </p:nvSpPr>
+        <p:spPr>
+          <a:xfrm>
+            <a:off x="1417320" y="4992624"/>
+            <a:ext cx="10241280" cy="914400"/>
+          </a:xfrm>
+          <a:prstGeom prst="rect">
+            <a:avLst/>
+          </a:prstGeom>
+          <a:noFill/>
+        </p:spPr>
+        <p:txBody>
+          <a:bodyPr wrap="square">
+            <a:spAutoFit/>
+          </a:bodyPr>
+          <a:lstStyle/>
+          <a:p>
+            <a:pPr algn="l">
+              <a:spcAft>
+                <a:spcPts val="200"/>
+              </a:spcAft>
+            </a:pPr>
+            <a:r>
+              <a:rPr sz="1650" b="1" i="0">
+                <a:solidFill>
+                  <a:srgbClr val="0E4D33"/>
+                </a:solidFill>
+                <a:latin typeface="Cambria"/>
+              </a:rPr>
+              <a:t>Sequence</a:t>
+            </a:r>
+          </a:p>
+          <a:p>
+            <a:pPr algn="l">
+              <a:spcAft>
+                <a:spcPts val="0"/>
+              </a:spcAft>
+            </a:pPr>
+            <a:r>
+              <a:rPr sz="1550" b="0" i="0">
+                <a:solidFill>
+                  <a:srgbClr val="212A26"/>
+                </a:solidFill>
+                <a:latin typeface="Calibri"/>
+              </a:rPr>
+              <a:t>first · next · finally — 'you are here' markers in a process.</a:t>
+            </a:r>
+          </a:p>
+        </p:txBody>
+      </p:sp>
+      <p:sp>
+        <p:nvSpPr>
+          <p:cNvPr id="14" name="Oval 13" descr="Example &amp; proof icon"/>
+          <p:cNvSpPr/>
+          <p:nvPr/>
+        </p:nvSpPr>
+        <p:spPr>
+          <a:xfrm>
+            <a:off x="640080" y="6071616"/>
+            <a:ext cx="566928" cy="566928"/>
+          </a:xfrm>
+          <a:prstGeom prst="ellipse">
+            <a:avLst/>
+          </a:prstGeom>
+          <a:solidFill>
+            <a:srgbClr val="0E4D33"/>
+          </a:solidFill>
+          <a:ln>
+            <a:noFill/>
+          </a:ln>
+          <a:effectLst/>
+        </p:spPr>
+        <p:style>
+          <a:lnRef idx="1">
+            <a:schemeClr val="accent1"/>
+          </a:lnRef>
+          <a:fillRef idx="3">
+            <a:schemeClr val="accent1"/>
+          </a:fillRef>
+          <a:effectRef idx="2">
+            <a:schemeClr val="accent1"/>
+          </a:effectRef>
+          <a:fontRef idx="minor">
+            <a:schemeClr val="lt1"/>
+          </a:fontRef>
+        </p:style>
+        <p:txBody>
+          <a:bodyPr rtlCol="0" anchor="ctr" lIns="0" rIns="0" tIns="0" bIns="0"/>
+          <a:lstStyle/>
+          <a:p>
+            <a:pPr algn="ctr"/>
+            <a:r>
+              <a:rPr sz="1600" b="1">
+                <a:solidFill>
+                  <a:srgbClr val="FFFFFF"/>
+                </a:solidFill>
+                <a:latin typeface="Calibri"/>
+              </a:rPr>
+              <a:t>◉</a:t>
+            </a:r>
+          </a:p>
+        </p:txBody>
+      </p:sp>
+      <p:sp>
+        <p:nvSpPr>
+          <p:cNvPr id="15" name="TextBox 14" descr="Example &amp; proof"/>
+          <p:cNvSpPr txBox="1"/>
+          <p:nvPr/>
+        </p:nvSpPr>
+        <p:spPr>
+          <a:xfrm>
+            <a:off x="1417320" y="6016752"/>
+            <a:ext cx="10241280" cy="914400"/>
+          </a:xfrm>
+          <a:prstGeom prst="rect">
+            <a:avLst/>
+          </a:prstGeom>
+          <a:noFill/>
+        </p:spPr>
+        <p:txBody>
+          <a:bodyPr wrap="square">
+            <a:spAutoFit/>
+          </a:bodyPr>
+          <a:lstStyle/>
+          <a:p>
+            <a:pPr algn="l">
+              <a:spcAft>
+                <a:spcPts val="200"/>
+              </a:spcAft>
+            </a:pPr>
+            <a:r>
+              <a:rPr sz="1650" b="1" i="0">
+                <a:solidFill>
+                  <a:srgbClr val="0E4D33"/>
+                </a:solidFill>
+                <a:latin typeface="Cambria"/>
+              </a:rPr>
+              <a:t>Example &amp; proof</a:t>
+            </a:r>
+          </a:p>
+          <a:p>
+            <a:pPr algn="l">
+              <a:spcAft>
+                <a:spcPts val="0"/>
+              </a:spcAft>
+            </a:pPr>
+            <a:r>
+              <a:rPr sz="1550" b="0" i="0">
+                <a:solidFill>
+                  <a:srgbClr val="212A26"/>
+                </a:solidFill>
+                <a:latin typeface="Calibri"/>
+              </a:rPr>
+              <a:t>for instance · specifically · in particular — 'the claim is about to get concrete.'</a:t>
+            </a:r>
+          </a:p>
+        </p:txBody>
+      </p:sp>
+    </p:spTree>
+  </p:cSld>
+  <p:clrMapOvr>
+    <a:masterClrMapping/>
+  </p:clrMapOvr>
+</p:sld>
+</file>
+
+<file path=ppt/slides/slide28.xml><?xml version="1.0" encoding="utf-8"?>
+<p:sld xmlns:a="http://schemas.openxmlformats.org/drawingml/2006/main" xmlns:p="http://schemas.openxmlformats.org/presentationml/2006/main" xmlns:r="http://schemas.openxmlformats.org/officeDocument/2006/relationships">
+  <p:cSld>
+    <p:bg>
+      <p:bgPr>
+        <a:solidFill>
+          <a:srgbClr val="FFFFFF"/>
+        </a:solidFill>
+        <a:effectLst/>
+      </p:bgPr>
+    </p:bg>
+    <p:spTree>
+      <p:nvGrpSpPr>
+        <p:cNvPr id="1" name=""/>
+        <p:cNvGrpSpPr/>
+        <p:nvPr/>
+      </p:nvGrpSpPr>
+      <p:grpSpPr/>
+      <p:sp>
+        <p:nvSpPr>
+          <p:cNvPr id="2" name="Title 1" descr="Slide title: Openings that earn the reader's next ten seconds"/>
+          <p:cNvSpPr>
+            <a:spLocks noGrp="1"/>
+          </p:cNvSpPr>
+          <p:nvPr>
+            <p:ph type="title"/>
+          </p:nvPr>
+        </p:nvSpPr>
+        <p:spPr>
+          <a:xfrm>
+            <a:off x="502920" y="411480"/>
+            <a:ext cx="11155680" cy="914400"/>
+          </a:xfrm>
+        </p:spPr>
+        <p:txBody>
+          <a:bodyPr wrap="square"/>
+          <a:lstStyle/>
+          <a:p>
+            <a:pPr algn="l"/>
+            <a:r>
+              <a:rPr sz="3200" b="1">
+                <a:solidFill>
+                  <a:srgbClr val="0E4D33"/>
+                </a:solidFill>
+                <a:latin typeface="Cambria"/>
+              </a:rPr>
+              <a:t>Openings that earn the reader's next ten seconds</a:t>
+            </a:r>
+          </a:p>
+        </p:txBody>
+      </p:sp>
+      <p:sp>
+        <p:nvSpPr>
+          <p:cNvPr id="3" name="TextBox 2" descr="Footer: BADM 225 · Chapter 3"/>
+          <p:cNvSpPr txBox="1"/>
+          <p:nvPr/>
+        </p:nvSpPr>
+        <p:spPr>
+          <a:xfrm>
+            <a:off x="502920" y="6446520"/>
+            <a:ext cx="5486400" cy="320040"/>
+          </a:xfrm>
+          <a:prstGeom prst="rect">
+            <a:avLst/>
+          </a:prstGeom>
+          <a:noFill/>
+        </p:spPr>
+        <p:txBody>
+          <a:bodyPr wrap="none">
+            <a:spAutoFit/>
+          </a:bodyPr>
+          <a:lstStyle/>
+          <a:p>
+            <a:r>
+              <a:rPr sz="1000">
+                <a:solidFill>
+                  <a:srgbClr val="5E6B64"/>
+                </a:solidFill>
+                <a:latin typeface="Calibri"/>
+              </a:rPr>
+              <a:t>BADM 225 · Chapter 3</a:t>
+            </a:r>
+          </a:p>
+        </p:txBody>
+      </p:sp>
+      <p:sp>
+        <p:nvSpPr>
+          <p:cNvPr id="4" name="TextBox 3" descr="Slide number 28"/>
+          <p:cNvSpPr txBox="1"/>
+          <p:nvPr/>
+        </p:nvSpPr>
+        <p:spPr>
+          <a:xfrm>
+            <a:off x="11247120" y="6446520"/>
+            <a:ext cx="640080" cy="320040"/>
+          </a:xfrm>
+          <a:prstGeom prst="rect">
+            <a:avLst/>
+          </a:prstGeom>
+          <a:noFill/>
+        </p:spPr>
+        <p:txBody>
+          <a:bodyPr wrap="none">
+            <a:spAutoFit/>
+          </a:bodyPr>
+          <a:lstStyle/>
+          <a:p>
+            <a:pPr algn="r"/>
+            <a:r>
+              <a:rPr sz="1000">
+                <a:solidFill>
+                  <a:srgbClr val="5E6B64"/>
+                </a:solidFill>
+                <a:latin typeface="Calibri"/>
+              </a:rPr>
+              <a:t>28</a:t>
+            </a:r>
+          </a:p>
+        </p:txBody>
+      </p:sp>
+      <p:sp>
+        <p:nvSpPr>
+          <p:cNvPr id="5" name="TextBox 4" descr="Key points"/>
+          <p:cNvSpPr txBox="1"/>
+          <p:nvPr/>
+        </p:nvSpPr>
+        <p:spPr>
+          <a:xfrm>
+            <a:off x="548640" y="1554480"/>
+            <a:ext cx="11064240" cy="4663440"/>
+          </a:xfrm>
+          <a:prstGeom prst="rect">
+            <a:avLst/>
+          </a:prstGeom>
+          <a:noFill/>
+        </p:spPr>
+        <p:txBody>
+          <a:bodyPr wrap="square">
+            <a:spAutoFit/>
+          </a:bodyPr>
+          <a:lstStyle/>
+          <a:p>
+            <a:pPr algn="l">
+              <a:spcAft>
+                <a:spcPts val="1200"/>
+              </a:spcAft>
+            </a:pPr>
+            <a:r>
+              <a:rPr sz="1700">
+                <a:solidFill>
+                  <a:srgbClr val="8A6410"/>
+                </a:solidFill>
+                <a:latin typeface="Calibri"/>
+              </a:rPr>
+              <a:t>▪  </a:t>
+            </a:r>
+            <a:r>
+              <a:rPr sz="1700" b="1">
+                <a:solidFill>
+                  <a:srgbClr val="0E4D33"/>
+                </a:solidFill>
+                <a:latin typeface="Calibri"/>
+              </a:rPr>
+              <a:t>The subject line is sentence zero.  </a:t>
+            </a:r>
+            <a:r>
+              <a:rPr sz="1700" b="0" i="0">
+                <a:solidFill>
+                  <a:srgbClr val="212A26"/>
+                </a:solidFill>
+                <a:latin typeface="Calibri"/>
+              </a:rPr>
+              <a:t>'Budget approval needed by Friday' outworks 'Question' — the decision to open, defer, or delete is made right there.</a:t>
+            </a:r>
+          </a:p>
+          <a:p>
+            <a:pPr algn="l">
+              <a:spcAft>
+                <a:spcPts val="1200"/>
+              </a:spcAft>
+            </a:pPr>
+            <a:r>
+              <a:rPr sz="1700">
+                <a:solidFill>
+                  <a:srgbClr val="8A6410"/>
+                </a:solidFill>
+                <a:latin typeface="Calibri"/>
+              </a:rPr>
+              <a:t>▪  </a:t>
+            </a:r>
+            <a:r>
+              <a:rPr sz="1700" b="1">
+                <a:solidFill>
+                  <a:srgbClr val="0E4D33"/>
+                </a:solidFill>
+                <a:latin typeface="Calibri"/>
+              </a:rPr>
+              <a:t>Direct messages: main point, sentence one.  </a:t>
+            </a:r>
+            <a:r>
+              <a:rPr sz="1700" b="0" i="0">
+                <a:solidFill>
+                  <a:srgbClr val="212A26"/>
+                </a:solidFill>
+                <a:latin typeface="Calibri"/>
+              </a:rPr>
+              <a:t>Request, recommendation, or news — before any background.</a:t>
+            </a:r>
+          </a:p>
+          <a:p>
+            <a:pPr algn="l">
+              <a:spcAft>
+                <a:spcPts val="1200"/>
+              </a:spcAft>
+            </a:pPr>
+            <a:r>
+              <a:rPr sz="1700">
+                <a:solidFill>
+                  <a:srgbClr val="8A6410"/>
+                </a:solidFill>
+                <a:latin typeface="Calibri"/>
+              </a:rPr>
+              <a:t>▪  </a:t>
+            </a:r>
+            <a:r>
+              <a:rPr sz="1700" b="1">
+                <a:solidFill>
+                  <a:srgbClr val="0E4D33"/>
+                </a:solidFill>
+                <a:latin typeface="Calibri"/>
+              </a:rPr>
+              <a:t>One sentence of context is a courtesy;  </a:t>
+            </a:r>
+            <a:r>
+              <a:rPr sz="1700" b="0" i="0">
+                <a:solidFill>
+                  <a:srgbClr val="212A26"/>
+                </a:solidFill>
+                <a:latin typeface="Calibri"/>
+              </a:rPr>
+              <a:t>three paragraphs of context is a hostage situation.</a:t>
+            </a:r>
+          </a:p>
+          <a:p>
+            <a:pPr algn="l">
+              <a:spcAft>
+                <a:spcPts val="1200"/>
+              </a:spcAft>
+            </a:pPr>
+            <a:r>
+              <a:rPr sz="1700">
+                <a:solidFill>
+                  <a:srgbClr val="8A6410"/>
+                </a:solidFill>
+                <a:latin typeface="Calibri"/>
+              </a:rPr>
+              <a:t>▪  </a:t>
+            </a:r>
+            <a:r>
+              <a:rPr sz="1700" b="1">
+                <a:solidFill>
+                  <a:srgbClr val="0E4D33"/>
+                </a:solidFill>
+                <a:latin typeface="Calibri"/>
+              </a:rPr>
+              <a:t>Never open with the archaeology:  </a:t>
+            </a:r>
+            <a:r>
+              <a:rPr sz="1700" b="0" i="0">
+                <a:solidFill>
+                  <a:srgbClr val="212A26"/>
+                </a:solidFill>
+                <a:latin typeface="Calibri"/>
+              </a:rPr>
+              <a:t>'I was reviewing the files from last quarter and noticed…' — start with what you found, not the story of finding it.</a:t>
+            </a:r>
+          </a:p>
+        </p:txBody>
+      </p:sp>
+    </p:spTree>
+  </p:cSld>
+  <p:clrMapOvr>
+    <a:masterClrMapping/>
+  </p:clrMapOvr>
+</p:sld>
+</file>
+
+<file path=ppt/slides/slide29.xml><?xml version="1.0" encoding="utf-8"?>
+<p:sld xmlns:a="http://schemas.openxmlformats.org/drawingml/2006/main" xmlns:p="http://schemas.openxmlformats.org/presentationml/2006/main" xmlns:r="http://schemas.openxmlformats.org/officeDocument/2006/relationships">
+  <p:cSld>
+    <p:bg>
+      <p:bgPr>
+        <a:solidFill>
+          <a:srgbClr val="FFFFFF"/>
+        </a:solidFill>
+        <a:effectLst/>
+      </p:bgPr>
+    </p:bg>
+    <p:spTree>
+      <p:nvGrpSpPr>
+        <p:cNvPr id="1" name=""/>
+        <p:cNvGrpSpPr/>
+        <p:nvPr/>
+      </p:nvGrpSpPr>
+      <p:grpSpPr/>
+      <p:sp>
+        <p:nvSpPr>
+          <p:cNvPr id="2" name="Title 1" descr="Slide title: Closings that move the work forward"/>
+          <p:cNvSpPr>
+            <a:spLocks noGrp="1"/>
+          </p:cNvSpPr>
+          <p:nvPr>
+            <p:ph type="title"/>
+          </p:nvPr>
+        </p:nvSpPr>
+        <p:spPr>
+          <a:xfrm>
+            <a:off x="502920" y="411480"/>
+            <a:ext cx="11155680" cy="914400"/>
+          </a:xfrm>
+        </p:spPr>
+        <p:txBody>
+          <a:bodyPr wrap="square"/>
+          <a:lstStyle/>
+          <a:p>
+            <a:pPr algn="l"/>
+            <a:r>
+              <a:rPr sz="3200" b="1">
+                <a:solidFill>
+                  <a:srgbClr val="0E4D33"/>
+                </a:solidFill>
+                <a:latin typeface="Cambria"/>
+              </a:rPr>
+              <a:t>Closings that move the work forward</a:t>
+            </a:r>
+          </a:p>
+        </p:txBody>
+      </p:sp>
+      <p:sp>
+        <p:nvSpPr>
+          <p:cNvPr id="3" name="TextBox 2" descr="Footer: BADM 225 · Chapter 3"/>
+          <p:cNvSpPr txBox="1"/>
+          <p:nvPr/>
+        </p:nvSpPr>
+        <p:spPr>
+          <a:xfrm>
+            <a:off x="502920" y="6446520"/>
+            <a:ext cx="5486400" cy="320040"/>
+          </a:xfrm>
+          <a:prstGeom prst="rect">
+            <a:avLst/>
+          </a:prstGeom>
+          <a:noFill/>
+        </p:spPr>
+        <p:txBody>
+          <a:bodyPr wrap="none">
+            <a:spAutoFit/>
+          </a:bodyPr>
+          <a:lstStyle/>
+          <a:p>
+            <a:r>
+              <a:rPr sz="1000">
+                <a:solidFill>
+                  <a:srgbClr val="5E6B64"/>
+                </a:solidFill>
+                <a:latin typeface="Calibri"/>
+              </a:rPr>
+              <a:t>BADM 225 · Chapter 3</a:t>
+            </a:r>
+          </a:p>
+        </p:txBody>
+      </p:sp>
+      <p:sp>
+        <p:nvSpPr>
+          <p:cNvPr id="4" name="TextBox 3" descr="Slide number 29"/>
+          <p:cNvSpPr txBox="1"/>
+          <p:nvPr/>
+        </p:nvSpPr>
+        <p:spPr>
+          <a:xfrm>
+            <a:off x="11247120" y="6446520"/>
+            <a:ext cx="640080" cy="320040"/>
+          </a:xfrm>
+          <a:prstGeom prst="rect">
+            <a:avLst/>
+          </a:prstGeom>
+          <a:noFill/>
+        </p:spPr>
+        <p:txBody>
+          <a:bodyPr wrap="none">
+            <a:spAutoFit/>
+          </a:bodyPr>
+          <a:lstStyle/>
+          <a:p>
+            <a:pPr algn="r"/>
+            <a:r>
+              <a:rPr sz="1000">
+                <a:solidFill>
+                  <a:srgbClr val="5E6B64"/>
+                </a:solidFill>
+                <a:latin typeface="Calibri"/>
+              </a:rPr>
+              <a:t>29</a:t>
+            </a:r>
+          </a:p>
+        </p:txBody>
+      </p:sp>
+      <p:sp>
+        <p:nvSpPr>
+          <p:cNvPr id="5" name="TextBox 4" descr="Key points"/>
+          <p:cNvSpPr txBox="1"/>
+          <p:nvPr/>
+        </p:nvSpPr>
+        <p:spPr>
+          <a:xfrm>
+            <a:off x="548640" y="1554480"/>
+            <a:ext cx="11064240" cy="4663440"/>
+          </a:xfrm>
+          <a:prstGeom prst="rect">
+            <a:avLst/>
+          </a:prstGeom>
+          <a:noFill/>
+        </p:spPr>
+        <p:txBody>
+          <a:bodyPr wrap="square">
+            <a:spAutoFit/>
+          </a:bodyPr>
+          <a:lstStyle/>
+          <a:p>
+            <a:pPr algn="l">
+              <a:spcAft>
+                <a:spcPts val="1200"/>
+              </a:spcAft>
+            </a:pPr>
+            <a:r>
+              <a:rPr sz="1700">
+                <a:solidFill>
+                  <a:srgbClr val="8A6410"/>
+                </a:solidFill>
+                <a:latin typeface="Calibri"/>
+              </a:rPr>
+              <a:t>▪  </a:t>
+            </a:r>
+            <a:r>
+              <a:rPr sz="1700" b="1">
+                <a:solidFill>
+                  <a:srgbClr val="0E4D33"/>
+                </a:solidFill>
+                <a:latin typeface="Calibri"/>
+              </a:rPr>
+              <a:t>Action, owner, date.  </a:t>
+            </a:r>
+            <a:r>
+              <a:rPr sz="1700" b="0" i="0">
+                <a:solidFill>
+                  <a:srgbClr val="212A26"/>
+                </a:solidFill>
+                <a:latin typeface="Calibri"/>
+              </a:rPr>
+              <a:t>'Please send the revised figures to me by Thursday, March 12' — every request needs all three or it isn't a request, it's a wish.</a:t>
+            </a:r>
+          </a:p>
+          <a:p>
+            <a:pPr algn="l">
+              <a:spcAft>
+                <a:spcPts val="1200"/>
+              </a:spcAft>
+            </a:pPr>
+            <a:r>
+              <a:rPr sz="1700">
+                <a:solidFill>
+                  <a:srgbClr val="8A6410"/>
+                </a:solidFill>
+                <a:latin typeface="Calibri"/>
+              </a:rPr>
+              <a:t>▪  </a:t>
+            </a:r>
+            <a:r>
+              <a:rPr sz="1700" b="1">
+                <a:solidFill>
+                  <a:srgbClr val="0E4D33"/>
+                </a:solidFill>
+                <a:latin typeface="Calibri"/>
+              </a:rPr>
+              <a:t>Make the next step frictionless.  </a:t>
+            </a:r>
+            <a:r>
+              <a:rPr sz="1700" b="0" i="0">
+                <a:solidFill>
+                  <a:srgbClr val="212A26"/>
+                </a:solidFill>
+                <a:latin typeface="Calibri"/>
+              </a:rPr>
+              <a:t>Attach the form, link the calendar, include the number — every step you remove doubles the odds of action.</a:t>
+            </a:r>
+          </a:p>
+          <a:p>
+            <a:pPr algn="l">
+              <a:spcAft>
+                <a:spcPts val="1200"/>
+              </a:spcAft>
+            </a:pPr>
+            <a:r>
+              <a:rPr sz="1700">
+                <a:solidFill>
+                  <a:srgbClr val="8A6410"/>
+                </a:solidFill>
+                <a:latin typeface="Calibri"/>
+              </a:rPr>
+              <a:t>▪  </a:t>
+            </a:r>
+            <a:r>
+              <a:rPr sz="1700" b="1">
+                <a:solidFill>
+                  <a:srgbClr val="0E4D33"/>
+                </a:solidFill>
+                <a:latin typeface="Calibri"/>
+              </a:rPr>
+              <a:t>End with goodwill that is specific.  </a:t>
+            </a:r>
+            <a:r>
+              <a:rPr sz="1700" b="0" i="0">
+                <a:solidFill>
+                  <a:srgbClr val="212A26"/>
+                </a:solidFill>
+                <a:latin typeface="Calibri"/>
+              </a:rPr>
+              <a:t>'Thanks for turning this around during inventory week' beats the upholstery of 'Thanks in advance!'</a:t>
+            </a:r>
+          </a:p>
+          <a:p>
+            <a:pPr algn="l">
+              <a:spcAft>
+                <a:spcPts val="1200"/>
+              </a:spcAft>
+            </a:pPr>
+            <a:r>
+              <a:rPr sz="1700">
+                <a:solidFill>
+                  <a:srgbClr val="8A6410"/>
+                </a:solidFill>
+                <a:latin typeface="Calibri"/>
+              </a:rPr>
+              <a:t>▪  </a:t>
+            </a:r>
+            <a:r>
+              <a:rPr sz="1700" b="1">
+                <a:solidFill>
+                  <a:srgbClr val="0E4D33"/>
+                </a:solidFill>
+                <a:latin typeface="Calibri"/>
+              </a:rPr>
+              <a:t>Don't reopen the case in the closing.  </a:t>
+            </a:r>
+            <a:r>
+              <a:rPr sz="1700" b="0" i="0">
+                <a:solidFill>
+                  <a:srgbClr val="212A26"/>
+                </a:solidFill>
+                <a:latin typeface="Calibri"/>
+              </a:rPr>
+              <a:t>New arguments in the last paragraph un-decide everything above them.</a:t>
             </a:r>
           </a:p>
         </p:txBody>
@@ -11601,6 +13789,1890 @@
                 <a:latin typeface="Calibri"/>
               </a:rPr>
               <a:t>3</a:t>
+            </a:r>
+          </a:p>
+        </p:txBody>
+      </p:sp>
+    </p:spTree>
+  </p:cSld>
+  <p:clrMapOvr>
+    <a:masterClrMapping/>
+  </p:clrMapOvr>
+</p:sld>
+</file>
+
+<file path=ppt/slides/slide30.xml><?xml version="1.0" encoding="utf-8"?>
+<p:sld xmlns:a="http://schemas.openxmlformats.org/drawingml/2006/main" xmlns:p="http://schemas.openxmlformats.org/presentationml/2006/main" xmlns:r="http://schemas.openxmlformats.org/officeDocument/2006/relationships">
+  <p:cSld>
+    <p:bg>
+      <p:bgPr>
+        <a:solidFill>
+          <a:srgbClr val="FFFFFF"/>
+        </a:solidFill>
+        <a:effectLst/>
+      </p:bgPr>
+    </p:bg>
+    <p:spTree>
+      <p:nvGrpSpPr>
+        <p:cNvPr id="1" name=""/>
+        <p:cNvGrpSpPr/>
+        <p:nvPr/>
+      </p:nvGrpSpPr>
+      <p:grpSpPr/>
+      <p:sp>
+        <p:nvSpPr>
+          <p:cNvPr id="2" name="Title 1" descr="Slide title: Case: the email that became a table"/>
+          <p:cNvSpPr>
+            <a:spLocks noGrp="1"/>
+          </p:cNvSpPr>
+          <p:nvPr>
+            <p:ph type="title"/>
+          </p:nvPr>
+        </p:nvSpPr>
+        <p:spPr>
+          <a:xfrm>
+            <a:off x="502920" y="411480"/>
+            <a:ext cx="11155680" cy="914400"/>
+          </a:xfrm>
+        </p:spPr>
+        <p:txBody>
+          <a:bodyPr wrap="square"/>
+          <a:lstStyle/>
+          <a:p>
+            <a:pPr algn="l"/>
+            <a:r>
+              <a:rPr sz="3200" b="1">
+                <a:solidFill>
+                  <a:srgbClr val="0E4D33"/>
+                </a:solidFill>
+                <a:latin typeface="Cambria"/>
+              </a:rPr>
+              <a:t>Case: the email that became a table</a:t>
+            </a:r>
+          </a:p>
+        </p:txBody>
+      </p:sp>
+      <p:sp>
+        <p:nvSpPr>
+          <p:cNvPr id="3" name="TextBox 2" descr="Footer: BADM 225 · Chapter 3"/>
+          <p:cNvSpPr txBox="1"/>
+          <p:nvPr/>
+        </p:nvSpPr>
+        <p:spPr>
+          <a:xfrm>
+            <a:off x="502920" y="6446520"/>
+            <a:ext cx="5486400" cy="320040"/>
+          </a:xfrm>
+          <a:prstGeom prst="rect">
+            <a:avLst/>
+          </a:prstGeom>
+          <a:noFill/>
+        </p:spPr>
+        <p:txBody>
+          <a:bodyPr wrap="none">
+            <a:spAutoFit/>
+          </a:bodyPr>
+          <a:lstStyle/>
+          <a:p>
+            <a:r>
+              <a:rPr sz="1000">
+                <a:solidFill>
+                  <a:srgbClr val="5E6B64"/>
+                </a:solidFill>
+                <a:latin typeface="Calibri"/>
+              </a:rPr>
+              <a:t>BADM 225 · Chapter 3</a:t>
+            </a:r>
+          </a:p>
+        </p:txBody>
+      </p:sp>
+      <p:sp>
+        <p:nvSpPr>
+          <p:cNvPr id="4" name="TextBox 3" descr="Slide number 30"/>
+          <p:cNvSpPr txBox="1"/>
+          <p:nvPr/>
+        </p:nvSpPr>
+        <p:spPr>
+          <a:xfrm>
+            <a:off x="11247120" y="6446520"/>
+            <a:ext cx="640080" cy="320040"/>
+          </a:xfrm>
+          <a:prstGeom prst="rect">
+            <a:avLst/>
+          </a:prstGeom>
+          <a:noFill/>
+        </p:spPr>
+        <p:txBody>
+          <a:bodyPr wrap="none">
+            <a:spAutoFit/>
+          </a:bodyPr>
+          <a:lstStyle/>
+          <a:p>
+            <a:pPr algn="r"/>
+            <a:r>
+              <a:rPr sz="1000">
+                <a:solidFill>
+                  <a:srgbClr val="5E6B64"/>
+                </a:solidFill>
+                <a:latin typeface="Calibri"/>
+              </a:rPr>
+              <a:t>30</a:t>
+            </a:r>
+          </a:p>
+        </p:txBody>
+      </p:sp>
+      <p:sp>
+        <p:nvSpPr>
+          <p:cNvPr id="5" name="TextBox 4" descr="Key points"/>
+          <p:cNvSpPr txBox="1"/>
+          <p:nvPr/>
+        </p:nvSpPr>
+        <p:spPr>
+          <a:xfrm>
+            <a:off x="548640" y="1554480"/>
+            <a:ext cx="11064240" cy="4663440"/>
+          </a:xfrm>
+          <a:prstGeom prst="rect">
+            <a:avLst/>
+          </a:prstGeom>
+          <a:noFill/>
+        </p:spPr>
+        <p:txBody>
+          <a:bodyPr wrap="square">
+            <a:spAutoFit/>
+          </a:bodyPr>
+          <a:lstStyle/>
+          <a:p>
+            <a:pPr algn="l">
+              <a:spcAft>
+                <a:spcPts val="1200"/>
+              </a:spcAft>
+            </a:pPr>
+            <a:r>
+              <a:rPr sz="1700">
+                <a:solidFill>
+                  <a:srgbClr val="8A6410"/>
+                </a:solidFill>
+                <a:latin typeface="Calibri"/>
+              </a:rPr>
+              <a:t>▪  </a:t>
+            </a:r>
+            <a:r>
+              <a:rPr sz="1700" b="1">
+                <a:solidFill>
+                  <a:srgbClr val="0E4D33"/>
+                </a:solidFill>
+                <a:latin typeface="Calibri"/>
+              </a:rPr>
+              <a:t>Before:  </a:t>
+            </a:r>
+            <a:r>
+              <a:rPr sz="1700" b="0" i="0">
+                <a:solidFill>
+                  <a:srgbClr val="212A26"/>
+                </a:solidFill>
+                <a:latin typeface="Calibri"/>
+              </a:rPr>
+              <a:t>Nine sentences comparing three vendors' prices, support hours, and contract terms — every fact true, no fact findable twice.</a:t>
+            </a:r>
+          </a:p>
+          <a:p>
+            <a:pPr algn="l">
+              <a:spcAft>
+                <a:spcPts val="1200"/>
+              </a:spcAft>
+            </a:pPr>
+            <a:r>
+              <a:rPr sz="1700">
+                <a:solidFill>
+                  <a:srgbClr val="8A6410"/>
+                </a:solidFill>
+                <a:latin typeface="Calibri"/>
+              </a:rPr>
+              <a:t>▪  </a:t>
+            </a:r>
+            <a:r>
+              <a:rPr sz="1700" b="1">
+                <a:solidFill>
+                  <a:srgbClr val="0E4D33"/>
+                </a:solidFill>
+                <a:latin typeface="Calibri"/>
+              </a:rPr>
+              <a:t>The reply:  </a:t>
+            </a:r>
+            <a:r>
+              <a:rPr sz="1700" b="0" i="0">
+                <a:solidFill>
+                  <a:srgbClr val="212A26"/>
+                </a:solidFill>
+                <a:latin typeface="Calibri"/>
+              </a:rPr>
+              <a:t>'Can you summarize the differences?' — the writer had summarized them. In prose. That was the problem.</a:t>
+            </a:r>
+          </a:p>
+          <a:p>
+            <a:pPr algn="l">
+              <a:spcAft>
+                <a:spcPts val="1200"/>
+              </a:spcAft>
+            </a:pPr>
+            <a:r>
+              <a:rPr sz="1700">
+                <a:solidFill>
+                  <a:srgbClr val="8A6410"/>
+                </a:solidFill>
+                <a:latin typeface="Calibri"/>
+              </a:rPr>
+              <a:t>▪  </a:t>
+            </a:r>
+            <a:r>
+              <a:rPr sz="1700" b="1">
+                <a:solidFill>
+                  <a:srgbClr val="0E4D33"/>
+                </a:solidFill>
+                <a:latin typeface="Calibri"/>
+              </a:rPr>
+              <a:t>After:  </a:t>
+            </a:r>
+            <a:r>
+              <a:rPr sz="1700" b="0" i="0">
+                <a:solidFill>
+                  <a:srgbClr val="212A26"/>
+                </a:solidFill>
+                <a:latin typeface="Calibri"/>
+              </a:rPr>
+              <a:t>A three-column table (vendor × price, support, term) plus TWO sentences of prose: the recommendation and the reason.</a:t>
+            </a:r>
+          </a:p>
+          <a:p>
+            <a:pPr algn="l">
+              <a:spcAft>
+                <a:spcPts val="1200"/>
+              </a:spcAft>
+            </a:pPr>
+            <a:r>
+              <a:rPr sz="1700">
+                <a:solidFill>
+                  <a:srgbClr val="8A6410"/>
+                </a:solidFill>
+                <a:latin typeface="Calibri"/>
+              </a:rPr>
+              <a:t>▪  </a:t>
+            </a:r>
+            <a:r>
+              <a:rPr sz="1700" b="1">
+                <a:solidFill>
+                  <a:srgbClr val="0E4D33"/>
+                </a:solidFill>
+                <a:latin typeface="Calibri"/>
+              </a:rPr>
+              <a:t>The lesson:  </a:t>
+            </a:r>
+            <a:r>
+              <a:rPr sz="1700" b="0" i="0">
+                <a:solidFill>
+                  <a:srgbClr val="212A26"/>
+                </a:solidFill>
+                <a:latin typeface="Calibri"/>
+              </a:rPr>
+              <a:t>prose carries the argument; the table carries the facts. When you make readers hold six numbers in working memory, they hold none (Miller, 1956).</a:t>
+            </a:r>
+          </a:p>
+        </p:txBody>
+      </p:sp>
+    </p:spTree>
+  </p:cSld>
+  <p:clrMapOvr>
+    <a:masterClrMapping/>
+  </p:clrMapOvr>
+</p:sld>
+</file>
+
+<file path=ppt/slides/slide31.xml><?xml version="1.0" encoding="utf-8"?>
+<p:sld xmlns:a="http://schemas.openxmlformats.org/drawingml/2006/main" xmlns:p="http://schemas.openxmlformats.org/presentationml/2006/main" xmlns:r="http://schemas.openxmlformats.org/officeDocument/2006/relationships">
+  <p:cSld>
+    <p:bg>
+      <p:bgPr>
+        <a:solidFill>
+          <a:srgbClr val="FFFFFF"/>
+        </a:solidFill>
+        <a:effectLst/>
+      </p:bgPr>
+    </p:bg>
+    <p:spTree>
+      <p:nvGrpSpPr>
+        <p:cNvPr id="1" name=""/>
+        <p:cNvGrpSpPr/>
+        <p:nvPr/>
+      </p:nvGrpSpPr>
+      <p:grpSpPr/>
+      <p:sp>
+        <p:nvSpPr>
+          <p:cNvPr id="2" name="Title 1" descr="Slide title: Key takeaways"/>
+          <p:cNvSpPr>
+            <a:spLocks noGrp="1"/>
+          </p:cNvSpPr>
+          <p:nvPr>
+            <p:ph type="title"/>
+          </p:nvPr>
+        </p:nvSpPr>
+        <p:spPr>
+          <a:xfrm>
+            <a:off x="502920" y="411480"/>
+            <a:ext cx="11155680" cy="914400"/>
+          </a:xfrm>
+        </p:spPr>
+        <p:txBody>
+          <a:bodyPr wrap="square"/>
+          <a:lstStyle/>
+          <a:p>
+            <a:pPr algn="l"/>
+            <a:r>
+              <a:rPr sz="3200" b="1">
+                <a:solidFill>
+                  <a:srgbClr val="0E4D33"/>
+                </a:solidFill>
+                <a:latin typeface="Cambria"/>
+              </a:rPr>
+              <a:t>Key takeaways</a:t>
+            </a:r>
+          </a:p>
+        </p:txBody>
+      </p:sp>
+      <p:sp>
+        <p:nvSpPr>
+          <p:cNvPr id="3" name="TextBox 2" descr="Footer: BADM 225 · Chapter 3"/>
+          <p:cNvSpPr txBox="1"/>
+          <p:nvPr/>
+        </p:nvSpPr>
+        <p:spPr>
+          <a:xfrm>
+            <a:off x="502920" y="6446520"/>
+            <a:ext cx="5486400" cy="320040"/>
+          </a:xfrm>
+          <a:prstGeom prst="rect">
+            <a:avLst/>
+          </a:prstGeom>
+          <a:noFill/>
+        </p:spPr>
+        <p:txBody>
+          <a:bodyPr wrap="none">
+            <a:spAutoFit/>
+          </a:bodyPr>
+          <a:lstStyle/>
+          <a:p>
+            <a:r>
+              <a:rPr sz="1000">
+                <a:solidFill>
+                  <a:srgbClr val="5E6B64"/>
+                </a:solidFill>
+                <a:latin typeface="Calibri"/>
+              </a:rPr>
+              <a:t>BADM 225 · Chapter 3</a:t>
+            </a:r>
+          </a:p>
+        </p:txBody>
+      </p:sp>
+      <p:sp>
+        <p:nvSpPr>
+          <p:cNvPr id="4" name="TextBox 3" descr="Slide number 31"/>
+          <p:cNvSpPr txBox="1"/>
+          <p:nvPr/>
+        </p:nvSpPr>
+        <p:spPr>
+          <a:xfrm>
+            <a:off x="11247120" y="6446520"/>
+            <a:ext cx="640080" cy="320040"/>
+          </a:xfrm>
+          <a:prstGeom prst="rect">
+            <a:avLst/>
+          </a:prstGeom>
+          <a:noFill/>
+        </p:spPr>
+        <p:txBody>
+          <a:bodyPr wrap="none">
+            <a:spAutoFit/>
+          </a:bodyPr>
+          <a:lstStyle/>
+          <a:p>
+            <a:pPr algn="r"/>
+            <a:r>
+              <a:rPr sz="1000">
+                <a:solidFill>
+                  <a:srgbClr val="5E6B64"/>
+                </a:solidFill>
+                <a:latin typeface="Calibri"/>
+              </a:rPr>
+              <a:t>31</a:t>
+            </a:r>
+          </a:p>
+        </p:txBody>
+      </p:sp>
+      <p:sp>
+        <p:nvSpPr>
+          <p:cNvPr id="5" name="Oval 4" descr="Checkmark"/>
+          <p:cNvSpPr/>
+          <p:nvPr/>
+        </p:nvSpPr>
+        <p:spPr>
+          <a:xfrm>
+            <a:off x="640080" y="1572768"/>
+            <a:ext cx="420624" cy="420624"/>
+          </a:xfrm>
+          <a:prstGeom prst="ellipse">
+            <a:avLst/>
+          </a:prstGeom>
+          <a:solidFill>
+            <a:srgbClr val="0E4D33"/>
+          </a:solidFill>
+          <a:ln>
+            <a:noFill/>
+          </a:ln>
+          <a:effectLst/>
+        </p:spPr>
+        <p:style>
+          <a:lnRef idx="1">
+            <a:schemeClr val="accent1"/>
+          </a:lnRef>
+          <a:fillRef idx="3">
+            <a:schemeClr val="accent1"/>
+          </a:fillRef>
+          <a:effectRef idx="2">
+            <a:schemeClr val="accent1"/>
+          </a:effectRef>
+          <a:fontRef idx="minor">
+            <a:schemeClr val="lt1"/>
+          </a:fontRef>
+        </p:style>
+        <p:txBody>
+          <a:bodyPr rtlCol="0" anchor="ctr" lIns="0" rIns="0" tIns="0" bIns="0"/>
+          <a:lstStyle/>
+          <a:p>
+            <a:pPr algn="ctr"/>
+            <a:r>
+              <a:rPr sz="1100" b="1">
+                <a:solidFill>
+                  <a:srgbClr val="FFFFFF"/>
+                </a:solidFill>
+                <a:latin typeface="Calibri"/>
+              </a:rPr>
+              <a:t>✓</a:t>
+            </a:r>
+          </a:p>
+        </p:txBody>
+      </p:sp>
+      <p:sp>
+        <p:nvSpPr>
+          <p:cNvPr id="6" name="TextBox 5" descr="Takeaway 1"/>
+          <p:cNvSpPr txBox="1"/>
+          <p:nvPr/>
+        </p:nvSpPr>
+        <p:spPr>
+          <a:xfrm>
+            <a:off x="1325880" y="1554480"/>
+            <a:ext cx="10332720" cy="640080"/>
+          </a:xfrm>
+          <a:prstGeom prst="rect">
+            <a:avLst/>
+          </a:prstGeom>
+          <a:noFill/>
+        </p:spPr>
+        <p:txBody>
+          <a:bodyPr wrap="square">
+            <a:spAutoFit/>
+          </a:bodyPr>
+          <a:lstStyle/>
+          <a:p>
+            <a:pPr algn="l">
+              <a:spcAft>
+                <a:spcPts val="800"/>
+              </a:spcAft>
+            </a:pPr>
+            <a:r>
+              <a:rPr sz="1550" b="0" i="0">
+                <a:solidFill>
+                  <a:srgbClr val="212A26"/>
+                </a:solidFill>
+                <a:latin typeface="Calibri"/>
+              </a:rPr>
+              <a:t>One decision first: direct for receptive readers, indirect for resistance and bad news.</a:t>
+            </a:r>
+          </a:p>
+        </p:txBody>
+      </p:sp>
+      <p:sp>
+        <p:nvSpPr>
+          <p:cNvPr id="7" name="Oval 6" descr="Checkmark"/>
+          <p:cNvSpPr/>
+          <p:nvPr/>
+        </p:nvSpPr>
+        <p:spPr>
+          <a:xfrm>
+            <a:off x="640080" y="2212848"/>
+            <a:ext cx="420624" cy="420624"/>
+          </a:xfrm>
+          <a:prstGeom prst="ellipse">
+            <a:avLst/>
+          </a:prstGeom>
+          <a:solidFill>
+            <a:srgbClr val="0E4D33"/>
+          </a:solidFill>
+          <a:ln>
+            <a:noFill/>
+          </a:ln>
+          <a:effectLst/>
+        </p:spPr>
+        <p:style>
+          <a:lnRef idx="1">
+            <a:schemeClr val="accent1"/>
+          </a:lnRef>
+          <a:fillRef idx="3">
+            <a:schemeClr val="accent1"/>
+          </a:fillRef>
+          <a:effectRef idx="2">
+            <a:schemeClr val="accent1"/>
+          </a:effectRef>
+          <a:fontRef idx="minor">
+            <a:schemeClr val="lt1"/>
+          </a:fontRef>
+        </p:style>
+        <p:txBody>
+          <a:bodyPr rtlCol="0" anchor="ctr" lIns="0" rIns="0" tIns="0" bIns="0"/>
+          <a:lstStyle/>
+          <a:p>
+            <a:pPr algn="ctr"/>
+            <a:r>
+              <a:rPr sz="1100" b="1">
+                <a:solidFill>
+                  <a:srgbClr val="FFFFFF"/>
+                </a:solidFill>
+                <a:latin typeface="Calibri"/>
+              </a:rPr>
+              <a:t>✓</a:t>
+            </a:r>
+          </a:p>
+        </p:txBody>
+      </p:sp>
+      <p:sp>
+        <p:nvSpPr>
+          <p:cNvPr id="8" name="TextBox 7" descr="Takeaway 2"/>
+          <p:cNvSpPr txBox="1"/>
+          <p:nvPr/>
+        </p:nvSpPr>
+        <p:spPr>
+          <a:xfrm>
+            <a:off x="1325880" y="2194560"/>
+            <a:ext cx="10332720" cy="640080"/>
+          </a:xfrm>
+          <a:prstGeom prst="rect">
+            <a:avLst/>
+          </a:prstGeom>
+          <a:noFill/>
+        </p:spPr>
+        <p:txBody>
+          <a:bodyPr wrap="square">
+            <a:spAutoFit/>
+          </a:bodyPr>
+          <a:lstStyle/>
+          <a:p>
+            <a:pPr algn="l">
+              <a:spcAft>
+                <a:spcPts val="800"/>
+              </a:spcAft>
+            </a:pPr>
+            <a:r>
+              <a:rPr sz="1550" b="0" i="0">
+                <a:solidFill>
+                  <a:srgbClr val="212A26"/>
+                </a:solidFill>
+                <a:latin typeface="Calibri"/>
+              </a:rPr>
+              <a:t>Outline in three moves — dump, group into named families, sequence — and cut the orphans.</a:t>
+            </a:r>
+          </a:p>
+        </p:txBody>
+      </p:sp>
+      <p:sp>
+        <p:nvSpPr>
+          <p:cNvPr id="9" name="Oval 8" descr="Checkmark"/>
+          <p:cNvSpPr/>
+          <p:nvPr/>
+        </p:nvSpPr>
+        <p:spPr>
+          <a:xfrm>
+            <a:off x="640080" y="2852928"/>
+            <a:ext cx="420624" cy="420624"/>
+          </a:xfrm>
+          <a:prstGeom prst="ellipse">
+            <a:avLst/>
+          </a:prstGeom>
+          <a:solidFill>
+            <a:srgbClr val="0E4D33"/>
+          </a:solidFill>
+          <a:ln>
+            <a:noFill/>
+          </a:ln>
+          <a:effectLst/>
+        </p:spPr>
+        <p:style>
+          <a:lnRef idx="1">
+            <a:schemeClr val="accent1"/>
+          </a:lnRef>
+          <a:fillRef idx="3">
+            <a:schemeClr val="accent1"/>
+          </a:fillRef>
+          <a:effectRef idx="2">
+            <a:schemeClr val="accent1"/>
+          </a:effectRef>
+          <a:fontRef idx="minor">
+            <a:schemeClr val="lt1"/>
+          </a:fontRef>
+        </p:style>
+        <p:txBody>
+          <a:bodyPr rtlCol="0" anchor="ctr" lIns="0" rIns="0" tIns="0" bIns="0"/>
+          <a:lstStyle/>
+          <a:p>
+            <a:pPr algn="ctr"/>
+            <a:r>
+              <a:rPr sz="1100" b="1">
+                <a:solidFill>
+                  <a:srgbClr val="FFFFFF"/>
+                </a:solidFill>
+                <a:latin typeface="Calibri"/>
+              </a:rPr>
+              <a:t>✓</a:t>
+            </a:r>
+          </a:p>
+        </p:txBody>
+      </p:sp>
+      <p:sp>
+        <p:nvSpPr>
+          <p:cNvPr id="10" name="TextBox 9" descr="Takeaway 3"/>
+          <p:cNvSpPr txBox="1"/>
+          <p:nvPr/>
+        </p:nvSpPr>
+        <p:spPr>
+          <a:xfrm>
+            <a:off x="1325880" y="2834640"/>
+            <a:ext cx="10332720" cy="640080"/>
+          </a:xfrm>
+          <a:prstGeom prst="rect">
+            <a:avLst/>
+          </a:prstGeom>
+          <a:noFill/>
+        </p:spPr>
+        <p:txBody>
+          <a:bodyPr wrap="square">
+            <a:spAutoFit/>
+          </a:bodyPr>
+          <a:lstStyle/>
+          <a:p>
+            <a:pPr algn="l">
+              <a:spcAft>
+                <a:spcPts val="800"/>
+              </a:spcAft>
+            </a:pPr>
+            <a:r>
+              <a:rPr sz="1550" b="0" i="0">
+                <a:solidFill>
+                  <a:srgbClr val="212A26"/>
+                </a:solidFill>
+                <a:latin typeface="Calibri"/>
+              </a:rPr>
+              <a:t>Paragraphs: one claim, topic sentence first, echoes carrying old-to-new flow.</a:t>
+            </a:r>
+          </a:p>
+        </p:txBody>
+      </p:sp>
+      <p:sp>
+        <p:nvSpPr>
+          <p:cNvPr id="11" name="Oval 10" descr="Checkmark"/>
+          <p:cNvSpPr/>
+          <p:nvPr/>
+        </p:nvSpPr>
+        <p:spPr>
+          <a:xfrm>
+            <a:off x="640080" y="3493008"/>
+            <a:ext cx="420624" cy="420624"/>
+          </a:xfrm>
+          <a:prstGeom prst="ellipse">
+            <a:avLst/>
+          </a:prstGeom>
+          <a:solidFill>
+            <a:srgbClr val="0E4D33"/>
+          </a:solidFill>
+          <a:ln>
+            <a:noFill/>
+          </a:ln>
+          <a:effectLst/>
+        </p:spPr>
+        <p:style>
+          <a:lnRef idx="1">
+            <a:schemeClr val="accent1"/>
+          </a:lnRef>
+          <a:fillRef idx="3">
+            <a:schemeClr val="accent1"/>
+          </a:fillRef>
+          <a:effectRef idx="2">
+            <a:schemeClr val="accent1"/>
+          </a:effectRef>
+          <a:fontRef idx="minor">
+            <a:schemeClr val="lt1"/>
+          </a:fontRef>
+        </p:style>
+        <p:txBody>
+          <a:bodyPr rtlCol="0" anchor="ctr" lIns="0" rIns="0" tIns="0" bIns="0"/>
+          <a:lstStyle/>
+          <a:p>
+            <a:pPr algn="ctr"/>
+            <a:r>
+              <a:rPr sz="1100" b="1">
+                <a:solidFill>
+                  <a:srgbClr val="FFFFFF"/>
+                </a:solidFill>
+                <a:latin typeface="Calibri"/>
+              </a:rPr>
+              <a:t>✓</a:t>
+            </a:r>
+          </a:p>
+        </p:txBody>
+      </p:sp>
+      <p:sp>
+        <p:nvSpPr>
+          <p:cNvPr id="12" name="TextBox 11" descr="Takeaway 4"/>
+          <p:cNvSpPr txBox="1"/>
+          <p:nvPr/>
+        </p:nvSpPr>
+        <p:spPr>
+          <a:xfrm>
+            <a:off x="1325880" y="3474720"/>
+            <a:ext cx="10332720" cy="640080"/>
+          </a:xfrm>
+          <a:prstGeom prst="rect">
+            <a:avLst/>
+          </a:prstGeom>
+          <a:noFill/>
+        </p:spPr>
+        <p:txBody>
+          <a:bodyPr wrap="square">
+            <a:spAutoFit/>
+          </a:bodyPr>
+          <a:lstStyle/>
+          <a:p>
+            <a:pPr algn="l">
+              <a:spcAft>
+                <a:spcPts val="800"/>
+              </a:spcAft>
+            </a:pPr>
+            <a:r>
+              <a:rPr sz="1550" b="0" i="0">
+                <a:solidFill>
+                  <a:srgbClr val="212A26"/>
+                </a:solidFill>
+                <a:latin typeface="Calibri"/>
+              </a:rPr>
+              <a:t>The stress position at the sentence's end is your emphasis dial (Gopen &amp; Swan, 1990).</a:t>
+            </a:r>
+          </a:p>
+        </p:txBody>
+      </p:sp>
+      <p:sp>
+        <p:nvSpPr>
+          <p:cNvPr id="13" name="Oval 12" descr="Checkmark"/>
+          <p:cNvSpPr/>
+          <p:nvPr/>
+        </p:nvSpPr>
+        <p:spPr>
+          <a:xfrm>
+            <a:off x="640080" y="4133088"/>
+            <a:ext cx="420624" cy="420624"/>
+          </a:xfrm>
+          <a:prstGeom prst="ellipse">
+            <a:avLst/>
+          </a:prstGeom>
+          <a:solidFill>
+            <a:srgbClr val="0E4D33"/>
+          </a:solidFill>
+          <a:ln>
+            <a:noFill/>
+          </a:ln>
+          <a:effectLst/>
+        </p:spPr>
+        <p:style>
+          <a:lnRef idx="1">
+            <a:schemeClr val="accent1"/>
+          </a:lnRef>
+          <a:fillRef idx="3">
+            <a:schemeClr val="accent1"/>
+          </a:fillRef>
+          <a:effectRef idx="2">
+            <a:schemeClr val="accent1"/>
+          </a:effectRef>
+          <a:fontRef idx="minor">
+            <a:schemeClr val="lt1"/>
+          </a:fontRef>
+        </p:style>
+        <p:txBody>
+          <a:bodyPr rtlCol="0" anchor="ctr" lIns="0" rIns="0" tIns="0" bIns="0"/>
+          <a:lstStyle/>
+          <a:p>
+            <a:pPr algn="ctr"/>
+            <a:r>
+              <a:rPr sz="1100" b="1">
+                <a:solidFill>
+                  <a:srgbClr val="FFFFFF"/>
+                </a:solidFill>
+                <a:latin typeface="Calibri"/>
+              </a:rPr>
+              <a:t>✓</a:t>
+            </a:r>
+          </a:p>
+        </p:txBody>
+      </p:sp>
+      <p:sp>
+        <p:nvSpPr>
+          <p:cNvPr id="14" name="TextBox 13" descr="Takeaway 5"/>
+          <p:cNvSpPr txBox="1"/>
+          <p:nvPr/>
+        </p:nvSpPr>
+        <p:spPr>
+          <a:xfrm>
+            <a:off x="1325880" y="4114800"/>
+            <a:ext cx="10332720" cy="640080"/>
+          </a:xfrm>
+          <a:prstGeom prst="rect">
+            <a:avLst/>
+          </a:prstGeom>
+          <a:noFill/>
+        </p:spPr>
+        <p:txBody>
+          <a:bodyPr wrap="square">
+            <a:spAutoFit/>
+          </a:bodyPr>
+          <a:lstStyle/>
+          <a:p>
+            <a:pPr algn="l">
+              <a:spcAft>
+                <a:spcPts val="800"/>
+              </a:spcAft>
+            </a:pPr>
+            <a:r>
+              <a:rPr sz="1550" b="0" i="0">
+                <a:solidFill>
+                  <a:srgbClr val="212A26"/>
+                </a:solidFill>
+                <a:latin typeface="Calibri"/>
+              </a:rPr>
+              <a:t>Active by default; passive on purpose; never as camouflage. Keep series parallel; chunk for 7±2.</a:t>
+            </a:r>
+          </a:p>
+        </p:txBody>
+      </p:sp>
+      <p:sp>
+        <p:nvSpPr>
+          <p:cNvPr id="15" name="Oval 14" descr="Checkmark"/>
+          <p:cNvSpPr/>
+          <p:nvPr/>
+        </p:nvSpPr>
+        <p:spPr>
+          <a:xfrm>
+            <a:off x="640080" y="4773168"/>
+            <a:ext cx="420624" cy="420624"/>
+          </a:xfrm>
+          <a:prstGeom prst="ellipse">
+            <a:avLst/>
+          </a:prstGeom>
+          <a:solidFill>
+            <a:srgbClr val="0E4D33"/>
+          </a:solidFill>
+          <a:ln>
+            <a:noFill/>
+          </a:ln>
+          <a:effectLst/>
+        </p:spPr>
+        <p:style>
+          <a:lnRef idx="1">
+            <a:schemeClr val="accent1"/>
+          </a:lnRef>
+          <a:fillRef idx="3">
+            <a:schemeClr val="accent1"/>
+          </a:fillRef>
+          <a:effectRef idx="2">
+            <a:schemeClr val="accent1"/>
+          </a:effectRef>
+          <a:fontRef idx="minor">
+            <a:schemeClr val="lt1"/>
+          </a:fontRef>
+        </p:style>
+        <p:txBody>
+          <a:bodyPr rtlCol="0" anchor="ctr" lIns="0" rIns="0" tIns="0" bIns="0"/>
+          <a:lstStyle/>
+          <a:p>
+            <a:pPr algn="ctr"/>
+            <a:r>
+              <a:rPr sz="1100" b="1">
+                <a:solidFill>
+                  <a:srgbClr val="FFFFFF"/>
+                </a:solidFill>
+                <a:latin typeface="Calibri"/>
+              </a:rPr>
+              <a:t>✓</a:t>
+            </a:r>
+          </a:p>
+        </p:txBody>
+      </p:sp>
+      <p:sp>
+        <p:nvSpPr>
+          <p:cNvPr id="16" name="TextBox 15" descr="Takeaway 6"/>
+          <p:cNvSpPr txBox="1"/>
+          <p:nvPr/>
+        </p:nvSpPr>
+        <p:spPr>
+          <a:xfrm>
+            <a:off x="1325880" y="4754880"/>
+            <a:ext cx="10332720" cy="640080"/>
+          </a:xfrm>
+          <a:prstGeom prst="rect">
+            <a:avLst/>
+          </a:prstGeom>
+          <a:noFill/>
+        </p:spPr>
+        <p:txBody>
+          <a:bodyPr wrap="square">
+            <a:spAutoFit/>
+          </a:bodyPr>
+          <a:lstStyle/>
+          <a:p>
+            <a:pPr algn="l">
+              <a:spcAft>
+                <a:spcPts val="800"/>
+              </a:spcAft>
+            </a:pPr>
+            <a:r>
+              <a:rPr sz="1550" b="0" i="0">
+                <a:solidFill>
+                  <a:srgbClr val="212A26"/>
+                </a:solidFill>
+                <a:latin typeface="Calibri"/>
+              </a:rPr>
+              <a:t>Draft fast, judge later — generating and judging are different jobs.</a:t>
+            </a:r>
+          </a:p>
+        </p:txBody>
+      </p:sp>
+      <p:sp>
+        <p:nvSpPr>
+          <p:cNvPr id="17" name="Oval 16" descr="Checkmark"/>
+          <p:cNvSpPr/>
+          <p:nvPr/>
+        </p:nvSpPr>
+        <p:spPr>
+          <a:xfrm>
+            <a:off x="640080" y="5413248"/>
+            <a:ext cx="420624" cy="420624"/>
+          </a:xfrm>
+          <a:prstGeom prst="ellipse">
+            <a:avLst/>
+          </a:prstGeom>
+          <a:solidFill>
+            <a:srgbClr val="0E4D33"/>
+          </a:solidFill>
+          <a:ln>
+            <a:noFill/>
+          </a:ln>
+          <a:effectLst/>
+        </p:spPr>
+        <p:style>
+          <a:lnRef idx="1">
+            <a:schemeClr val="accent1"/>
+          </a:lnRef>
+          <a:fillRef idx="3">
+            <a:schemeClr val="accent1"/>
+          </a:fillRef>
+          <a:effectRef idx="2">
+            <a:schemeClr val="accent1"/>
+          </a:effectRef>
+          <a:fontRef idx="minor">
+            <a:schemeClr val="lt1"/>
+          </a:fontRef>
+        </p:style>
+        <p:txBody>
+          <a:bodyPr rtlCol="0" anchor="ctr" lIns="0" rIns="0" tIns="0" bIns="0"/>
+          <a:lstStyle/>
+          <a:p>
+            <a:pPr algn="ctr"/>
+            <a:r>
+              <a:rPr sz="1100" b="1">
+                <a:solidFill>
+                  <a:srgbClr val="FFFFFF"/>
+                </a:solidFill>
+                <a:latin typeface="Calibri"/>
+              </a:rPr>
+              <a:t>✓</a:t>
+            </a:r>
+          </a:p>
+        </p:txBody>
+      </p:sp>
+      <p:sp>
+        <p:nvSpPr>
+          <p:cNvPr id="18" name="TextBox 17" descr="Takeaway 7"/>
+          <p:cNvSpPr txBox="1"/>
+          <p:nvPr/>
+        </p:nvSpPr>
+        <p:spPr>
+          <a:xfrm>
+            <a:off x="1325880" y="5394960"/>
+            <a:ext cx="10332720" cy="640080"/>
+          </a:xfrm>
+          <a:prstGeom prst="rect">
+            <a:avLst/>
+          </a:prstGeom>
+          <a:noFill/>
+        </p:spPr>
+        <p:txBody>
+          <a:bodyPr wrap="square">
+            <a:spAutoFit/>
+          </a:bodyPr>
+          <a:lstStyle/>
+          <a:p>
+            <a:pPr algn="l">
+              <a:spcAft>
+                <a:spcPts val="800"/>
+              </a:spcAft>
+            </a:pPr>
+            <a:r>
+              <a:rPr sz="1550" b="0" i="0">
+                <a:solidFill>
+                  <a:srgbClr val="212A26"/>
+                </a:solidFill>
+                <a:latin typeface="Calibri"/>
+              </a:rPr>
+              <a:t>Design for the F-pattern: front-load sentences and paragraphs; lists and tables where comparison lives.</a:t>
+            </a:r>
+          </a:p>
+        </p:txBody>
+      </p:sp>
+      <p:sp>
+        <p:nvSpPr>
+          <p:cNvPr id="19" name="Rounded Rectangle 18" descr="Practice reminder"/>
+          <p:cNvSpPr/>
+          <p:nvPr/>
+        </p:nvSpPr>
+        <p:spPr>
+          <a:xfrm>
+            <a:off x="548640" y="5623560"/>
+            <a:ext cx="10424160" cy="685800"/>
+          </a:xfrm>
+          <a:prstGeom prst="roundRect">
+            <a:avLst/>
+          </a:prstGeom>
+          <a:solidFill>
+            <a:srgbClr val="0E4D33"/>
+          </a:solidFill>
+          <a:ln>
+            <a:noFill/>
+          </a:ln>
+          <a:effectLst/>
+        </p:spPr>
+        <p:style>
+          <a:lnRef idx="1">
+            <a:schemeClr val="accent1"/>
+          </a:lnRef>
+          <a:fillRef idx="3">
+            <a:schemeClr val="accent1"/>
+          </a:fillRef>
+          <a:effectRef idx="2">
+            <a:schemeClr val="accent1"/>
+          </a:effectRef>
+          <a:fontRef idx="minor">
+            <a:schemeClr val="lt1"/>
+          </a:fontRef>
+        </p:style>
+        <p:txBody>
+          <a:bodyPr rtlCol="0" anchor="t" wrap="square" lIns="164592" rIns="164592" tIns="128016" bIns="109728"/>
+          <a:lstStyle/>
+          <a:p>
+            <a:pPr algn="l">
+              <a:spcAft>
+                <a:spcPts val="0"/>
+              </a:spcAft>
+            </a:pPr>
+            <a:r>
+              <a:rPr sz="1450" b="1" i="0">
+                <a:solidFill>
+                  <a:srgbClr val="FFFFFF"/>
+                </a:solidFill>
+                <a:latin typeface="Calibri"/>
+              </a:rPr>
+              <a:t>Practice now: course site → Chapter 3 → Practice, then the graded homework before the weekly deadline.</a:t>
+            </a:r>
+          </a:p>
+        </p:txBody>
+      </p:sp>
+    </p:spTree>
+  </p:cSld>
+  <p:clrMapOvr>
+    <a:masterClrMapping/>
+  </p:clrMapOvr>
+</p:sld>
+</file>
+
+<file path=ppt/slides/slide32.xml><?xml version="1.0" encoding="utf-8"?>
+<p:sld xmlns:a="http://schemas.openxmlformats.org/drawingml/2006/main" xmlns:p="http://schemas.openxmlformats.org/presentationml/2006/main" xmlns:r="http://schemas.openxmlformats.org/officeDocument/2006/relationships">
+  <p:cSld>
+    <p:bg>
+      <p:bgPr>
+        <a:solidFill>
+          <a:srgbClr val="EAF1EB"/>
+        </a:solidFill>
+        <a:effectLst/>
+      </p:bgPr>
+    </p:bg>
+    <p:spTree>
+      <p:nvGrpSpPr>
+        <p:cNvPr id="1" name=""/>
+        <p:cNvGrpSpPr/>
+        <p:nvPr/>
+      </p:nvGrpSpPr>
+      <p:grpSpPr/>
+      <p:sp>
+        <p:nvSpPr>
+          <p:cNvPr id="2" name="Title 1" descr="Slide title: Worth keeping"/>
+          <p:cNvSpPr>
+            <a:spLocks noGrp="1"/>
+          </p:cNvSpPr>
+          <p:nvPr>
+            <p:ph type="title"/>
+          </p:nvPr>
+        </p:nvSpPr>
+        <p:spPr>
+          <a:xfrm>
+            <a:off x="502920" y="411480"/>
+            <a:ext cx="11155680" cy="914400"/>
+          </a:xfrm>
+        </p:spPr>
+        <p:txBody>
+          <a:bodyPr wrap="square"/>
+          <a:lstStyle/>
+          <a:p>
+            <a:pPr algn="l"/>
+            <a:r>
+              <a:rPr sz="3400" b="1">
+                <a:solidFill>
+                  <a:srgbClr val="0E4D33"/>
+                </a:solidFill>
+                <a:latin typeface="Cambria"/>
+              </a:rPr>
+              <a:t>Worth keeping</a:t>
+            </a:r>
+          </a:p>
+        </p:txBody>
+      </p:sp>
+      <p:sp>
+        <p:nvSpPr>
+          <p:cNvPr id="3" name="TextBox 2" descr="Quotation"/>
+          <p:cNvSpPr txBox="1"/>
+          <p:nvPr/>
+        </p:nvSpPr>
+        <p:spPr>
+          <a:xfrm>
+            <a:off x="1280160" y="2194560"/>
+            <a:ext cx="9601200" cy="2377440"/>
+          </a:xfrm>
+          <a:prstGeom prst="rect">
+            <a:avLst/>
+          </a:prstGeom>
+          <a:noFill/>
+        </p:spPr>
+        <p:txBody>
+          <a:bodyPr wrap="square">
+            <a:spAutoFit/>
+          </a:bodyPr>
+          <a:lstStyle/>
+          <a:p>
+            <a:pPr algn="l">
+              <a:spcAft>
+                <a:spcPts val="800"/>
+              </a:spcAft>
+            </a:pPr>
+            <a:r>
+              <a:rPr sz="2700" b="0" i="1">
+                <a:solidFill>
+                  <a:srgbClr val="212A26"/>
+                </a:solidFill>
+                <a:latin typeface="Cambria"/>
+              </a:rPr>
+              <a:t>“Readers do not remember what you wrote. They remember what they read — and they read the first sentence, the headings, and the ends of things.”</a:t>
+            </a:r>
+          </a:p>
+        </p:txBody>
+      </p:sp>
+      <p:sp>
+        <p:nvSpPr>
+          <p:cNvPr id="4" name="TextBox 3" descr="Attribution"/>
+          <p:cNvSpPr txBox="1"/>
+          <p:nvPr/>
+        </p:nvSpPr>
+        <p:spPr>
+          <a:xfrm>
+            <a:off x="1280160" y="4754880"/>
+            <a:ext cx="9601200" cy="548640"/>
+          </a:xfrm>
+          <a:prstGeom prst="rect">
+            <a:avLst/>
+          </a:prstGeom>
+          <a:noFill/>
+        </p:spPr>
+        <p:txBody>
+          <a:bodyPr wrap="square">
+            <a:spAutoFit/>
+          </a:bodyPr>
+          <a:lstStyle/>
+          <a:p>
+            <a:pPr algn="l">
+              <a:spcAft>
+                <a:spcPts val="800"/>
+              </a:spcAft>
+            </a:pPr>
+            <a:r>
+              <a:rPr sz="1600" b="0" i="0">
+                <a:solidFill>
+                  <a:srgbClr val="5E6B64"/>
+                </a:solidFill>
+                <a:latin typeface="Calibri"/>
+              </a:rPr>
+              <a:t>— this chapter, compressed</a:t>
+            </a:r>
+          </a:p>
+        </p:txBody>
+      </p:sp>
+      <p:sp>
+        <p:nvSpPr>
+          <p:cNvPr id="5" name="TextBox 4" descr="Footer: BADM 225 · Chapter 3"/>
+          <p:cNvSpPr txBox="1"/>
+          <p:nvPr/>
+        </p:nvSpPr>
+        <p:spPr>
+          <a:xfrm>
+            <a:off x="502920" y="6446520"/>
+            <a:ext cx="5486400" cy="320040"/>
+          </a:xfrm>
+          <a:prstGeom prst="rect">
+            <a:avLst/>
+          </a:prstGeom>
+          <a:noFill/>
+        </p:spPr>
+        <p:txBody>
+          <a:bodyPr wrap="none">
+            <a:spAutoFit/>
+          </a:bodyPr>
+          <a:lstStyle/>
+          <a:p>
+            <a:r>
+              <a:rPr sz="1000">
+                <a:solidFill>
+                  <a:srgbClr val="5E6B64"/>
+                </a:solidFill>
+                <a:latin typeface="Calibri"/>
+              </a:rPr>
+              <a:t>BADM 225 · Chapter 3</a:t>
+            </a:r>
+          </a:p>
+        </p:txBody>
+      </p:sp>
+      <p:sp>
+        <p:nvSpPr>
+          <p:cNvPr id="6" name="TextBox 5" descr="Slide number 32"/>
+          <p:cNvSpPr txBox="1"/>
+          <p:nvPr/>
+        </p:nvSpPr>
+        <p:spPr>
+          <a:xfrm>
+            <a:off x="11247120" y="6446520"/>
+            <a:ext cx="640080" cy="320040"/>
+          </a:xfrm>
+          <a:prstGeom prst="rect">
+            <a:avLst/>
+          </a:prstGeom>
+          <a:noFill/>
+        </p:spPr>
+        <p:txBody>
+          <a:bodyPr wrap="none">
+            <a:spAutoFit/>
+          </a:bodyPr>
+          <a:lstStyle/>
+          <a:p>
+            <a:pPr algn="r"/>
+            <a:r>
+              <a:rPr sz="1000">
+                <a:solidFill>
+                  <a:srgbClr val="5E6B64"/>
+                </a:solidFill>
+                <a:latin typeface="Calibri"/>
+              </a:rPr>
+              <a:t>32</a:t>
+            </a:r>
+          </a:p>
+        </p:txBody>
+      </p:sp>
+    </p:spTree>
+  </p:cSld>
+  <p:clrMapOvr>
+    <a:masterClrMapping/>
+  </p:clrMapOvr>
+</p:sld>
+</file>
+
+<file path=ppt/slides/slide33.xml><?xml version="1.0" encoding="utf-8"?>
+<p:sld xmlns:a="http://schemas.openxmlformats.org/drawingml/2006/main" xmlns:p="http://schemas.openxmlformats.org/presentationml/2006/main" xmlns:r="http://schemas.openxmlformats.org/officeDocument/2006/relationships">
+  <p:cSld>
+    <p:bg>
+      <p:bgPr>
+        <a:solidFill>
+          <a:srgbClr val="0E4D33"/>
+        </a:solidFill>
+        <a:effectLst/>
+      </p:bgPr>
+    </p:bg>
+    <p:spTree>
+      <p:nvGrpSpPr>
+        <p:cNvPr id="1" name=""/>
+        <p:cNvGrpSpPr/>
+        <p:nvPr/>
+      </p:nvGrpSpPr>
+      <p:grpSpPr/>
+      <p:sp>
+        <p:nvSpPr>
+          <p:cNvPr id="2" name="Title 1" descr="Slide title: Discussion questions"/>
+          <p:cNvSpPr>
+            <a:spLocks noGrp="1"/>
+          </p:cNvSpPr>
+          <p:nvPr>
+            <p:ph type="title"/>
+          </p:nvPr>
+        </p:nvSpPr>
+        <p:spPr>
+          <a:xfrm>
+            <a:off x="502920" y="411480"/>
+            <a:ext cx="11155680" cy="914400"/>
+          </a:xfrm>
+        </p:spPr>
+        <p:txBody>
+          <a:bodyPr wrap="square"/>
+          <a:lstStyle/>
+          <a:p>
+            <a:pPr algn="l"/>
+            <a:r>
+              <a:rPr sz="3400" b="1">
+                <a:solidFill>
+                  <a:srgbClr val="FFFFFF"/>
+                </a:solidFill>
+                <a:latin typeface="Cambria"/>
+              </a:rPr>
+              <a:t>Discussion questions</a:t>
+            </a:r>
+          </a:p>
+        </p:txBody>
+      </p:sp>
+      <p:sp>
+        <p:nvSpPr>
+          <p:cNvPr id="3" name="TextBox 2" descr="Discussion questions"/>
+          <p:cNvSpPr txBox="1"/>
+          <p:nvPr/>
+        </p:nvSpPr>
+        <p:spPr>
+          <a:xfrm>
+            <a:off x="731520" y="1737360"/>
+            <a:ext cx="10698480" cy="4480560"/>
+          </a:xfrm>
+          <a:prstGeom prst="rect">
+            <a:avLst/>
+          </a:prstGeom>
+          <a:noFill/>
+        </p:spPr>
+        <p:txBody>
+          <a:bodyPr wrap="square">
+            <a:spAutoFit/>
+          </a:bodyPr>
+          <a:lstStyle/>
+          <a:p>
+            <a:pPr algn="l">
+              <a:spcAft>
+                <a:spcPts val="1800"/>
+              </a:spcAft>
+            </a:pPr>
+            <a:r>
+              <a:rPr sz="1800" b="1">
+                <a:solidFill>
+                  <a:srgbClr val="C9931A"/>
+                </a:solidFill>
+                <a:latin typeface="Calibri"/>
+              </a:rPr>
+              <a:t>1.  </a:t>
+            </a:r>
+            <a:r>
+              <a:rPr sz="1800" b="0" i="0">
+                <a:solidFill>
+                  <a:srgbClr val="FFFFFF"/>
+                </a:solidFill>
+                <a:latin typeface="Calibri"/>
+              </a:rPr>
+              <a:t>Find a real message organized by the writer's process instead of the reader's decision. What earns sentence one?</a:t>
+            </a:r>
+          </a:p>
+          <a:p>
+            <a:pPr algn="l">
+              <a:spcAft>
+                <a:spcPts val="1800"/>
+              </a:spcAft>
+            </a:pPr>
+            <a:r>
+              <a:rPr sz="1800" b="1">
+                <a:solidFill>
+                  <a:srgbClr val="C9931A"/>
+                </a:solidFill>
+                <a:latin typeface="Calibri"/>
+              </a:rPr>
+              <a:t>2.  </a:t>
+            </a:r>
+            <a:r>
+              <a:rPr sz="1800" b="0" i="0">
+                <a:solidFill>
+                  <a:srgbClr val="FFFFFF"/>
+                </a:solidFill>
+                <a:latin typeface="Calibri"/>
+              </a:rPr>
+              <a:t>Collect three passives from documents around you: tool or camouflage? Rewrite the camouflage.</a:t>
+            </a:r>
+          </a:p>
+          <a:p>
+            <a:pPr algn="l">
+              <a:spcAft>
+                <a:spcPts val="1800"/>
+              </a:spcAft>
+            </a:pPr>
+            <a:r>
+              <a:rPr sz="1800" b="1">
+                <a:solidFill>
+                  <a:srgbClr val="C9931A"/>
+                </a:solidFill>
+                <a:latin typeface="Calibri"/>
+              </a:rPr>
+              <a:t>3.  </a:t>
+            </a:r>
+            <a:r>
+              <a:rPr sz="1800" b="0" i="0">
+                <a:solidFill>
+                  <a:srgbClr val="FFFFFF"/>
+                </a:solidFill>
+                <a:latin typeface="Calibri"/>
+              </a:rPr>
+              <a:t>Audition every sentence of your last substantial paragraph against its topic sentence. What moves out?</a:t>
+            </a:r>
+          </a:p>
+          <a:p>
+            <a:pPr algn="l">
+              <a:spcAft>
+                <a:spcPts val="1800"/>
+              </a:spcAft>
+            </a:pPr>
+            <a:r>
+              <a:rPr sz="1800" b="1">
+                <a:solidFill>
+                  <a:srgbClr val="C9931A"/>
+                </a:solidFill>
+                <a:latin typeface="Calibri"/>
+              </a:rPr>
+              <a:t>4.  </a:t>
+            </a:r>
+            <a:r>
+              <a:rPr sz="1800" b="0" i="0">
+                <a:solidFill>
+                  <a:srgbClr val="FFFFFF"/>
+                </a:solidFill>
+                <a:latin typeface="Calibri"/>
+              </a:rPr>
+              <a:t>Where is the line between direct and merely abrupt? Give a case from your own inbox.</a:t>
+            </a:r>
+          </a:p>
+          <a:p>
+            <a:pPr algn="l">
+              <a:spcAft>
+                <a:spcPts val="1800"/>
+              </a:spcAft>
+            </a:pPr>
+            <a:r>
+              <a:rPr sz="1800" b="1">
+                <a:solidFill>
+                  <a:srgbClr val="C9931A"/>
+                </a:solidFill>
+                <a:latin typeface="Calibri"/>
+              </a:rPr>
+              <a:t>5.  </a:t>
+            </a:r>
+            <a:r>
+              <a:rPr sz="1800" b="0" i="0">
+                <a:solidFill>
+                  <a:srgbClr val="FFFFFF"/>
+                </a:solidFill>
+                <a:latin typeface="Calibri"/>
+              </a:rPr>
+              <a:t>Run Word's readability statistics on something you wrote. What does the score see — and what does it miss?</a:t>
+            </a:r>
+          </a:p>
+        </p:txBody>
+      </p:sp>
+      <p:sp>
+        <p:nvSpPr>
+          <p:cNvPr id="4" name="TextBox 3" descr="Footer"/>
+          <p:cNvSpPr txBox="1"/>
+          <p:nvPr/>
+        </p:nvSpPr>
+        <p:spPr>
+          <a:xfrm>
+            <a:off x="502920" y="6446520"/>
+            <a:ext cx="5486400" cy="320040"/>
+          </a:xfrm>
+          <a:prstGeom prst="rect">
+            <a:avLst/>
+          </a:prstGeom>
+          <a:noFill/>
+        </p:spPr>
+        <p:txBody>
+          <a:bodyPr wrap="none">
+            <a:spAutoFit/>
+          </a:bodyPr>
+          <a:lstStyle/>
+          <a:p>
+            <a:r>
+              <a:rPr sz="1000">
+                <a:solidFill>
+                  <a:srgbClr val="A8C4B2"/>
+                </a:solidFill>
+                <a:latin typeface="Calibri"/>
+              </a:rPr>
+              <a:t>BADM 225 · Chapter 3</a:t>
+            </a:r>
+          </a:p>
+        </p:txBody>
+      </p:sp>
+    </p:spTree>
+  </p:cSld>
+  <p:clrMapOvr>
+    <a:masterClrMapping/>
+  </p:clrMapOvr>
+</p:sld>
+</file>
+
+<file path=ppt/slides/slide34.xml><?xml version="1.0" encoding="utf-8"?>
+<p:sld xmlns:a="http://schemas.openxmlformats.org/drawingml/2006/main" xmlns:p="http://schemas.openxmlformats.org/presentationml/2006/main" xmlns:r="http://schemas.openxmlformats.org/officeDocument/2006/relationships">
+  <p:cSld>
+    <p:bg>
+      <p:bgPr>
+        <a:solidFill>
+          <a:srgbClr val="FFFFFF"/>
+        </a:solidFill>
+        <a:effectLst/>
+      </p:bgPr>
+    </p:bg>
+    <p:spTree>
+      <p:nvGrpSpPr>
+        <p:cNvPr id="1" name=""/>
+        <p:cNvGrpSpPr/>
+        <p:nvPr/>
+      </p:nvGrpSpPr>
+      <p:grpSpPr/>
+      <p:sp>
+        <p:nvSpPr>
+          <p:cNvPr id="2" name="Title 1" descr="Slide title: Your next steps"/>
+          <p:cNvSpPr>
+            <a:spLocks noGrp="1"/>
+          </p:cNvSpPr>
+          <p:nvPr>
+            <p:ph type="title"/>
+          </p:nvPr>
+        </p:nvSpPr>
+        <p:spPr>
+          <a:xfrm>
+            <a:off x="502920" y="411480"/>
+            <a:ext cx="11155680" cy="914400"/>
+          </a:xfrm>
+        </p:spPr>
+        <p:txBody>
+          <a:bodyPr wrap="square"/>
+          <a:lstStyle/>
+          <a:p>
+            <a:pPr algn="l"/>
+            <a:r>
+              <a:rPr sz="3200" b="1">
+                <a:solidFill>
+                  <a:srgbClr val="0E4D33"/>
+                </a:solidFill>
+                <a:latin typeface="Cambria"/>
+              </a:rPr>
+              <a:t>Your next steps</a:t>
+            </a:r>
+          </a:p>
+        </p:txBody>
+      </p:sp>
+      <p:sp>
+        <p:nvSpPr>
+          <p:cNvPr id="3" name="TextBox 2" descr="Footer: BADM 225 · Chapter 3"/>
+          <p:cNvSpPr txBox="1"/>
+          <p:nvPr/>
+        </p:nvSpPr>
+        <p:spPr>
+          <a:xfrm>
+            <a:off x="502920" y="6446520"/>
+            <a:ext cx="5486400" cy="320040"/>
+          </a:xfrm>
+          <a:prstGeom prst="rect">
+            <a:avLst/>
+          </a:prstGeom>
+          <a:noFill/>
+        </p:spPr>
+        <p:txBody>
+          <a:bodyPr wrap="none">
+            <a:spAutoFit/>
+          </a:bodyPr>
+          <a:lstStyle/>
+          <a:p>
+            <a:r>
+              <a:rPr sz="1000">
+                <a:solidFill>
+                  <a:srgbClr val="5E6B64"/>
+                </a:solidFill>
+                <a:latin typeface="Calibri"/>
+              </a:rPr>
+              <a:t>BADM 225 · Chapter 3</a:t>
+            </a:r>
+          </a:p>
+        </p:txBody>
+      </p:sp>
+      <p:sp>
+        <p:nvSpPr>
+          <p:cNvPr id="4" name="TextBox 3" descr="Slide number 34"/>
+          <p:cNvSpPr txBox="1"/>
+          <p:nvPr/>
+        </p:nvSpPr>
+        <p:spPr>
+          <a:xfrm>
+            <a:off x="11247120" y="6446520"/>
+            <a:ext cx="640080" cy="320040"/>
+          </a:xfrm>
+          <a:prstGeom prst="rect">
+            <a:avLst/>
+          </a:prstGeom>
+          <a:noFill/>
+        </p:spPr>
+        <p:txBody>
+          <a:bodyPr wrap="none">
+            <a:spAutoFit/>
+          </a:bodyPr>
+          <a:lstStyle/>
+          <a:p>
+            <a:pPr algn="r"/>
+            <a:r>
+              <a:rPr sz="1000">
+                <a:solidFill>
+                  <a:srgbClr val="5E6B64"/>
+                </a:solidFill>
+                <a:latin typeface="Calibri"/>
+              </a:rPr>
+              <a:t>34</a:t>
+            </a:r>
+          </a:p>
+        </p:txBody>
+      </p:sp>
+      <p:sp>
+        <p:nvSpPr>
+          <p:cNvPr id="5" name="TextBox 4" descr="Key points"/>
+          <p:cNvSpPr txBox="1"/>
+          <p:nvPr/>
+        </p:nvSpPr>
+        <p:spPr>
+          <a:xfrm>
+            <a:off x="548640" y="1554480"/>
+            <a:ext cx="11064240" cy="4663440"/>
+          </a:xfrm>
+          <a:prstGeom prst="rect">
+            <a:avLst/>
+          </a:prstGeom>
+          <a:noFill/>
+        </p:spPr>
+        <p:txBody>
+          <a:bodyPr wrap="square">
+            <a:spAutoFit/>
+          </a:bodyPr>
+          <a:lstStyle/>
+          <a:p>
+            <a:pPr algn="l">
+              <a:spcAft>
+                <a:spcPts val="1200"/>
+              </a:spcAft>
+            </a:pPr>
+            <a:r>
+              <a:rPr sz="1700">
+                <a:solidFill>
+                  <a:srgbClr val="8A6410"/>
+                </a:solidFill>
+                <a:latin typeface="Calibri"/>
+              </a:rPr>
+              <a:t>▪  </a:t>
+            </a:r>
+            <a:r>
+              <a:rPr sz="1700" b="1">
+                <a:solidFill>
+                  <a:srgbClr val="0E4D33"/>
+                </a:solidFill>
+                <a:latin typeface="Calibri"/>
+              </a:rPr>
+              <a:t>Practice:  </a:t>
+            </a:r>
+            <a:r>
+              <a:rPr sz="1700" b="0" i="0">
+                <a:solidFill>
+                  <a:srgbClr val="212A26"/>
+                </a:solidFill>
+                <a:latin typeface="Calibri"/>
+              </a:rPr>
+              <a:t>Course site → Chapter 3 → Practice questions (instant feedback, unlimited tries).</a:t>
+            </a:r>
+          </a:p>
+          <a:p>
+            <a:pPr algn="l">
+              <a:spcAft>
+                <a:spcPts val="1200"/>
+              </a:spcAft>
+            </a:pPr>
+            <a:r>
+              <a:rPr sz="1700">
+                <a:solidFill>
+                  <a:srgbClr val="8A6410"/>
+                </a:solidFill>
+                <a:latin typeface="Calibri"/>
+              </a:rPr>
+              <a:t>▪  </a:t>
+            </a:r>
+            <a:r>
+              <a:rPr sz="1700" b="1">
+                <a:solidFill>
+                  <a:srgbClr val="0E4D33"/>
+                </a:solidFill>
+                <a:latin typeface="Calibri"/>
+              </a:rPr>
+              <a:t>Graded:  </a:t>
+            </a:r>
+            <a:r>
+              <a:rPr sz="1700" b="0" i="0">
+                <a:solidFill>
+                  <a:srgbClr val="212A26"/>
+                </a:solidFill>
+                <a:latin typeface="Calibri"/>
+              </a:rPr>
+              <a:t>Complete the Chapter 3 homework on the site; paste your completion code into the Blackboard assignment before the weekly deadline.</a:t>
+            </a:r>
+          </a:p>
+          <a:p>
+            <a:pPr algn="l">
+              <a:spcAft>
+                <a:spcPts val="1200"/>
+              </a:spcAft>
+            </a:pPr>
+            <a:r>
+              <a:rPr sz="1700">
+                <a:solidFill>
+                  <a:srgbClr val="8A6410"/>
+                </a:solidFill>
+                <a:latin typeface="Calibri"/>
+              </a:rPr>
+              <a:t>▪  </a:t>
+            </a:r>
+            <a:r>
+              <a:rPr sz="1700" b="1">
+                <a:solidFill>
+                  <a:srgbClr val="0E4D33"/>
+                </a:solidFill>
+                <a:latin typeface="Calibri"/>
+              </a:rPr>
+              <a:t>Read:  </a:t>
+            </a:r>
+            <a:r>
+              <a:rPr sz="1700" b="0" i="0">
+                <a:solidFill>
+                  <a:srgbClr val="212A26"/>
+                </a:solidFill>
+                <a:latin typeface="Calibri"/>
+              </a:rPr>
+              <a:t>The Chapter 3 Study Guide — includes the sentence workshop with ten repairs and answers.</a:t>
+            </a:r>
+          </a:p>
+          <a:p>
+            <a:pPr algn="l">
+              <a:spcAft>
+                <a:spcPts val="1200"/>
+              </a:spcAft>
+            </a:pPr>
+            <a:r>
+              <a:rPr sz="1700">
+                <a:solidFill>
+                  <a:srgbClr val="8A6410"/>
+                </a:solidFill>
+                <a:latin typeface="Calibri"/>
+              </a:rPr>
+              <a:t>▪  </a:t>
+            </a:r>
+            <a:r>
+              <a:rPr sz="1700" b="1">
+                <a:solidFill>
+                  <a:srgbClr val="0E4D33"/>
+                </a:solidFill>
+                <a:latin typeface="Calibri"/>
+              </a:rPr>
+              <a:t>Do:  </a:t>
+            </a:r>
+            <a:r>
+              <a:rPr sz="1700" b="0" i="0">
+                <a:solidFill>
+                  <a:srgbClr val="212A26"/>
+                </a:solidFill>
+                <a:latin typeface="Calibri"/>
+              </a:rPr>
+              <a:t>Outline your next substantial message with dump-group-sequence before drafting a word.</a:t>
+            </a:r>
+          </a:p>
+          <a:p>
+            <a:pPr algn="l">
+              <a:spcAft>
+                <a:spcPts val="1200"/>
+              </a:spcAft>
+            </a:pPr>
+            <a:r>
+              <a:rPr sz="1700">
+                <a:solidFill>
+                  <a:srgbClr val="8A6410"/>
+                </a:solidFill>
+                <a:latin typeface="Calibri"/>
+              </a:rPr>
+              <a:t>▪  </a:t>
+            </a:r>
+            <a:r>
+              <a:rPr sz="1700" b="1">
+                <a:solidFill>
+                  <a:srgbClr val="0E4D33"/>
+                </a:solidFill>
+                <a:latin typeface="Calibri"/>
+              </a:rPr>
+              <a:t>Coming next:  </a:t>
+            </a:r>
+            <a:r>
+              <a:rPr sz="1700" b="0" i="0">
+                <a:solidFill>
+                  <a:srgbClr val="212A26"/>
+                </a:solidFill>
+                <a:latin typeface="Calibri"/>
+              </a:rPr>
+              <a:t>Chapter 4 — revising and proofreading: conciseness, clarity, and catching what spellcheck can't.</a:t>
             </a:r>
           </a:p>
         </p:txBody>

--- a/slides/ch03-organizing-and-drafting.pptx
+++ b/slides/ch03-organizing-and-drafting.pptx
@@ -14270,7 +14270,7 @@
         <p:spPr>
           <a:xfrm>
             <a:off x="1325880" y="1554480"/>
-            <a:ext cx="10332720" cy="640080"/>
+            <a:ext cx="10332720" cy="555171"/>
           </a:xfrm>
           <a:prstGeom prst="rect">
             <a:avLst/>
@@ -14289,7 +14289,7 @@
               </a:spcAft>
             </a:pPr>
             <a:r>
-              <a:rPr sz="1550" b="0" i="0">
+              <a:rPr sz="1350" b="0" i="0">
                 <a:solidFill>
                   <a:srgbClr val="212A26"/>
                 </a:solidFill>
@@ -14308,7 +14308,7 @@
         </p:nvSpPr>
         <p:spPr>
           <a:xfrm>
-            <a:off x="640080" y="2212848"/>
+            <a:off x="640080" y="2127939"/>
             <a:ext cx="420624" cy="420624"/>
           </a:xfrm>
           <a:prstGeom prst="ellipse">
@@ -14361,8 +14361,8 @@
         </p:nvSpPr>
         <p:spPr>
           <a:xfrm>
-            <a:off x="1325880" y="2194560"/>
-            <a:ext cx="10332720" cy="640080"/>
+            <a:off x="1325880" y="2109651"/>
+            <a:ext cx="10332720" cy="555171"/>
           </a:xfrm>
           <a:prstGeom prst="rect">
             <a:avLst/>
@@ -14381,7 +14381,7 @@
               </a:spcAft>
             </a:pPr>
             <a:r>
-              <a:rPr sz="1550" b="0" i="0">
+              <a:rPr sz="1350" b="0" i="0">
                 <a:solidFill>
                   <a:srgbClr val="212A26"/>
                 </a:solidFill>
@@ -14400,7 +14400,7 @@
         </p:nvSpPr>
         <p:spPr>
           <a:xfrm>
-            <a:off x="640080" y="2852928"/>
+            <a:off x="640080" y="2683110"/>
             <a:ext cx="420624" cy="420624"/>
           </a:xfrm>
           <a:prstGeom prst="ellipse">
@@ -14453,8 +14453,8 @@
         </p:nvSpPr>
         <p:spPr>
           <a:xfrm>
-            <a:off x="1325880" y="2834640"/>
-            <a:ext cx="10332720" cy="640080"/>
+            <a:off x="1325880" y="2664822"/>
+            <a:ext cx="10332720" cy="555171"/>
           </a:xfrm>
           <a:prstGeom prst="rect">
             <a:avLst/>
@@ -14473,7 +14473,7 @@
               </a:spcAft>
             </a:pPr>
             <a:r>
-              <a:rPr sz="1550" b="0" i="0">
+              <a:rPr sz="1350" b="0" i="0">
                 <a:solidFill>
                   <a:srgbClr val="212A26"/>
                 </a:solidFill>
@@ -14492,7 +14492,7 @@
         </p:nvSpPr>
         <p:spPr>
           <a:xfrm>
-            <a:off x="640080" y="3493008"/>
+            <a:off x="640080" y="3238281"/>
             <a:ext cx="420624" cy="420624"/>
           </a:xfrm>
           <a:prstGeom prst="ellipse">
@@ -14545,8 +14545,8 @@
         </p:nvSpPr>
         <p:spPr>
           <a:xfrm>
-            <a:off x="1325880" y="3474720"/>
-            <a:ext cx="10332720" cy="640080"/>
+            <a:off x="1325880" y="3219993"/>
+            <a:ext cx="10332720" cy="555171"/>
           </a:xfrm>
           <a:prstGeom prst="rect">
             <a:avLst/>
@@ -14565,7 +14565,7 @@
               </a:spcAft>
             </a:pPr>
             <a:r>
-              <a:rPr sz="1550" b="0" i="0">
+              <a:rPr sz="1350" b="0" i="0">
                 <a:solidFill>
                   <a:srgbClr val="212A26"/>
                 </a:solidFill>
@@ -14584,7 +14584,7 @@
         </p:nvSpPr>
         <p:spPr>
           <a:xfrm>
-            <a:off x="640080" y="4133088"/>
+            <a:off x="640080" y="3793452"/>
             <a:ext cx="420624" cy="420624"/>
           </a:xfrm>
           <a:prstGeom prst="ellipse">
@@ -14637,8 +14637,8 @@
         </p:nvSpPr>
         <p:spPr>
           <a:xfrm>
-            <a:off x="1325880" y="4114800"/>
-            <a:ext cx="10332720" cy="640080"/>
+            <a:off x="1325880" y="3775164"/>
+            <a:ext cx="10332720" cy="555171"/>
           </a:xfrm>
           <a:prstGeom prst="rect">
             <a:avLst/>
@@ -14657,7 +14657,7 @@
               </a:spcAft>
             </a:pPr>
             <a:r>
-              <a:rPr sz="1550" b="0" i="0">
+              <a:rPr sz="1350" b="0" i="0">
                 <a:solidFill>
                   <a:srgbClr val="212A26"/>
                 </a:solidFill>
@@ -14676,7 +14676,7 @@
         </p:nvSpPr>
         <p:spPr>
           <a:xfrm>
-            <a:off x="640080" y="4773168"/>
+            <a:off x="640080" y="4348623"/>
             <a:ext cx="420624" cy="420624"/>
           </a:xfrm>
           <a:prstGeom prst="ellipse">
@@ -14729,8 +14729,8 @@
         </p:nvSpPr>
         <p:spPr>
           <a:xfrm>
-            <a:off x="1325880" y="4754880"/>
-            <a:ext cx="10332720" cy="640080"/>
+            <a:off x="1325880" y="4330335"/>
+            <a:ext cx="10332720" cy="555171"/>
           </a:xfrm>
           <a:prstGeom prst="rect">
             <a:avLst/>
@@ -14749,7 +14749,7 @@
               </a:spcAft>
             </a:pPr>
             <a:r>
-              <a:rPr sz="1550" b="0" i="0">
+              <a:rPr sz="1350" b="0" i="0">
                 <a:solidFill>
                   <a:srgbClr val="212A26"/>
                 </a:solidFill>
@@ -14768,7 +14768,7 @@
         </p:nvSpPr>
         <p:spPr>
           <a:xfrm>
-            <a:off x="640080" y="5413248"/>
+            <a:off x="640080" y="4903794"/>
             <a:ext cx="420624" cy="420624"/>
           </a:xfrm>
           <a:prstGeom prst="ellipse">
@@ -14821,8 +14821,8 @@
         </p:nvSpPr>
         <p:spPr>
           <a:xfrm>
-            <a:off x="1325880" y="5394960"/>
-            <a:ext cx="10332720" cy="640080"/>
+            <a:off x="1325880" y="4885506"/>
+            <a:ext cx="10332720" cy="555171"/>
           </a:xfrm>
           <a:prstGeom prst="rect">
             <a:avLst/>
@@ -14841,7 +14841,7 @@
               </a:spcAft>
             </a:pPr>
             <a:r>
-              <a:rPr sz="1550" b="0" i="0">
+              <a:rPr sz="1350" b="0" i="0">
                 <a:solidFill>
                   <a:srgbClr val="212A26"/>
                 </a:solidFill>
@@ -14860,7 +14860,7 @@
         </p:nvSpPr>
         <p:spPr>
           <a:xfrm>
-            <a:off x="548640" y="5623560"/>
+            <a:off x="548640" y="5513829"/>
             <a:ext cx="10424160" cy="685800"/>
           </a:xfrm>
           <a:prstGeom prst="roundRect">

--- a/slides/ch03-organizing-and-drafting.pptx
+++ b/slides/ch03-organizing-and-drafting.pptx
@@ -6097,7 +6097,7 @@
                 </a:solidFill>
                 <a:latin typeface="Calibri"/>
               </a:rPr>
-              <a:t>BADM 225 · Chapter 3</a:t>
+              <a:t>BADM 225 · Chapter 3  ·  © Derek D. Bussan</a:t>
             </a:r>
           </a:p>
         </p:txBody>
@@ -6462,7 +6462,7 @@
                 </a:solidFill>
                 <a:latin typeface="Calibri"/>
               </a:rPr>
-              <a:t>BADM 225 · Chapter 3</a:t>
+              <a:t>BADM 225 · Chapter 3  ·  © Derek D. Bussan</a:t>
             </a:r>
           </a:p>
         </p:txBody>
@@ -6590,7 +6590,7 @@
                 </a:solidFill>
                 <a:latin typeface="Calibri"/>
               </a:rPr>
-              <a:t>BADM 225 · Chapter 3</a:t>
+              <a:t>BADM 225 · Chapter 3  ·  © Derek D. Bussan</a:t>
             </a:r>
           </a:p>
         </p:txBody>
@@ -7016,7 +7016,7 @@
                 </a:solidFill>
                 <a:latin typeface="Calibri"/>
               </a:rPr>
-              <a:t>BADM 225 · Chapter 3</a:t>
+              <a:t>BADM 225 · Chapter 3  ·  © Derek D. Bussan</a:t>
             </a:r>
           </a:p>
         </p:txBody>
@@ -7303,7 +7303,7 @@
                 </a:solidFill>
                 <a:latin typeface="Calibri"/>
               </a:rPr>
-              <a:t>BADM 225 · Chapter 3</a:t>
+              <a:t>BADM 225 · Chapter 3  ·  © Derek D. Bussan</a:t>
             </a:r>
           </a:p>
         </p:txBody>
@@ -8049,7 +8049,7 @@
                 </a:solidFill>
                 <a:latin typeface="Calibri"/>
               </a:rPr>
-              <a:t>BADM 225 · Chapter 3</a:t>
+              <a:t>BADM 225 · Chapter 3  ·  © Derek D. Bussan</a:t>
             </a:r>
           </a:p>
         </p:txBody>
@@ -8177,7 +8177,7 @@
                 </a:solidFill>
                 <a:latin typeface="Calibri"/>
               </a:rPr>
-              <a:t>BADM 225 · Chapter 3</a:t>
+              <a:t>BADM 225 · Chapter 3  ·  © Derek D. Bussan</a:t>
             </a:r>
           </a:p>
         </p:txBody>
@@ -8498,7 +8498,7 @@
                 </a:solidFill>
                 <a:latin typeface="Calibri"/>
               </a:rPr>
-              <a:t>BADM 225 · Chapter 3</a:t>
+              <a:t>BADM 225 · Chapter 3  ·  © Derek D. Bussan</a:t>
             </a:r>
           </a:p>
         </p:txBody>
@@ -8785,7 +8785,7 @@
                 </a:solidFill>
                 <a:latin typeface="Calibri"/>
               </a:rPr>
-              <a:t>BADM 225 · Chapter 3</a:t>
+              <a:t>BADM 225 · Chapter 3  ·  © Derek D. Bussan</a:t>
             </a:r>
           </a:p>
         </p:txBody>
@@ -9072,7 +9072,7 @@
                 </a:solidFill>
                 <a:latin typeface="Calibri"/>
               </a:rPr>
-              <a:t>BADM 225 · Chapter 3</a:t>
+              <a:t>BADM 225 · Chapter 3  ·  © Derek D. Bussan</a:t>
             </a:r>
           </a:p>
         </p:txBody>
@@ -9359,7 +9359,7 @@
                 </a:solidFill>
                 <a:latin typeface="Calibri"/>
               </a:rPr>
-              <a:t>BADM 225 · Chapter 3</a:t>
+              <a:t>BADM 225 · Chapter 3  ·  © Derek D. Bussan</a:t>
             </a:r>
           </a:p>
         </p:txBody>
@@ -9680,7 +9680,7 @@
                 </a:solidFill>
                 <a:latin typeface="Calibri"/>
               </a:rPr>
-              <a:t>BADM 225 · Chapter 3</a:t>
+              <a:t>BADM 225 · Chapter 3  ·  © Derek D. Bussan</a:t>
             </a:r>
           </a:p>
         </p:txBody>
@@ -10334,7 +10334,7 @@
                 </a:solidFill>
                 <a:latin typeface="Calibri"/>
               </a:rPr>
-              <a:t>BADM 225 · Chapter 3</a:t>
+              <a:t>BADM 225 · Chapter 3  ·  © Derek D. Bussan</a:t>
             </a:r>
           </a:p>
         </p:txBody>
@@ -10699,7 +10699,7 @@
                 </a:solidFill>
                 <a:latin typeface="Calibri"/>
               </a:rPr>
-              <a:t>BADM 225 · Chapter 3</a:t>
+              <a:t>BADM 225 · Chapter 3  ·  © Derek D. Bussan</a:t>
             </a:r>
           </a:p>
         </p:txBody>
@@ -10827,7 +10827,7 @@
                 </a:solidFill>
                 <a:latin typeface="Calibri"/>
               </a:rPr>
-              <a:t>BADM 225 · Chapter 3</a:t>
+              <a:t>BADM 225 · Chapter 3  ·  © Derek D. Bussan</a:t>
             </a:r>
           </a:p>
         </p:txBody>
@@ -11153,7 +11153,7 @@
                 </a:solidFill>
                 <a:latin typeface="Calibri"/>
               </a:rPr>
-              <a:t>BADM 225 · Chapter 3</a:t>
+              <a:t>BADM 225 · Chapter 3  ·  © Derek D. Bussan</a:t>
             </a:r>
           </a:p>
         </p:txBody>
@@ -11613,7 +11613,7 @@
                 </a:solidFill>
                 <a:latin typeface="Calibri"/>
               </a:rPr>
-              <a:t>BADM 225 · Chapter 3</a:t>
+              <a:t>BADM 225 · Chapter 3  ·  © Derek D. Bussan</a:t>
             </a:r>
           </a:p>
         </p:txBody>
@@ -11934,7 +11934,7 @@
                 </a:solidFill>
                 <a:latin typeface="Calibri"/>
               </a:rPr>
-              <a:t>BADM 225 · Chapter 3</a:t>
+              <a:t>BADM 225 · Chapter 3  ·  © Derek D. Bussan</a:t>
             </a:r>
           </a:p>
         </p:txBody>
@@ -12394,7 +12394,7 @@
                 </a:solidFill>
                 <a:latin typeface="Calibri"/>
               </a:rPr>
-              <a:t>BADM 225 · Chapter 3</a:t>
+              <a:t>BADM 225 · Chapter 3  ·  © Derek D. Bussan</a:t>
             </a:r>
           </a:p>
         </p:txBody>
@@ -13101,7 +13101,7 @@
                 </a:solidFill>
                 <a:latin typeface="Calibri"/>
               </a:rPr>
-              <a:t>BADM 225 · Chapter 3</a:t>
+              <a:t>BADM 225 · Chapter 3  ·  © Derek D. Bussan</a:t>
             </a:r>
           </a:p>
         </p:txBody>
@@ -13388,7 +13388,7 @@
                 </a:solidFill>
                 <a:latin typeface="Calibri"/>
               </a:rPr>
-              <a:t>BADM 225 · Chapter 3</a:t>
+              <a:t>BADM 225 · Chapter 3  ·  © Derek D. Bussan</a:t>
             </a:r>
           </a:p>
         </p:txBody>
@@ -13753,7 +13753,7 @@
                 </a:solidFill>
                 <a:latin typeface="Calibri"/>
               </a:rPr>
-              <a:t>BADM 225 · Chapter 3</a:t>
+              <a:t>BADM 225 · Chapter 3  ·  © Derek D. Bussan</a:t>
             </a:r>
           </a:p>
         </p:txBody>
@@ -13881,7 +13881,7 @@
                 </a:solidFill>
                 <a:latin typeface="Calibri"/>
               </a:rPr>
-              <a:t>BADM 225 · Chapter 3</a:t>
+              <a:t>BADM 225 · Chapter 3  ·  © Derek D. Bussan</a:t>
             </a:r>
           </a:p>
         </p:txBody>
@@ -14168,7 +14168,7 @@
                 </a:solidFill>
                 <a:latin typeface="Calibri"/>
               </a:rPr>
-              <a:t>BADM 225 · Chapter 3</a:t>
+              <a:t>BADM 225 · Chapter 3  ·  © Derek D. Bussan</a:t>
             </a:r>
           </a:p>
         </p:txBody>
@@ -15075,7 +15075,7 @@
                 </a:solidFill>
                 <a:latin typeface="Calibri"/>
               </a:rPr>
-              <a:t>BADM 225 · Chapter 3</a:t>
+              <a:t>BADM 225 · Chapter 3  ·  © Derek D. Bussan</a:t>
             </a:r>
           </a:p>
         </p:txBody>
@@ -15351,7 +15351,7 @@
                 </a:solidFill>
                 <a:latin typeface="Calibri"/>
               </a:rPr>
-              <a:t>BADM 225 · Chapter 3</a:t>
+              <a:t>BADM 225 · Chapter 3  ·  © Derek D. Bussan</a:t>
             </a:r>
           </a:p>
         </p:txBody>
@@ -15444,7 +15444,7 @@
                 </a:solidFill>
                 <a:latin typeface="Calibri"/>
               </a:rPr>
-              <a:t>BADM 225 · Chapter 3</a:t>
+              <a:t>BADM 225 · Chapter 3  ·  © Derek D. Bussan</a:t>
             </a:r>
           </a:p>
         </p:txBody>
@@ -15765,7 +15765,7 @@
                 </a:solidFill>
                 <a:latin typeface="Calibri"/>
               </a:rPr>
-              <a:t>BADM 225 · Chapter 3</a:t>
+              <a:t>BADM 225 · Chapter 3  ·  © Derek D. Bussan</a:t>
             </a:r>
           </a:p>
         </p:txBody>
@@ -16225,7 +16225,7 @@
                 </a:solidFill>
                 <a:latin typeface="Calibri"/>
               </a:rPr>
-              <a:t>BADM 225 · Chapter 3</a:t>
+              <a:t>BADM 225 · Chapter 3  ·  © Derek D. Bussan</a:t>
             </a:r>
           </a:p>
         </p:txBody>
@@ -16590,7 +16590,7 @@
                 </a:solidFill>
                 <a:latin typeface="Calibri"/>
               </a:rPr>
-              <a:t>BADM 225 · Chapter 3</a:t>
+              <a:t>BADM 225 · Chapter 3  ·  © Derek D. Bussan</a:t>
             </a:r>
           </a:p>
         </p:txBody>
@@ -16718,7 +16718,7 @@
                 </a:solidFill>
                 <a:latin typeface="Calibri"/>
               </a:rPr>
-              <a:t>BADM 225 · Chapter 3</a:t>
+              <a:t>BADM 225 · Chapter 3  ·  © Derek D. Bussan</a:t>
             </a:r>
           </a:p>
         </p:txBody>
@@ -17266,7 +17266,7 @@
                 </a:solidFill>
                 <a:latin typeface="Calibri"/>
               </a:rPr>
-              <a:t>BADM 225 · Chapter 3</a:t>
+              <a:t>BADM 225 · Chapter 3  ·  © Derek D. Bussan</a:t>
             </a:r>
           </a:p>
         </p:txBody>
@@ -17394,7 +17394,7 @@
                 </a:solidFill>
                 <a:latin typeface="Calibri"/>
               </a:rPr>
-              <a:t>BADM 225 · Chapter 3</a:t>
+              <a:t>BADM 225 · Chapter 3  ·  © Derek D. Bussan</a:t>
             </a:r>
           </a:p>
         </p:txBody>

--- a/slides/ch03-organizing-and-drafting.pptx
+++ b/slides/ch03-organizing-and-drafting.pptx
@@ -6004,7 +6004,7 @@
                 </a:solidFill>
                 <a:latin typeface="Calibri"/>
               </a:rPr>
-              <a:t>BADM 225 · Chapter 3  ·  Original instructional material — no publisher content</a:t>
+              <a:t>BADM 225 · Chapter 3  ·  Original material © 2026 Derek D. Bussan, PhD, MBA  ·  No publisher content</a:t>
             </a:r>
           </a:p>
         </p:txBody>
